--- a/presentacion/Presentacion.pptx
+++ b/presentacion/Presentacion.pptx
@@ -12,16 +12,16 @@
     <p:sldId id="259" r:id="rId3"/>
     <p:sldId id="257" r:id="rId4"/>
     <p:sldId id="258" r:id="rId5"/>
-    <p:sldId id="260" r:id="rId6"/>
-    <p:sldId id="261" r:id="rId7"/>
+    <p:sldId id="268" r:id="rId6"/>
+    <p:sldId id="269" r:id="rId7"/>
     <p:sldId id="262" r:id="rId8"/>
     <p:sldId id="263" r:id="rId9"/>
     <p:sldId id="264" r:id="rId10"/>
-    <p:sldId id="265" r:id="rId11"/>
-    <p:sldId id="266" r:id="rId12"/>
-    <p:sldId id="267" r:id="rId13"/>
-    <p:sldId id="268" r:id="rId14"/>
-    <p:sldId id="269" r:id="rId15"/>
+    <p:sldId id="260" r:id="rId11"/>
+    <p:sldId id="265" r:id="rId12"/>
+    <p:sldId id="261" r:id="rId13"/>
+    <p:sldId id="266" r:id="rId14"/>
+    <p:sldId id="267" r:id="rId15"/>
     <p:sldId id="270" r:id="rId16"/>
   </p:sldIdLst>
   <p:sldSz cx="12192000" cy="6858000"/>
@@ -211,7 +211,7 @@
           <a:p>
             <a:fld id="{C31B80E0-2FA0-4660-8D5F-4F957D0CB245}" type="datetimeFigureOut">
               <a:rPr lang="es-ES" smtClean="0"/>
-              <a:t>12/05/2025</a:t>
+              <a:t>13/05/2025</a:t>
             </a:fld>
             <a:endParaRPr lang="es-ES"/>
           </a:p>
@@ -709,7 +709,7 @@
           <a:p>
             <a:fld id="{B1C3AB0B-222F-4DB0-ADC9-B2167430BF50}" type="datetime1">
               <a:rPr lang="es-ES" smtClean="0"/>
-              <a:t>12/05/2025</a:t>
+              <a:t>13/05/2025</a:t>
             </a:fld>
             <a:endParaRPr lang="es-ES"/>
           </a:p>
@@ -910,7 +910,7 @@
           <a:p>
             <a:fld id="{EAD1A03F-1140-4EC3-825A-64621D76B6D4}" type="datetime1">
               <a:rPr lang="es-ES" smtClean="0"/>
-              <a:t>12/05/2025</a:t>
+              <a:t>13/05/2025</a:t>
             </a:fld>
             <a:endParaRPr lang="es-ES"/>
           </a:p>
@@ -1121,7 +1121,7 @@
           <a:p>
             <a:fld id="{9C2A3F48-89E8-499E-831F-03DB54D9BBB5}" type="datetime1">
               <a:rPr lang="es-ES" smtClean="0"/>
-              <a:t>12/05/2025</a:t>
+              <a:t>13/05/2025</a:t>
             </a:fld>
             <a:endParaRPr lang="es-ES"/>
           </a:p>
@@ -1374,7 +1374,7 @@
           <a:p>
             <a:fld id="{B4703AE7-BB3E-48DA-89E5-0943B3B46801}" type="datetime1">
               <a:rPr lang="es-ES" smtClean="0"/>
-              <a:t>12/05/2025</a:t>
+              <a:t>13/05/2025</a:t>
             </a:fld>
             <a:endParaRPr lang="es-ES"/>
           </a:p>
@@ -1714,7 +1714,7 @@
           <a:p>
             <a:fld id="{9EFAA296-26B6-48CC-B5E2-ED5B7F74E46E}" type="datetime1">
               <a:rPr lang="es-ES" smtClean="0"/>
-              <a:t>12/05/2025</a:t>
+              <a:t>13/05/2025</a:t>
             </a:fld>
             <a:endParaRPr lang="es-ES"/>
           </a:p>
@@ -1982,7 +1982,7 @@
           <a:p>
             <a:fld id="{090FE526-78A4-45FE-85D2-48F854AC25EB}" type="datetime1">
               <a:rPr lang="es-ES" smtClean="0"/>
-              <a:t>12/05/2025</a:t>
+              <a:t>13/05/2025</a:t>
             </a:fld>
             <a:endParaRPr lang="es-ES"/>
           </a:p>
@@ -2397,7 +2397,7 @@
           <a:p>
             <a:fld id="{125F1B9E-ED96-402A-A0A5-D7D0129D2590}" type="datetime1">
               <a:rPr lang="es-ES" smtClean="0"/>
-              <a:t>12/05/2025</a:t>
+              <a:t>13/05/2025</a:t>
             </a:fld>
             <a:endParaRPr lang="es-ES"/>
           </a:p>
@@ -2541,7 +2541,7 @@
           <a:p>
             <a:fld id="{F15D918A-A1FA-4CF3-84F4-FBACE0E64B02}" type="datetime1">
               <a:rPr lang="es-ES" smtClean="0"/>
-              <a:t>12/05/2025</a:t>
+              <a:t>13/05/2025</a:t>
             </a:fld>
             <a:endParaRPr lang="es-ES"/>
           </a:p>
@@ -2657,7 +2657,7 @@
           <a:p>
             <a:fld id="{A48D7788-CE1E-44AD-B7D7-1BC7EC977E65}" type="datetime1">
               <a:rPr lang="es-ES" smtClean="0"/>
-              <a:t>12/05/2025</a:t>
+              <a:t>13/05/2025</a:t>
             </a:fld>
             <a:endParaRPr lang="es-ES"/>
           </a:p>
@@ -2971,7 +2971,7 @@
           <a:p>
             <a:fld id="{D5E4CFBC-9A35-472A-8EFF-AD55C9488815}" type="datetime1">
               <a:rPr lang="es-ES" smtClean="0"/>
-              <a:t>12/05/2025</a:t>
+              <a:t>13/05/2025</a:t>
             </a:fld>
             <a:endParaRPr lang="es-ES"/>
           </a:p>
@@ -3262,7 +3262,7 @@
           <a:p>
             <a:fld id="{2559474E-732D-47ED-88BE-733A0AC2EA6B}" type="datetime1">
               <a:rPr lang="es-ES" smtClean="0"/>
-              <a:t>12/05/2025</a:t>
+              <a:t>13/05/2025</a:t>
             </a:fld>
             <a:endParaRPr lang="es-ES"/>
           </a:p>
@@ -3506,7 +3506,7 @@
           <a:p>
             <a:fld id="{886B8964-A04A-4168-BCAC-72BBFA244AE7}" type="datetime1">
               <a:rPr lang="es-ES" smtClean="0"/>
-              <a:t>12/05/2025</a:t>
+              <a:t>13/05/2025</a:t>
             </a:fld>
             <a:endParaRPr lang="es-ES"/>
           </a:p>
@@ -4557,6 +4557,216 @@
           <p:cNvPr id="2" name="Título 1">
             <a:extLst>
               <a:ext uri="{FF2B5EF4-FFF2-40B4-BE49-F238E27FC236}">
+                <a16:creationId xmlns:a16="http://schemas.microsoft.com/office/drawing/2014/main" id="{E6B63943-A4BA-B93C-B1BB-37552196A028}"/>
+              </a:ext>
+            </a:extLst>
+          </p:cNvPr>
+          <p:cNvSpPr>
+            <a:spLocks noGrp="1"/>
+          </p:cNvSpPr>
+          <p:nvPr>
+            <p:ph type="title"/>
+          </p:nvPr>
+        </p:nvSpPr>
+        <p:spPr>
+          <a:xfrm>
+            <a:off x="838200" y="-133907"/>
+            <a:ext cx="10515600" cy="1325563"/>
+          </a:xfrm>
+        </p:spPr>
+        <p:txBody>
+          <a:bodyPr/>
+          <a:lstStyle/>
+          <a:p>
+            <a:r>
+              <a:rPr lang="es-419" dirty="0">
+                <a:latin typeface="Times New Roman" panose="02020603050405020304" pitchFamily="18" charset="0"/>
+                <a:cs typeface="Times New Roman" panose="02020603050405020304" pitchFamily="18" charset="0"/>
+              </a:rPr>
+              <a:t>Preguntas planteadas.</a:t>
+            </a:r>
+            <a:endParaRPr lang="es-ES" dirty="0">
+              <a:latin typeface="Times New Roman" panose="02020603050405020304" pitchFamily="18" charset="0"/>
+              <a:cs typeface="Times New Roman" panose="02020603050405020304" pitchFamily="18" charset="0"/>
+            </a:endParaRPr>
+          </a:p>
+        </p:txBody>
+      </p:sp>
+      <p:sp>
+        <p:nvSpPr>
+          <p:cNvPr id="3" name="Marcador de contenido 2">
+            <a:extLst>
+              <a:ext uri="{FF2B5EF4-FFF2-40B4-BE49-F238E27FC236}">
+                <a16:creationId xmlns:a16="http://schemas.microsoft.com/office/drawing/2014/main" id="{3B18F49F-1CEF-CBAF-C848-19CC8B385AE0}"/>
+              </a:ext>
+            </a:extLst>
+          </p:cNvPr>
+          <p:cNvSpPr>
+            <a:spLocks noGrp="1"/>
+          </p:cNvSpPr>
+          <p:nvPr>
+            <p:ph idx="1"/>
+          </p:nvPr>
+        </p:nvSpPr>
+        <p:spPr>
+          <a:xfrm>
+            <a:off x="838200" y="930484"/>
+            <a:ext cx="10515600" cy="4351338"/>
+          </a:xfrm>
+        </p:spPr>
+        <p:txBody>
+          <a:bodyPr>
+            <a:normAutofit/>
+          </a:bodyPr>
+          <a:lstStyle/>
+          <a:p>
+            <a:r>
+              <a:rPr lang="es-ES" sz="2400" b="0" i="0" u="none" strike="noStrike" baseline="0" dirty="0">
+                <a:latin typeface="Times New Roman" panose="02020603050405020304" pitchFamily="18" charset="0"/>
+                <a:cs typeface="Times New Roman" panose="02020603050405020304" pitchFamily="18" charset="0"/>
+              </a:rPr>
+              <a:t>¿Qué combinaciones de productos se compran con mayor frecuencia en una misma factura?</a:t>
+            </a:r>
+          </a:p>
+          <a:p>
+            <a:pPr lvl="1"/>
+            <a:endParaRPr lang="es-ES" sz="2000" dirty="0">
+              <a:latin typeface="Times New Roman" panose="02020603050405020304" pitchFamily="18" charset="0"/>
+              <a:cs typeface="Times New Roman" panose="02020603050405020304" pitchFamily="18" charset="0"/>
+            </a:endParaRPr>
+          </a:p>
+        </p:txBody>
+      </p:sp>
+      <p:sp>
+        <p:nvSpPr>
+          <p:cNvPr id="4" name="Marcador de pie de página 3">
+            <a:extLst>
+              <a:ext uri="{FF2B5EF4-FFF2-40B4-BE49-F238E27FC236}">
+                <a16:creationId xmlns:a16="http://schemas.microsoft.com/office/drawing/2014/main" id="{41B6AEC8-5B82-3602-7A88-F06CCB5CDC13}"/>
+              </a:ext>
+            </a:extLst>
+          </p:cNvPr>
+          <p:cNvSpPr>
+            <a:spLocks noGrp="1"/>
+          </p:cNvSpPr>
+          <p:nvPr>
+            <p:ph type="ftr" sz="quarter" idx="11"/>
+          </p:nvPr>
+        </p:nvSpPr>
+        <p:spPr/>
+        <p:txBody>
+          <a:bodyPr/>
+          <a:lstStyle/>
+          <a:p>
+            <a:r>
+              <a:rPr lang="es-ES"/>
+              <a:t>Mini Proyecto</a:t>
+            </a:r>
+            <a:endParaRPr lang="es-ES" dirty="0"/>
+          </a:p>
+        </p:txBody>
+      </p:sp>
+      <p:sp>
+        <p:nvSpPr>
+          <p:cNvPr id="5" name="Marcador de número de diapositiva 4">
+            <a:extLst>
+              <a:ext uri="{FF2B5EF4-FFF2-40B4-BE49-F238E27FC236}">
+                <a16:creationId xmlns:a16="http://schemas.microsoft.com/office/drawing/2014/main" id="{2E7B9A47-0243-A532-EE15-B285E747A7D1}"/>
+              </a:ext>
+            </a:extLst>
+          </p:cNvPr>
+          <p:cNvSpPr>
+            <a:spLocks noGrp="1"/>
+          </p:cNvSpPr>
+          <p:nvPr>
+            <p:ph type="sldNum" sz="quarter" idx="12"/>
+          </p:nvPr>
+        </p:nvSpPr>
+        <p:spPr/>
+        <p:txBody>
+          <a:bodyPr/>
+          <a:lstStyle/>
+          <a:p>
+            <a:fld id="{57CCFD16-40BC-4790-95C3-D9FCA59BD7C9}" type="slidenum">
+              <a:rPr lang="es-ES" smtClean="0"/>
+              <a:pPr/>
+              <a:t>10</a:t>
+            </a:fld>
+            <a:endParaRPr lang="es-ES" dirty="0"/>
+          </a:p>
+        </p:txBody>
+      </p:sp>
+      <p:pic>
+        <p:nvPicPr>
+          <p:cNvPr id="7" name="Imagen 6" descr="Gráfico, Gráfico de cajas y bigotes&#10;&#10;El contenido generado por IA puede ser incorrecto.">
+            <a:extLst>
+              <a:ext uri="{FF2B5EF4-FFF2-40B4-BE49-F238E27FC236}">
+                <a16:creationId xmlns:a16="http://schemas.microsoft.com/office/drawing/2014/main" id="{FC07CE0F-8B77-4E64-3C52-1A86D4AE09C7}"/>
+              </a:ext>
+            </a:extLst>
+          </p:cNvPr>
+          <p:cNvPicPr>
+            <a:picLocks noChangeAspect="1"/>
+          </p:cNvPicPr>
+          <p:nvPr/>
+        </p:nvPicPr>
+        <p:blipFill>
+          <a:blip r:embed="rId2">
+            <a:extLst>
+              <a:ext uri="{28A0092B-C50C-407E-A947-70E740481C1C}">
+                <a14:useLocalDpi xmlns:a14="http://schemas.microsoft.com/office/drawing/2010/main" val="0"/>
+              </a:ext>
+            </a:extLst>
+          </a:blip>
+          <a:stretch>
+            <a:fillRect/>
+          </a:stretch>
+        </p:blipFill>
+        <p:spPr>
+          <a:xfrm>
+            <a:off x="2895594" y="1657140"/>
+            <a:ext cx="4540186" cy="4540186"/>
+          </a:xfrm>
+          <a:prstGeom prst="rect">
+            <a:avLst/>
+          </a:prstGeom>
+        </p:spPr>
+      </p:pic>
+    </p:spTree>
+    <p:extLst>
+      <p:ext uri="{BB962C8B-B14F-4D97-AF65-F5344CB8AC3E}">
+        <p14:creationId xmlns:p14="http://schemas.microsoft.com/office/powerpoint/2010/main" val="2455876532"/>
+      </p:ext>
+    </p:extLst>
+  </p:cSld>
+  <p:clrMapOvr>
+    <a:masterClrMapping/>
+  </p:clrMapOvr>
+</p:sld>
+</file>
+
+<file path=ppt/slides/slide11.xml><?xml version="1.0" encoding="utf-8"?>
+<p:sld xmlns:a="http://schemas.openxmlformats.org/drawingml/2006/main" xmlns:r="http://schemas.openxmlformats.org/officeDocument/2006/relationships" xmlns:p="http://schemas.openxmlformats.org/presentationml/2006/main">
+  <p:cSld>
+    <p:spTree>
+      <p:nvGrpSpPr>
+        <p:cNvPr id="1" name=""/>
+        <p:cNvGrpSpPr/>
+        <p:nvPr/>
+      </p:nvGrpSpPr>
+      <p:grpSpPr>
+        <a:xfrm>
+          <a:off x="0" y="0"/>
+          <a:ext cx="0" cy="0"/>
+          <a:chOff x="0" y="0"/>
+          <a:chExt cx="0" cy="0"/>
+        </a:xfrm>
+      </p:grpSpPr>
+      <p:sp>
+        <p:nvSpPr>
+          <p:cNvPr id="2" name="Título 1">
+            <a:extLst>
+              <a:ext uri="{FF2B5EF4-FFF2-40B4-BE49-F238E27FC236}">
                 <a16:creationId xmlns:a16="http://schemas.microsoft.com/office/drawing/2014/main" id="{4F68F57F-E595-ACD9-C6C7-3D8CB72BC742}"/>
               </a:ext>
             </a:extLst>
@@ -4697,7 +4907,7 @@
             <a:fld id="{57CCFD16-40BC-4790-95C3-D9FCA59BD7C9}" type="slidenum">
               <a:rPr lang="es-ES" smtClean="0"/>
               <a:pPr/>
-              <a:t>10</a:t>
+              <a:t>11</a:t>
             </a:fld>
             <a:endParaRPr lang="es-ES" dirty="0"/>
           </a:p>
@@ -4788,7 +4998,7 @@
 </p:sld>
 </file>
 
-<file path=ppt/slides/slide11.xml><?xml version="1.0" encoding="utf-8"?>
+<file path=ppt/slides/slide12.xml><?xml version="1.0" encoding="utf-8"?>
 <p:sld xmlns:a="http://schemas.openxmlformats.org/drawingml/2006/main" xmlns:r="http://schemas.openxmlformats.org/officeDocument/2006/relationships" xmlns:p="http://schemas.openxmlformats.org/presentationml/2006/main">
   <p:cSld>
     <p:spTree>
@@ -4810,7 +5020,7 @@
           <p:cNvPr id="2" name="Título 1">
             <a:extLst>
               <a:ext uri="{FF2B5EF4-FFF2-40B4-BE49-F238E27FC236}">
-                <a16:creationId xmlns:a16="http://schemas.microsoft.com/office/drawing/2014/main" id="{D0C81A7F-E746-FAD9-0A5C-DDB1F9736227}"/>
+                <a16:creationId xmlns:a16="http://schemas.microsoft.com/office/drawing/2014/main" id="{2C240DA3-36E2-CBFC-255E-869FB5E0CA32}"/>
               </a:ext>
             </a:extLst>
           </p:cNvPr>
@@ -4847,6 +5057,211 @@
           <p:cNvPr id="3" name="Marcador de contenido 2">
             <a:extLst>
               <a:ext uri="{FF2B5EF4-FFF2-40B4-BE49-F238E27FC236}">
+                <a16:creationId xmlns:a16="http://schemas.microsoft.com/office/drawing/2014/main" id="{EF9A0FCD-84D6-C30A-8D27-31BDF0247104}"/>
+              </a:ext>
+            </a:extLst>
+          </p:cNvPr>
+          <p:cNvSpPr>
+            <a:spLocks noGrp="1"/>
+          </p:cNvSpPr>
+          <p:nvPr>
+            <p:ph idx="1"/>
+          </p:nvPr>
+        </p:nvSpPr>
+        <p:spPr>
+          <a:xfrm>
+            <a:off x="838200" y="1157410"/>
+            <a:ext cx="10515600" cy="4351338"/>
+          </a:xfrm>
+        </p:spPr>
+        <p:txBody>
+          <a:bodyPr>
+            <a:normAutofit/>
+          </a:bodyPr>
+          <a:lstStyle/>
+          <a:p>
+            <a:pPr algn="l"/>
+            <a:r>
+              <a:rPr lang="es-ES" sz="2400" b="0" i="0" u="none" strike="noStrike" baseline="0" dirty="0">
+                <a:latin typeface="Times New Roman" panose="02020603050405020304" pitchFamily="18" charset="0"/>
+                <a:cs typeface="Times New Roman" panose="02020603050405020304" pitchFamily="18" charset="0"/>
+              </a:rPr>
+              <a:t>¿Qué productos mantienen un volumen de ventas estable, independientemente de cambios en su precio unitario?</a:t>
+            </a:r>
+            <a:endParaRPr lang="es-ES" sz="2400" dirty="0">
+              <a:latin typeface="Times New Roman" panose="02020603050405020304" pitchFamily="18" charset="0"/>
+              <a:cs typeface="Times New Roman" panose="02020603050405020304" pitchFamily="18" charset="0"/>
+            </a:endParaRPr>
+          </a:p>
+        </p:txBody>
+      </p:sp>
+      <p:sp>
+        <p:nvSpPr>
+          <p:cNvPr id="4" name="Marcador de pie de página 3">
+            <a:extLst>
+              <a:ext uri="{FF2B5EF4-FFF2-40B4-BE49-F238E27FC236}">
+                <a16:creationId xmlns:a16="http://schemas.microsoft.com/office/drawing/2014/main" id="{9D915A5C-562C-9028-65B8-C9854FD74802}"/>
+              </a:ext>
+            </a:extLst>
+          </p:cNvPr>
+          <p:cNvSpPr>
+            <a:spLocks noGrp="1"/>
+          </p:cNvSpPr>
+          <p:nvPr>
+            <p:ph type="ftr" sz="quarter" idx="11"/>
+          </p:nvPr>
+        </p:nvSpPr>
+        <p:spPr/>
+        <p:txBody>
+          <a:bodyPr/>
+          <a:lstStyle/>
+          <a:p>
+            <a:r>
+              <a:rPr lang="es-ES"/>
+              <a:t>Mini Proyecto</a:t>
+            </a:r>
+            <a:endParaRPr lang="es-ES" dirty="0"/>
+          </a:p>
+        </p:txBody>
+      </p:sp>
+      <p:sp>
+        <p:nvSpPr>
+          <p:cNvPr id="5" name="Marcador de número de diapositiva 4">
+            <a:extLst>
+              <a:ext uri="{FF2B5EF4-FFF2-40B4-BE49-F238E27FC236}">
+                <a16:creationId xmlns:a16="http://schemas.microsoft.com/office/drawing/2014/main" id="{A53B34DB-5513-8B4D-1A4C-D419A7274DF3}"/>
+              </a:ext>
+            </a:extLst>
+          </p:cNvPr>
+          <p:cNvSpPr>
+            <a:spLocks noGrp="1"/>
+          </p:cNvSpPr>
+          <p:nvPr>
+            <p:ph type="sldNum" sz="quarter" idx="12"/>
+          </p:nvPr>
+        </p:nvSpPr>
+        <p:spPr/>
+        <p:txBody>
+          <a:bodyPr/>
+          <a:lstStyle/>
+          <a:p>
+            <a:fld id="{57CCFD16-40BC-4790-95C3-D9FCA59BD7C9}" type="slidenum">
+              <a:rPr lang="es-ES" smtClean="0"/>
+              <a:pPr/>
+              <a:t>12</a:t>
+            </a:fld>
+            <a:endParaRPr lang="es-ES" dirty="0"/>
+          </a:p>
+        </p:txBody>
+      </p:sp>
+      <p:pic>
+        <p:nvPicPr>
+          <p:cNvPr id="7" name="Imagen 6" descr="Gráfico, Diagrama, Gráfico de rectángulos&#10;&#10;El contenido generado por IA puede ser incorrecto.">
+            <a:extLst>
+              <a:ext uri="{FF2B5EF4-FFF2-40B4-BE49-F238E27FC236}">
+                <a16:creationId xmlns:a16="http://schemas.microsoft.com/office/drawing/2014/main" id="{5601022E-D22B-2E25-31A6-E07E7AEB0DB6}"/>
+              </a:ext>
+            </a:extLst>
+          </p:cNvPr>
+          <p:cNvPicPr>
+            <a:picLocks noChangeAspect="1"/>
+          </p:cNvPicPr>
+          <p:nvPr/>
+        </p:nvPicPr>
+        <p:blipFill>
+          <a:blip r:embed="rId2">
+            <a:extLst>
+              <a:ext uri="{28A0092B-C50C-407E-A947-70E740481C1C}">
+                <a14:useLocalDpi xmlns:a14="http://schemas.microsoft.com/office/drawing/2010/main" val="0"/>
+              </a:ext>
+            </a:extLst>
+          </a:blip>
+          <a:stretch>
+            <a:fillRect/>
+          </a:stretch>
+        </p:blipFill>
+        <p:spPr>
+          <a:xfrm>
+            <a:off x="4089008" y="1977086"/>
+            <a:ext cx="4013984" cy="4013984"/>
+          </a:xfrm>
+          <a:prstGeom prst="rect">
+            <a:avLst/>
+          </a:prstGeom>
+        </p:spPr>
+      </p:pic>
+    </p:spTree>
+    <p:extLst>
+      <p:ext uri="{BB962C8B-B14F-4D97-AF65-F5344CB8AC3E}">
+        <p14:creationId xmlns:p14="http://schemas.microsoft.com/office/powerpoint/2010/main" val="2558315437"/>
+      </p:ext>
+    </p:extLst>
+  </p:cSld>
+  <p:clrMapOvr>
+    <a:masterClrMapping/>
+  </p:clrMapOvr>
+</p:sld>
+</file>
+
+<file path=ppt/slides/slide13.xml><?xml version="1.0" encoding="utf-8"?>
+<p:sld xmlns:a="http://schemas.openxmlformats.org/drawingml/2006/main" xmlns:r="http://schemas.openxmlformats.org/officeDocument/2006/relationships" xmlns:p="http://schemas.openxmlformats.org/presentationml/2006/main">
+  <p:cSld>
+    <p:spTree>
+      <p:nvGrpSpPr>
+        <p:cNvPr id="1" name=""/>
+        <p:cNvGrpSpPr/>
+        <p:nvPr/>
+      </p:nvGrpSpPr>
+      <p:grpSpPr>
+        <a:xfrm>
+          <a:off x="0" y="0"/>
+          <a:ext cx="0" cy="0"/>
+          <a:chOff x="0" y="0"/>
+          <a:chExt cx="0" cy="0"/>
+        </a:xfrm>
+      </p:grpSpPr>
+      <p:sp>
+        <p:nvSpPr>
+          <p:cNvPr id="2" name="Título 1">
+            <a:extLst>
+              <a:ext uri="{FF2B5EF4-FFF2-40B4-BE49-F238E27FC236}">
+                <a16:creationId xmlns:a16="http://schemas.microsoft.com/office/drawing/2014/main" id="{D0C81A7F-E746-FAD9-0A5C-DDB1F9736227}"/>
+              </a:ext>
+            </a:extLst>
+          </p:cNvPr>
+          <p:cNvSpPr>
+            <a:spLocks noGrp="1"/>
+          </p:cNvSpPr>
+          <p:nvPr>
+            <p:ph type="title"/>
+          </p:nvPr>
+        </p:nvSpPr>
+        <p:spPr>
+          <a:xfrm>
+            <a:off x="838200" y="0"/>
+            <a:ext cx="10515600" cy="1325563"/>
+          </a:xfrm>
+        </p:spPr>
+        <p:txBody>
+          <a:bodyPr/>
+          <a:lstStyle/>
+          <a:p>
+            <a:r>
+              <a:rPr lang="es-419" dirty="0">
+                <a:latin typeface="Times New Roman" panose="02020603050405020304" pitchFamily="18" charset="0"/>
+                <a:cs typeface="Times New Roman" panose="02020603050405020304" pitchFamily="18" charset="0"/>
+              </a:rPr>
+              <a:t>Preguntas planteadas.</a:t>
+            </a:r>
+            <a:endParaRPr lang="es-ES" dirty="0"/>
+          </a:p>
+        </p:txBody>
+      </p:sp>
+      <p:sp>
+        <p:nvSpPr>
+          <p:cNvPr id="3" name="Marcador de contenido 2">
+            <a:extLst>
+              <a:ext uri="{FF2B5EF4-FFF2-40B4-BE49-F238E27FC236}">
                 <a16:creationId xmlns:a16="http://schemas.microsoft.com/office/drawing/2014/main" id="{FFA0B18F-6CF4-B930-3DB4-AAC91F6801D5}"/>
               </a:ext>
             </a:extLst>
@@ -4938,7 +5353,7 @@
             <a:fld id="{57CCFD16-40BC-4790-95C3-D9FCA59BD7C9}" type="slidenum">
               <a:rPr lang="es-ES" smtClean="0"/>
               <a:pPr/>
-              <a:t>11</a:t>
+              <a:t>13</a:t>
             </a:fld>
             <a:endParaRPr lang="es-ES" dirty="0"/>
           </a:p>
@@ -4987,7 +5402,7 @@
 </p:sld>
 </file>
 
-<file path=ppt/slides/slide12.xml><?xml version="1.0" encoding="utf-8"?>
+<file path=ppt/slides/slide14.xml><?xml version="1.0" encoding="utf-8"?>
 <p:sld xmlns:a="http://schemas.openxmlformats.org/drawingml/2006/main" xmlns:r="http://schemas.openxmlformats.org/officeDocument/2006/relationships" xmlns:p="http://schemas.openxmlformats.org/presentationml/2006/main">
   <p:cSld>
     <p:spTree>
@@ -5137,7 +5552,7 @@
             <a:fld id="{57CCFD16-40BC-4790-95C3-D9FCA59BD7C9}" type="slidenum">
               <a:rPr lang="es-ES" smtClean="0"/>
               <a:pPr/>
-              <a:t>12</a:t>
+              <a:t>14</a:t>
             </a:fld>
             <a:endParaRPr lang="es-ES" dirty="0"/>
           </a:p>
@@ -5183,415 +5598,6 @@
     <p:extLst>
       <p:ext uri="{BB962C8B-B14F-4D97-AF65-F5344CB8AC3E}">
         <p14:creationId xmlns:p14="http://schemas.microsoft.com/office/powerpoint/2010/main" val="3447622527"/>
-      </p:ext>
-    </p:extLst>
-  </p:cSld>
-  <p:clrMapOvr>
-    <a:masterClrMapping/>
-  </p:clrMapOvr>
-</p:sld>
-</file>
-
-<file path=ppt/slides/slide13.xml><?xml version="1.0" encoding="utf-8"?>
-<p:sld xmlns:a="http://schemas.openxmlformats.org/drawingml/2006/main" xmlns:r="http://schemas.openxmlformats.org/officeDocument/2006/relationships" xmlns:p="http://schemas.openxmlformats.org/presentationml/2006/main">
-  <p:cSld>
-    <p:spTree>
-      <p:nvGrpSpPr>
-        <p:cNvPr id="1" name=""/>
-        <p:cNvGrpSpPr/>
-        <p:nvPr/>
-      </p:nvGrpSpPr>
-      <p:grpSpPr>
-        <a:xfrm>
-          <a:off x="0" y="0"/>
-          <a:ext cx="0" cy="0"/>
-          <a:chOff x="0" y="0"/>
-          <a:chExt cx="0" cy="0"/>
-        </a:xfrm>
-      </p:grpSpPr>
-      <p:sp>
-        <p:nvSpPr>
-          <p:cNvPr id="2" name="Título 1">
-            <a:extLst>
-              <a:ext uri="{FF2B5EF4-FFF2-40B4-BE49-F238E27FC236}">
-                <a16:creationId xmlns:a16="http://schemas.microsoft.com/office/drawing/2014/main" id="{650B8606-ED91-07B8-C9CC-D069A6E92DFC}"/>
-              </a:ext>
-            </a:extLst>
-          </p:cNvPr>
-          <p:cNvSpPr>
-            <a:spLocks noGrp="1"/>
-          </p:cNvSpPr>
-          <p:nvPr>
-            <p:ph type="title"/>
-          </p:nvPr>
-        </p:nvSpPr>
-        <p:spPr>
-          <a:xfrm>
-            <a:off x="838200" y="0"/>
-            <a:ext cx="10515600" cy="1325563"/>
-          </a:xfrm>
-        </p:spPr>
-        <p:txBody>
-          <a:bodyPr/>
-          <a:lstStyle/>
-          <a:p>
-            <a:r>
-              <a:rPr lang="es-419" dirty="0">
-                <a:latin typeface="Times New Roman" panose="02020603050405020304" pitchFamily="18" charset="0"/>
-                <a:cs typeface="Times New Roman" panose="02020603050405020304" pitchFamily="18" charset="0"/>
-              </a:rPr>
-              <a:t>Preguntas planteadas.</a:t>
-            </a:r>
-            <a:endParaRPr lang="es-ES" dirty="0"/>
-          </a:p>
-        </p:txBody>
-      </p:sp>
-      <p:sp>
-        <p:nvSpPr>
-          <p:cNvPr id="3" name="Marcador de contenido 2">
-            <a:extLst>
-              <a:ext uri="{FF2B5EF4-FFF2-40B4-BE49-F238E27FC236}">
-                <a16:creationId xmlns:a16="http://schemas.microsoft.com/office/drawing/2014/main" id="{7AB139BA-67A8-5E40-8EE8-F2DD7C870305}"/>
-              </a:ext>
-            </a:extLst>
-          </p:cNvPr>
-          <p:cNvSpPr>
-            <a:spLocks noGrp="1"/>
-          </p:cNvSpPr>
-          <p:nvPr>
-            <p:ph idx="1"/>
-          </p:nvPr>
-        </p:nvSpPr>
-        <p:spPr>
-          <a:xfrm>
-            <a:off x="838200" y="1056088"/>
-            <a:ext cx="10515600" cy="4351338"/>
-          </a:xfrm>
-        </p:spPr>
-        <p:txBody>
-          <a:bodyPr>
-            <a:normAutofit/>
-          </a:bodyPr>
-          <a:lstStyle/>
-          <a:p>
-            <a:r>
-              <a:rPr lang="es-ES" sz="2400" b="0" i="0" u="none" strike="noStrike" baseline="0" dirty="0">
-                <a:latin typeface="Times New Roman" panose="02020603050405020304" pitchFamily="18" charset="0"/>
-                <a:cs typeface="Times New Roman" panose="02020603050405020304" pitchFamily="18" charset="0"/>
-              </a:rPr>
-              <a:t>¿Cuál es la procedencia de los tickets? ¿Qué ciudad/ pueblo tiene un mayor número de tickets?</a:t>
-            </a:r>
-            <a:endParaRPr lang="es-ES" sz="2400" dirty="0">
-              <a:latin typeface="Times New Roman" panose="02020603050405020304" pitchFamily="18" charset="0"/>
-              <a:cs typeface="Times New Roman" panose="02020603050405020304" pitchFamily="18" charset="0"/>
-            </a:endParaRPr>
-          </a:p>
-        </p:txBody>
-      </p:sp>
-      <p:sp>
-        <p:nvSpPr>
-          <p:cNvPr id="4" name="Marcador de pie de página 3">
-            <a:extLst>
-              <a:ext uri="{FF2B5EF4-FFF2-40B4-BE49-F238E27FC236}">
-                <a16:creationId xmlns:a16="http://schemas.microsoft.com/office/drawing/2014/main" id="{ACDF7CF0-1F76-FBC7-863A-B8F88C406835}"/>
-              </a:ext>
-            </a:extLst>
-          </p:cNvPr>
-          <p:cNvSpPr>
-            <a:spLocks noGrp="1"/>
-          </p:cNvSpPr>
-          <p:nvPr>
-            <p:ph type="ftr" sz="quarter" idx="11"/>
-          </p:nvPr>
-        </p:nvSpPr>
-        <p:spPr/>
-        <p:txBody>
-          <a:bodyPr/>
-          <a:lstStyle/>
-          <a:p>
-            <a:r>
-              <a:rPr lang="es-ES"/>
-              <a:t>Mini Proyecto</a:t>
-            </a:r>
-            <a:endParaRPr lang="es-ES" dirty="0"/>
-          </a:p>
-        </p:txBody>
-      </p:sp>
-      <p:sp>
-        <p:nvSpPr>
-          <p:cNvPr id="5" name="Marcador de número de diapositiva 4">
-            <a:extLst>
-              <a:ext uri="{FF2B5EF4-FFF2-40B4-BE49-F238E27FC236}">
-                <a16:creationId xmlns:a16="http://schemas.microsoft.com/office/drawing/2014/main" id="{31619FCD-55A0-EE63-4D51-5BD4F9C2325C}"/>
-              </a:ext>
-            </a:extLst>
-          </p:cNvPr>
-          <p:cNvSpPr>
-            <a:spLocks noGrp="1"/>
-          </p:cNvSpPr>
-          <p:nvPr>
-            <p:ph type="sldNum" sz="quarter" idx="12"/>
-          </p:nvPr>
-        </p:nvSpPr>
-        <p:spPr/>
-        <p:txBody>
-          <a:bodyPr/>
-          <a:lstStyle/>
-          <a:p>
-            <a:fld id="{57CCFD16-40BC-4790-95C3-D9FCA59BD7C9}" type="slidenum">
-              <a:rPr lang="es-ES" smtClean="0"/>
-              <a:pPr/>
-              <a:t>13</a:t>
-            </a:fld>
-            <a:endParaRPr lang="es-ES" dirty="0"/>
-          </a:p>
-        </p:txBody>
-      </p:sp>
-      <p:pic>
-        <p:nvPicPr>
-          <p:cNvPr id="7" name="Imagen 6" descr="Imagen que contiene Diagrama&#10;&#10;El contenido generado por IA puede ser incorrecto.">
-            <a:extLst>
-              <a:ext uri="{FF2B5EF4-FFF2-40B4-BE49-F238E27FC236}">
-                <a16:creationId xmlns:a16="http://schemas.microsoft.com/office/drawing/2014/main" id="{59D54823-76D1-FC86-6761-5C1CE737E873}"/>
-              </a:ext>
-            </a:extLst>
-          </p:cNvPr>
-          <p:cNvPicPr>
-            <a:picLocks noChangeAspect="1"/>
-          </p:cNvPicPr>
-          <p:nvPr/>
-        </p:nvPicPr>
-        <p:blipFill>
-          <a:blip r:embed="rId2">
-            <a:extLst>
-              <a:ext uri="{28A0092B-C50C-407E-A947-70E740481C1C}">
-                <a14:useLocalDpi xmlns:a14="http://schemas.microsoft.com/office/drawing/2010/main" val="0"/>
-              </a:ext>
-            </a:extLst>
-          </a:blip>
-          <a:stretch>
-            <a:fillRect/>
-          </a:stretch>
-        </p:blipFill>
-        <p:spPr>
-          <a:xfrm>
-            <a:off x="2600835" y="1518534"/>
-            <a:ext cx="4449752" cy="4449752"/>
-          </a:xfrm>
-          <a:prstGeom prst="rect">
-            <a:avLst/>
-          </a:prstGeom>
-        </p:spPr>
-      </p:pic>
-    </p:spTree>
-    <p:extLst>
-      <p:ext uri="{BB962C8B-B14F-4D97-AF65-F5344CB8AC3E}">
-        <p14:creationId xmlns:p14="http://schemas.microsoft.com/office/powerpoint/2010/main" val="2851460273"/>
-      </p:ext>
-    </p:extLst>
-  </p:cSld>
-  <p:clrMapOvr>
-    <a:masterClrMapping/>
-  </p:clrMapOvr>
-</p:sld>
-</file>
-
-<file path=ppt/slides/slide14.xml><?xml version="1.0" encoding="utf-8"?>
-<p:sld xmlns:a="http://schemas.openxmlformats.org/drawingml/2006/main" xmlns:r="http://schemas.openxmlformats.org/officeDocument/2006/relationships" xmlns:p="http://schemas.openxmlformats.org/presentationml/2006/main">
-  <p:cSld>
-    <p:spTree>
-      <p:nvGrpSpPr>
-        <p:cNvPr id="1" name=""/>
-        <p:cNvGrpSpPr/>
-        <p:nvPr/>
-      </p:nvGrpSpPr>
-      <p:grpSpPr>
-        <a:xfrm>
-          <a:off x="0" y="0"/>
-          <a:ext cx="0" cy="0"/>
-          <a:chOff x="0" y="0"/>
-          <a:chExt cx="0" cy="0"/>
-        </a:xfrm>
-      </p:grpSpPr>
-      <p:sp>
-        <p:nvSpPr>
-          <p:cNvPr id="2" name="Título 1">
-            <a:extLst>
-              <a:ext uri="{FF2B5EF4-FFF2-40B4-BE49-F238E27FC236}">
-                <a16:creationId xmlns:a16="http://schemas.microsoft.com/office/drawing/2014/main" id="{470FC65E-9122-0F11-C709-2CAF608B11DA}"/>
-              </a:ext>
-            </a:extLst>
-          </p:cNvPr>
-          <p:cNvSpPr>
-            <a:spLocks noGrp="1"/>
-          </p:cNvSpPr>
-          <p:nvPr>
-            <p:ph type="title"/>
-          </p:nvPr>
-        </p:nvSpPr>
-        <p:spPr>
-          <a:xfrm>
-            <a:off x="838200" y="-190919"/>
-            <a:ext cx="10515600" cy="1325563"/>
-          </a:xfrm>
-        </p:spPr>
-        <p:txBody>
-          <a:bodyPr/>
-          <a:lstStyle/>
-          <a:p>
-            <a:r>
-              <a:rPr lang="es-419" dirty="0">
-                <a:latin typeface="Times New Roman" panose="02020603050405020304" pitchFamily="18" charset="0"/>
-                <a:cs typeface="Times New Roman" panose="02020603050405020304" pitchFamily="18" charset="0"/>
-              </a:rPr>
-              <a:t>Preguntas planteadas.</a:t>
-            </a:r>
-            <a:endParaRPr lang="es-ES" dirty="0"/>
-          </a:p>
-        </p:txBody>
-      </p:sp>
-      <p:sp>
-        <p:nvSpPr>
-          <p:cNvPr id="3" name="Marcador de contenido 2">
-            <a:extLst>
-              <a:ext uri="{FF2B5EF4-FFF2-40B4-BE49-F238E27FC236}">
-                <a16:creationId xmlns:a16="http://schemas.microsoft.com/office/drawing/2014/main" id="{6BDA08F0-32D6-7BB1-8676-1C4DBAD84093}"/>
-              </a:ext>
-            </a:extLst>
-          </p:cNvPr>
-          <p:cNvSpPr>
-            <a:spLocks noGrp="1"/>
-          </p:cNvSpPr>
-          <p:nvPr>
-            <p:ph idx="1"/>
-          </p:nvPr>
-        </p:nvSpPr>
-        <p:spPr>
-          <a:xfrm>
-            <a:off x="838200" y="818278"/>
-            <a:ext cx="10515600" cy="4351338"/>
-          </a:xfrm>
-        </p:spPr>
-        <p:txBody>
-          <a:bodyPr>
-            <a:normAutofit/>
-          </a:bodyPr>
-          <a:lstStyle/>
-          <a:p>
-            <a:pPr algn="l"/>
-            <a:r>
-              <a:rPr lang="es-ES" sz="2400" b="0" i="0" u="none" strike="noStrike" baseline="0" dirty="0">
-                <a:latin typeface="Times New Roman" panose="02020603050405020304" pitchFamily="18" charset="0"/>
-                <a:cs typeface="Times New Roman" panose="02020603050405020304" pitchFamily="18" charset="0"/>
-              </a:rPr>
-              <a:t>Muestra mediante un diagrama el número de tickets recogidos cada día de las semana. ¿Si tuvieses que cerrar un día entre semana qué día lo harías?</a:t>
-            </a:r>
-            <a:endParaRPr lang="es-ES" sz="2400" dirty="0">
-              <a:latin typeface="Times New Roman" panose="02020603050405020304" pitchFamily="18" charset="0"/>
-              <a:cs typeface="Times New Roman" panose="02020603050405020304" pitchFamily="18" charset="0"/>
-            </a:endParaRPr>
-          </a:p>
-        </p:txBody>
-      </p:sp>
-      <p:sp>
-        <p:nvSpPr>
-          <p:cNvPr id="4" name="Marcador de pie de página 3">
-            <a:extLst>
-              <a:ext uri="{FF2B5EF4-FFF2-40B4-BE49-F238E27FC236}">
-                <a16:creationId xmlns:a16="http://schemas.microsoft.com/office/drawing/2014/main" id="{C8122CA9-CEFB-A8C3-A381-9132870E6197}"/>
-              </a:ext>
-            </a:extLst>
-          </p:cNvPr>
-          <p:cNvSpPr>
-            <a:spLocks noGrp="1"/>
-          </p:cNvSpPr>
-          <p:nvPr>
-            <p:ph type="ftr" sz="quarter" idx="11"/>
-          </p:nvPr>
-        </p:nvSpPr>
-        <p:spPr/>
-        <p:txBody>
-          <a:bodyPr/>
-          <a:lstStyle/>
-          <a:p>
-            <a:r>
-              <a:rPr lang="es-ES"/>
-              <a:t>Mini Proyecto</a:t>
-            </a:r>
-            <a:endParaRPr lang="es-ES" dirty="0"/>
-          </a:p>
-        </p:txBody>
-      </p:sp>
-      <p:sp>
-        <p:nvSpPr>
-          <p:cNvPr id="5" name="Marcador de número de diapositiva 4">
-            <a:extLst>
-              <a:ext uri="{FF2B5EF4-FFF2-40B4-BE49-F238E27FC236}">
-                <a16:creationId xmlns:a16="http://schemas.microsoft.com/office/drawing/2014/main" id="{0B68B907-2033-D076-C1BE-DCAE9C888532}"/>
-              </a:ext>
-            </a:extLst>
-          </p:cNvPr>
-          <p:cNvSpPr>
-            <a:spLocks noGrp="1"/>
-          </p:cNvSpPr>
-          <p:nvPr>
-            <p:ph type="sldNum" sz="quarter" idx="12"/>
-          </p:nvPr>
-        </p:nvSpPr>
-        <p:spPr/>
-        <p:txBody>
-          <a:bodyPr/>
-          <a:lstStyle/>
-          <a:p>
-            <a:fld id="{57CCFD16-40BC-4790-95C3-D9FCA59BD7C9}" type="slidenum">
-              <a:rPr lang="es-ES" smtClean="0"/>
-              <a:pPr/>
-              <a:t>14</a:t>
-            </a:fld>
-            <a:endParaRPr lang="es-ES" dirty="0"/>
-          </a:p>
-        </p:txBody>
-      </p:sp>
-      <p:pic>
-        <p:nvPicPr>
-          <p:cNvPr id="7" name="Imagen 6" descr="Gráfico, Gráfico de barras&#10;&#10;El contenido generado por IA puede ser incorrecto.">
-            <a:extLst>
-              <a:ext uri="{FF2B5EF4-FFF2-40B4-BE49-F238E27FC236}">
-                <a16:creationId xmlns:a16="http://schemas.microsoft.com/office/drawing/2014/main" id="{25E9E832-A342-DD7E-0AA2-F6388882F589}"/>
-              </a:ext>
-            </a:extLst>
-          </p:cNvPr>
-          <p:cNvPicPr>
-            <a:picLocks noChangeAspect="1"/>
-          </p:cNvPicPr>
-          <p:nvPr/>
-        </p:nvPicPr>
-        <p:blipFill>
-          <a:blip r:embed="rId2">
-            <a:extLst>
-              <a:ext uri="{28A0092B-C50C-407E-A947-70E740481C1C}">
-                <a14:useLocalDpi xmlns:a14="http://schemas.microsoft.com/office/drawing/2010/main" val="0"/>
-              </a:ext>
-            </a:extLst>
-          </a:blip>
-          <a:stretch>
-            <a:fillRect/>
-          </a:stretch>
-        </p:blipFill>
-        <p:spPr>
-          <a:xfrm>
-            <a:off x="2823935" y="1899652"/>
-            <a:ext cx="6544130" cy="4039586"/>
-          </a:xfrm>
-          <a:prstGeom prst="rect">
-            <a:avLst/>
-          </a:prstGeom>
-        </p:spPr>
-      </p:pic>
-    </p:spTree>
-    <p:extLst>
-      <p:ext uri="{BB962C8B-B14F-4D97-AF65-F5344CB8AC3E}">
-        <p14:creationId xmlns:p14="http://schemas.microsoft.com/office/powerpoint/2010/main" val="118555930"/>
       </p:ext>
     </p:extLst>
   </p:cSld>
@@ -6296,7 +6302,7 @@
           <p:cNvPr id="2" name="Título 1">
             <a:extLst>
               <a:ext uri="{FF2B5EF4-FFF2-40B4-BE49-F238E27FC236}">
-                <a16:creationId xmlns:a16="http://schemas.microsoft.com/office/drawing/2014/main" id="{E6B63943-A4BA-B93C-B1BB-37552196A028}"/>
+                <a16:creationId xmlns:a16="http://schemas.microsoft.com/office/drawing/2014/main" id="{650B8606-ED91-07B8-C9CC-D069A6E92DFC}"/>
               </a:ext>
             </a:extLst>
           </p:cNvPr>
@@ -6309,7 +6315,7 @@
         </p:nvSpPr>
         <p:spPr>
           <a:xfrm>
-            <a:off x="838200" y="-133907"/>
+            <a:off x="838200" y="0"/>
             <a:ext cx="10515600" cy="1325563"/>
           </a:xfrm>
         </p:spPr>
@@ -6324,10 +6330,7 @@
               </a:rPr>
               <a:t>Preguntas planteadas.</a:t>
             </a:r>
-            <a:endParaRPr lang="es-ES" dirty="0">
-              <a:latin typeface="Times New Roman" panose="02020603050405020304" pitchFamily="18" charset="0"/>
-              <a:cs typeface="Times New Roman" panose="02020603050405020304" pitchFamily="18" charset="0"/>
-            </a:endParaRPr>
+            <a:endParaRPr lang="es-ES" dirty="0"/>
           </a:p>
         </p:txBody>
       </p:sp>
@@ -6336,7 +6339,7 @@
           <p:cNvPr id="3" name="Marcador de contenido 2">
             <a:extLst>
               <a:ext uri="{FF2B5EF4-FFF2-40B4-BE49-F238E27FC236}">
-                <a16:creationId xmlns:a16="http://schemas.microsoft.com/office/drawing/2014/main" id="{3B18F49F-1CEF-CBAF-C848-19CC8B385AE0}"/>
+                <a16:creationId xmlns:a16="http://schemas.microsoft.com/office/drawing/2014/main" id="{7AB139BA-67A8-5E40-8EE8-F2DD7C870305}"/>
               </a:ext>
             </a:extLst>
           </p:cNvPr>
@@ -6349,7 +6352,7 @@
         </p:nvSpPr>
         <p:spPr>
           <a:xfrm>
-            <a:off x="838200" y="930484"/>
+            <a:off x="838200" y="1056088"/>
             <a:ext cx="10515600" cy="4351338"/>
           </a:xfrm>
         </p:spPr>
@@ -6364,12 +6367,9 @@
                 <a:latin typeface="Times New Roman" panose="02020603050405020304" pitchFamily="18" charset="0"/>
                 <a:cs typeface="Times New Roman" panose="02020603050405020304" pitchFamily="18" charset="0"/>
               </a:rPr>
-              <a:t>¿Qué combinaciones de productos se compran con mayor frecuencia en una misma factura?</a:t>
-            </a:r>
-          </a:p>
-          <a:p>
-            <a:pPr lvl="1"/>
-            <a:endParaRPr lang="es-ES" sz="2000" dirty="0">
+              <a:t>¿Cuál es la procedencia de los tickets? ¿Qué ciudad/ pueblo tiene un mayor número de tickets?</a:t>
+            </a:r>
+            <a:endParaRPr lang="es-ES" sz="2400" dirty="0">
               <a:latin typeface="Times New Roman" panose="02020603050405020304" pitchFamily="18" charset="0"/>
               <a:cs typeface="Times New Roman" panose="02020603050405020304" pitchFamily="18" charset="0"/>
             </a:endParaRPr>
@@ -6381,7 +6381,7 @@
           <p:cNvPr id="4" name="Marcador de pie de página 3">
             <a:extLst>
               <a:ext uri="{FF2B5EF4-FFF2-40B4-BE49-F238E27FC236}">
-                <a16:creationId xmlns:a16="http://schemas.microsoft.com/office/drawing/2014/main" id="{41B6AEC8-5B82-3602-7A88-F06CCB5CDC13}"/>
+                <a16:creationId xmlns:a16="http://schemas.microsoft.com/office/drawing/2014/main" id="{ACDF7CF0-1F76-FBC7-863A-B8F88C406835}"/>
               </a:ext>
             </a:extLst>
           </p:cNvPr>
@@ -6410,7 +6410,7 @@
           <p:cNvPr id="5" name="Marcador de número de diapositiva 4">
             <a:extLst>
               <a:ext uri="{FF2B5EF4-FFF2-40B4-BE49-F238E27FC236}">
-                <a16:creationId xmlns:a16="http://schemas.microsoft.com/office/drawing/2014/main" id="{2E7B9A47-0243-A532-EE15-B285E747A7D1}"/>
+                <a16:creationId xmlns:a16="http://schemas.microsoft.com/office/drawing/2014/main" id="{31619FCD-55A0-EE63-4D51-5BD4F9C2325C}"/>
               </a:ext>
             </a:extLst>
           </p:cNvPr>
@@ -6437,10 +6437,10 @@
       </p:sp>
       <p:pic>
         <p:nvPicPr>
-          <p:cNvPr id="7" name="Imagen 6" descr="Gráfico, Gráfico de cajas y bigotes&#10;&#10;El contenido generado por IA puede ser incorrecto.">
-            <a:extLst>
-              <a:ext uri="{FF2B5EF4-FFF2-40B4-BE49-F238E27FC236}">
-                <a16:creationId xmlns:a16="http://schemas.microsoft.com/office/drawing/2014/main" id="{FC07CE0F-8B77-4E64-3C52-1A86D4AE09C7}"/>
+          <p:cNvPr id="7" name="Imagen 6" descr="Imagen que contiene Diagrama&#10;&#10;El contenido generado por IA puede ser incorrecto.">
+            <a:extLst>
+              <a:ext uri="{FF2B5EF4-FFF2-40B4-BE49-F238E27FC236}">
+                <a16:creationId xmlns:a16="http://schemas.microsoft.com/office/drawing/2014/main" id="{59D54823-76D1-FC86-6761-5C1CE737E873}"/>
               </a:ext>
             </a:extLst>
           </p:cNvPr>
@@ -6463,8 +6463,8 @@
         </p:blipFill>
         <p:spPr>
           <a:xfrm>
-            <a:off x="2895594" y="1657140"/>
-            <a:ext cx="4540186" cy="4540186"/>
+            <a:off x="2600835" y="1518534"/>
+            <a:ext cx="4449752" cy="4449752"/>
           </a:xfrm>
           <a:prstGeom prst="rect">
             <a:avLst/>
@@ -6474,7 +6474,7 @@
     </p:spTree>
     <p:extLst>
       <p:ext uri="{BB962C8B-B14F-4D97-AF65-F5344CB8AC3E}">
-        <p14:creationId xmlns:p14="http://schemas.microsoft.com/office/powerpoint/2010/main" val="2455876532"/>
+        <p14:creationId xmlns:p14="http://schemas.microsoft.com/office/powerpoint/2010/main" val="2851460273"/>
       </p:ext>
     </p:extLst>
   </p:cSld>
@@ -6506,7 +6506,7 @@
           <p:cNvPr id="2" name="Título 1">
             <a:extLst>
               <a:ext uri="{FF2B5EF4-FFF2-40B4-BE49-F238E27FC236}">
-                <a16:creationId xmlns:a16="http://schemas.microsoft.com/office/drawing/2014/main" id="{2C240DA3-36E2-CBFC-255E-869FB5E0CA32}"/>
+                <a16:creationId xmlns:a16="http://schemas.microsoft.com/office/drawing/2014/main" id="{470FC65E-9122-0F11-C709-2CAF608B11DA}"/>
               </a:ext>
             </a:extLst>
           </p:cNvPr>
@@ -6519,7 +6519,7 @@
         </p:nvSpPr>
         <p:spPr>
           <a:xfrm>
-            <a:off x="838200" y="0"/>
+            <a:off x="838200" y="-190919"/>
             <a:ext cx="10515600" cy="1325563"/>
           </a:xfrm>
         </p:spPr>
@@ -6543,7 +6543,7 @@
           <p:cNvPr id="3" name="Marcador de contenido 2">
             <a:extLst>
               <a:ext uri="{FF2B5EF4-FFF2-40B4-BE49-F238E27FC236}">
-                <a16:creationId xmlns:a16="http://schemas.microsoft.com/office/drawing/2014/main" id="{EF9A0FCD-84D6-C30A-8D27-31BDF0247104}"/>
+                <a16:creationId xmlns:a16="http://schemas.microsoft.com/office/drawing/2014/main" id="{6BDA08F0-32D6-7BB1-8676-1C4DBAD84093}"/>
               </a:ext>
             </a:extLst>
           </p:cNvPr>
@@ -6556,7 +6556,7 @@
         </p:nvSpPr>
         <p:spPr>
           <a:xfrm>
-            <a:off x="838200" y="1157410"/>
+            <a:off x="838200" y="818278"/>
             <a:ext cx="10515600" cy="4351338"/>
           </a:xfrm>
         </p:spPr>
@@ -6572,7 +6572,7 @@
                 <a:latin typeface="Times New Roman" panose="02020603050405020304" pitchFamily="18" charset="0"/>
                 <a:cs typeface="Times New Roman" panose="02020603050405020304" pitchFamily="18" charset="0"/>
               </a:rPr>
-              <a:t>¿Qué productos mantienen un volumen de ventas estable, independientemente de cambios en su precio unitario?</a:t>
+              <a:t>Muestra mediante un diagrama el número de tickets recogidos cada día de las semanas. ¿Si tuvieses que cerrar un día entre semana qué día lo harías?</a:t>
             </a:r>
             <a:endParaRPr lang="es-ES" sz="2400" dirty="0">
               <a:latin typeface="Times New Roman" panose="02020603050405020304" pitchFamily="18" charset="0"/>
@@ -6586,7 +6586,7 @@
           <p:cNvPr id="4" name="Marcador de pie de página 3">
             <a:extLst>
               <a:ext uri="{FF2B5EF4-FFF2-40B4-BE49-F238E27FC236}">
-                <a16:creationId xmlns:a16="http://schemas.microsoft.com/office/drawing/2014/main" id="{9D915A5C-562C-9028-65B8-C9854FD74802}"/>
+                <a16:creationId xmlns:a16="http://schemas.microsoft.com/office/drawing/2014/main" id="{C8122CA9-CEFB-A8C3-A381-9132870E6197}"/>
               </a:ext>
             </a:extLst>
           </p:cNvPr>
@@ -6615,7 +6615,7 @@
           <p:cNvPr id="5" name="Marcador de número de diapositiva 4">
             <a:extLst>
               <a:ext uri="{FF2B5EF4-FFF2-40B4-BE49-F238E27FC236}">
-                <a16:creationId xmlns:a16="http://schemas.microsoft.com/office/drawing/2014/main" id="{A53B34DB-5513-8B4D-1A4C-D419A7274DF3}"/>
+                <a16:creationId xmlns:a16="http://schemas.microsoft.com/office/drawing/2014/main" id="{0B68B907-2033-D076-C1BE-DCAE9C888532}"/>
               </a:ext>
             </a:extLst>
           </p:cNvPr>
@@ -6642,10 +6642,10 @@
       </p:sp>
       <p:pic>
         <p:nvPicPr>
-          <p:cNvPr id="7" name="Imagen 6" descr="Gráfico, Diagrama, Gráfico de rectángulos&#10;&#10;El contenido generado por IA puede ser incorrecto.">
-            <a:extLst>
-              <a:ext uri="{FF2B5EF4-FFF2-40B4-BE49-F238E27FC236}">
-                <a16:creationId xmlns:a16="http://schemas.microsoft.com/office/drawing/2014/main" id="{5601022E-D22B-2E25-31A6-E07E7AEB0DB6}"/>
+          <p:cNvPr id="7" name="Imagen 6" descr="Gráfico, Gráfico de barras&#10;&#10;El contenido generado por IA puede ser incorrecto.">
+            <a:extLst>
+              <a:ext uri="{FF2B5EF4-FFF2-40B4-BE49-F238E27FC236}">
+                <a16:creationId xmlns:a16="http://schemas.microsoft.com/office/drawing/2014/main" id="{25E9E832-A342-DD7E-0AA2-F6388882F589}"/>
               </a:ext>
             </a:extLst>
           </p:cNvPr>
@@ -6668,8 +6668,8 @@
         </p:blipFill>
         <p:spPr>
           <a:xfrm>
-            <a:off x="4089008" y="1977086"/>
-            <a:ext cx="4013984" cy="4013984"/>
+            <a:off x="2823935" y="1899652"/>
+            <a:ext cx="6544130" cy="4039586"/>
           </a:xfrm>
           <a:prstGeom prst="rect">
             <a:avLst/>
@@ -6679,7 +6679,7 @@
     </p:spTree>
     <p:extLst>
       <p:ext uri="{BB962C8B-B14F-4D97-AF65-F5344CB8AC3E}">
-        <p14:creationId xmlns:p14="http://schemas.microsoft.com/office/powerpoint/2010/main" val="2558315437"/>
+        <p14:creationId xmlns:p14="http://schemas.microsoft.com/office/powerpoint/2010/main" val="118555930"/>
       </p:ext>
     </p:extLst>
   </p:cSld>

--- a/presentacion/Presentacion.pptx
+++ b/presentacion/Presentacion.pptx
@@ -9,20 +9,20 @@
   </p:notesMasterIdLst>
   <p:sldIdLst>
     <p:sldId id="256" r:id="rId2"/>
-    <p:sldId id="259" r:id="rId3"/>
-    <p:sldId id="257" r:id="rId4"/>
-    <p:sldId id="258" r:id="rId5"/>
-    <p:sldId id="268" r:id="rId6"/>
-    <p:sldId id="269" r:id="rId7"/>
-    <p:sldId id="262" r:id="rId8"/>
-    <p:sldId id="263" r:id="rId9"/>
-    <p:sldId id="264" r:id="rId10"/>
-    <p:sldId id="260" r:id="rId11"/>
-    <p:sldId id="265" r:id="rId12"/>
-    <p:sldId id="261" r:id="rId13"/>
-    <p:sldId id="266" r:id="rId14"/>
-    <p:sldId id="267" r:id="rId15"/>
-    <p:sldId id="270" r:id="rId16"/>
+    <p:sldId id="257" r:id="rId3"/>
+    <p:sldId id="258" r:id="rId4"/>
+    <p:sldId id="268" r:id="rId5"/>
+    <p:sldId id="271" r:id="rId6"/>
+    <p:sldId id="272" r:id="rId7"/>
+    <p:sldId id="273" r:id="rId8"/>
+    <p:sldId id="274" r:id="rId9"/>
+    <p:sldId id="275" r:id="rId10"/>
+    <p:sldId id="276" r:id="rId11"/>
+    <p:sldId id="277" r:id="rId12"/>
+    <p:sldId id="278" r:id="rId13"/>
+    <p:sldId id="279" r:id="rId14"/>
+    <p:sldId id="281" r:id="rId15"/>
+    <p:sldId id="282" r:id="rId16"/>
   </p:sldIdLst>
   <p:sldSz cx="12192000" cy="6858000"/>
   <p:notesSz cx="6858000" cy="9144000"/>
@@ -4540,7 +4540,13 @@
   <p:cSld>
     <p:spTree>
       <p:nvGrpSpPr>
-        <p:cNvPr id="1" name=""/>
+        <p:cNvPr id="1" name="">
+          <a:extLst>
+            <a:ext uri="{FF2B5EF4-FFF2-40B4-BE49-F238E27FC236}">
+              <a16:creationId xmlns:a16="http://schemas.microsoft.com/office/drawing/2014/main" id="{C92391F7-D766-1782-7834-90A4581E1947}"/>
+            </a:ext>
+          </a:extLst>
+        </p:cNvPr>
         <p:cNvGrpSpPr/>
         <p:nvPr/>
       </p:nvGrpSpPr>
@@ -4554,95 +4560,10 @@
       </p:grpSpPr>
       <p:sp>
         <p:nvSpPr>
-          <p:cNvPr id="2" name="Título 1">
-            <a:extLst>
-              <a:ext uri="{FF2B5EF4-FFF2-40B4-BE49-F238E27FC236}">
-                <a16:creationId xmlns:a16="http://schemas.microsoft.com/office/drawing/2014/main" id="{E6B63943-A4BA-B93C-B1BB-37552196A028}"/>
-              </a:ext>
-            </a:extLst>
-          </p:cNvPr>
-          <p:cNvSpPr>
-            <a:spLocks noGrp="1"/>
-          </p:cNvSpPr>
-          <p:nvPr>
-            <p:ph type="title"/>
-          </p:nvPr>
-        </p:nvSpPr>
-        <p:spPr>
-          <a:xfrm>
-            <a:off x="838200" y="-133907"/>
-            <a:ext cx="10515600" cy="1325563"/>
-          </a:xfrm>
-        </p:spPr>
-        <p:txBody>
-          <a:bodyPr/>
-          <a:lstStyle/>
-          <a:p>
-            <a:r>
-              <a:rPr lang="es-419" dirty="0">
-                <a:latin typeface="Times New Roman" panose="02020603050405020304" pitchFamily="18" charset="0"/>
-                <a:cs typeface="Times New Roman" panose="02020603050405020304" pitchFamily="18" charset="0"/>
-              </a:rPr>
-              <a:t>Preguntas planteadas.</a:t>
-            </a:r>
-            <a:endParaRPr lang="es-ES" dirty="0">
-              <a:latin typeface="Times New Roman" panose="02020603050405020304" pitchFamily="18" charset="0"/>
-              <a:cs typeface="Times New Roman" panose="02020603050405020304" pitchFamily="18" charset="0"/>
-            </a:endParaRPr>
-          </a:p>
-        </p:txBody>
-      </p:sp>
-      <p:sp>
-        <p:nvSpPr>
-          <p:cNvPr id="3" name="Marcador de contenido 2">
-            <a:extLst>
-              <a:ext uri="{FF2B5EF4-FFF2-40B4-BE49-F238E27FC236}">
-                <a16:creationId xmlns:a16="http://schemas.microsoft.com/office/drawing/2014/main" id="{3B18F49F-1CEF-CBAF-C848-19CC8B385AE0}"/>
-              </a:ext>
-            </a:extLst>
-          </p:cNvPr>
-          <p:cNvSpPr>
-            <a:spLocks noGrp="1"/>
-          </p:cNvSpPr>
-          <p:nvPr>
-            <p:ph idx="1"/>
-          </p:nvPr>
-        </p:nvSpPr>
-        <p:spPr>
-          <a:xfrm>
-            <a:off x="838200" y="930484"/>
-            <a:ext cx="10515600" cy="4351338"/>
-          </a:xfrm>
-        </p:spPr>
-        <p:txBody>
-          <a:bodyPr>
-            <a:normAutofit/>
-          </a:bodyPr>
-          <a:lstStyle/>
-          <a:p>
-            <a:r>
-              <a:rPr lang="es-ES" sz="2400" b="0" i="0" u="none" strike="noStrike" baseline="0" dirty="0">
-                <a:latin typeface="Times New Roman" panose="02020603050405020304" pitchFamily="18" charset="0"/>
-                <a:cs typeface="Times New Roman" panose="02020603050405020304" pitchFamily="18" charset="0"/>
-              </a:rPr>
-              <a:t>¿Qué combinaciones de productos se compran con mayor frecuencia en una misma factura?</a:t>
-            </a:r>
-          </a:p>
-          <a:p>
-            <a:pPr lvl="1"/>
-            <a:endParaRPr lang="es-ES" sz="2000" dirty="0">
-              <a:latin typeface="Times New Roman" panose="02020603050405020304" pitchFamily="18" charset="0"/>
-              <a:cs typeface="Times New Roman" panose="02020603050405020304" pitchFamily="18" charset="0"/>
-            </a:endParaRPr>
-          </a:p>
-        </p:txBody>
-      </p:sp>
-      <p:sp>
-        <p:nvSpPr>
           <p:cNvPr id="4" name="Marcador de pie de página 3">
             <a:extLst>
               <a:ext uri="{FF2B5EF4-FFF2-40B4-BE49-F238E27FC236}">
-                <a16:creationId xmlns:a16="http://schemas.microsoft.com/office/drawing/2014/main" id="{41B6AEC8-5B82-3602-7A88-F06CCB5CDC13}"/>
+                <a16:creationId xmlns:a16="http://schemas.microsoft.com/office/drawing/2014/main" id="{A7B7A852-CF77-880C-A8B2-73BCFE7E6BA9}"/>
               </a:ext>
             </a:extLst>
           </p:cNvPr>
@@ -4671,7 +4592,7 @@
           <p:cNvPr id="5" name="Marcador de número de diapositiva 4">
             <a:extLst>
               <a:ext uri="{FF2B5EF4-FFF2-40B4-BE49-F238E27FC236}">
-                <a16:creationId xmlns:a16="http://schemas.microsoft.com/office/drawing/2014/main" id="{2E7B9A47-0243-A532-EE15-B285E747A7D1}"/>
+                <a16:creationId xmlns:a16="http://schemas.microsoft.com/office/drawing/2014/main" id="{099808B0-14F9-DAA8-82D4-E55EA1ACCA01}"/>
               </a:ext>
             </a:extLst>
           </p:cNvPr>
@@ -4696,12 +4617,121 @@
           </a:p>
         </p:txBody>
       </p:sp>
+      <p:sp>
+        <p:nvSpPr>
+          <p:cNvPr id="6" name="Rectángulo 5">
+            <a:extLst>
+              <a:ext uri="{FF2B5EF4-FFF2-40B4-BE49-F238E27FC236}">
+                <a16:creationId xmlns:a16="http://schemas.microsoft.com/office/drawing/2014/main" id="{ACEA1EB8-10F4-DE2B-828C-E1C8367F6625}"/>
+              </a:ext>
+            </a:extLst>
+          </p:cNvPr>
+          <p:cNvSpPr/>
+          <p:nvPr/>
+        </p:nvSpPr>
+        <p:spPr>
+          <a:xfrm>
+            <a:off x="0" y="0"/>
+            <a:ext cx="9350477" cy="707886"/>
+          </a:xfrm>
+          <a:prstGeom prst="rect">
+            <a:avLst/>
+          </a:prstGeom>
+          <a:noFill/>
+        </p:spPr>
+        <p:txBody>
+          <a:bodyPr wrap="square" lIns="91440" tIns="45720" rIns="91440" bIns="45720" anchor="ctr">
+            <a:spAutoFit/>
+          </a:bodyPr>
+          <a:lstStyle/>
+          <a:p>
+            <a:r>
+              <a:rPr lang="es-419" sz="4000" b="1" cap="none" spc="0" dirty="0">
+                <a:ln w="22225">
+                  <a:solidFill>
+                    <a:srgbClr val="00965F"/>
+                  </a:solidFill>
+                  <a:prstDash val="solid"/>
+                </a:ln>
+                <a:solidFill>
+                  <a:srgbClr val="00965F"/>
+                </a:solidFill>
+                <a:effectLst/>
+                <a:latin typeface="Cooper Black" panose="020F0502020204030204" pitchFamily="18" charset="0"/>
+              </a:rPr>
+              <a:t>PREGUNTAS PLANTEADAS</a:t>
+            </a:r>
+            <a:endParaRPr lang="es-ES" sz="4000" b="1" cap="none" spc="0" dirty="0">
+              <a:ln w="22225">
+                <a:solidFill>
+                  <a:srgbClr val="00965F"/>
+                </a:solidFill>
+                <a:prstDash val="solid"/>
+              </a:ln>
+              <a:solidFill>
+                <a:srgbClr val="00965F"/>
+              </a:solidFill>
+              <a:effectLst/>
+              <a:latin typeface="Cooper Black" panose="020F0502020204030204" pitchFamily="18" charset="0"/>
+            </a:endParaRPr>
+          </a:p>
+        </p:txBody>
+      </p:sp>
+      <p:sp>
+        <p:nvSpPr>
+          <p:cNvPr id="10" name="CuadroTexto 9">
+            <a:extLst>
+              <a:ext uri="{FF2B5EF4-FFF2-40B4-BE49-F238E27FC236}">
+                <a16:creationId xmlns:a16="http://schemas.microsoft.com/office/drawing/2014/main" id="{507FA8C0-2EF9-7B93-373C-90551CB5D5DF}"/>
+              </a:ext>
+            </a:extLst>
+          </p:cNvPr>
+          <p:cNvSpPr txBox="1"/>
+          <p:nvPr/>
+        </p:nvSpPr>
+        <p:spPr>
+          <a:xfrm>
+            <a:off x="0" y="553998"/>
+            <a:ext cx="12192000" cy="707886"/>
+          </a:xfrm>
+          <a:prstGeom prst="rect">
+            <a:avLst/>
+          </a:prstGeom>
+          <a:noFill/>
+        </p:spPr>
+        <p:txBody>
+          <a:bodyPr wrap="square" rtlCol="0" anchor="ctr">
+            <a:spAutoFit/>
+          </a:bodyPr>
+          <a:lstStyle/>
+          <a:p>
+            <a:pPr algn="ctr"/>
+            <a:r>
+              <a:rPr lang="es-ES" sz="2000" dirty="0">
+                <a:latin typeface="Times New Roman" panose="02020603050405020304" pitchFamily="18" charset="0"/>
+                <a:cs typeface="Times New Roman" panose="02020603050405020304" pitchFamily="18" charset="0"/>
+              </a:rPr>
+              <a:t>Si consideramos la categoría de FRUTAS Y VERDURAS, </a:t>
+            </a:r>
+          </a:p>
+          <a:p>
+            <a:pPr algn="ctr"/>
+            <a:r>
+              <a:rPr lang="es-ES" sz="2000" dirty="0">
+                <a:latin typeface="Times New Roman" panose="02020603050405020304" pitchFamily="18" charset="0"/>
+                <a:cs typeface="Times New Roman" panose="02020603050405020304" pitchFamily="18" charset="0"/>
+              </a:rPr>
+              <a:t>¿Cuáles son los 5 productos más vendidos? ¿Cuántos kilos se han vendido de cada uno de estos productos?</a:t>
+            </a:r>
+          </a:p>
+        </p:txBody>
+      </p:sp>
       <p:pic>
         <p:nvPicPr>
-          <p:cNvPr id="7" name="Imagen 6" descr="Gráfico, Gráfico de cajas y bigotes&#10;&#10;El contenido generado por IA puede ser incorrecto.">
-            <a:extLst>
-              <a:ext uri="{FF2B5EF4-FFF2-40B4-BE49-F238E27FC236}">
-                <a16:creationId xmlns:a16="http://schemas.microsoft.com/office/drawing/2014/main" id="{FC07CE0F-8B77-4E64-3C52-1A86D4AE09C7}"/>
+          <p:cNvPr id="3" name="Imagen 2" descr="Gráfico, Gráfico de embudo&#10;&#10;El contenido generado por IA puede ser incorrecto.">
+            <a:extLst>
+              <a:ext uri="{FF2B5EF4-FFF2-40B4-BE49-F238E27FC236}">
+                <a16:creationId xmlns:a16="http://schemas.microsoft.com/office/drawing/2014/main" id="{6CEAC340-7BB6-E628-060F-860E9A9FCE1D}"/>
               </a:ext>
             </a:extLst>
           </p:cNvPr>
@@ -4724,8 +4754,44 @@
         </p:blipFill>
         <p:spPr>
           <a:xfrm>
-            <a:off x="2895594" y="1657140"/>
-            <a:ext cx="4540186" cy="4540186"/>
+            <a:off x="963561" y="1594398"/>
+            <a:ext cx="4429438" cy="4429438"/>
+          </a:xfrm>
+          <a:prstGeom prst="rect">
+            <a:avLst/>
+          </a:prstGeom>
+        </p:spPr>
+      </p:pic>
+      <p:pic>
+        <p:nvPicPr>
+          <p:cNvPr id="8" name="Imagen 7" descr="Interfaz de usuario gráfica, Aplicación, Teams&#10;&#10;El contenido generado por IA puede ser incorrecto.">
+            <a:extLst>
+              <a:ext uri="{FF2B5EF4-FFF2-40B4-BE49-F238E27FC236}">
+                <a16:creationId xmlns:a16="http://schemas.microsoft.com/office/drawing/2014/main" id="{0B209E94-6B91-DA2B-F798-4BFF865FCB91}"/>
+              </a:ext>
+            </a:extLst>
+          </p:cNvPr>
+          <p:cNvPicPr>
+            <a:picLocks noChangeAspect="1"/>
+          </p:cNvPicPr>
+          <p:nvPr/>
+        </p:nvPicPr>
+        <p:blipFill>
+          <a:blip r:embed="rId3">
+            <a:extLst>
+              <a:ext uri="{28A0092B-C50C-407E-A947-70E740481C1C}">
+                <a14:useLocalDpi xmlns:a14="http://schemas.microsoft.com/office/drawing/2010/main" val="0"/>
+              </a:ext>
+            </a:extLst>
+          </a:blip>
+          <a:stretch>
+            <a:fillRect/>
+          </a:stretch>
+        </p:blipFill>
+        <p:spPr>
+          <a:xfrm>
+            <a:off x="6348412" y="2043112"/>
+            <a:ext cx="4524375" cy="2771775"/>
           </a:xfrm>
           <a:prstGeom prst="rect">
             <a:avLst/>
@@ -4735,7 +4801,7 @@
     </p:spTree>
     <p:extLst>
       <p:ext uri="{BB962C8B-B14F-4D97-AF65-F5344CB8AC3E}">
-        <p14:creationId xmlns:p14="http://schemas.microsoft.com/office/powerpoint/2010/main" val="2455876532"/>
+        <p14:creationId xmlns:p14="http://schemas.microsoft.com/office/powerpoint/2010/main" val="3427698243"/>
       </p:ext>
     </p:extLst>
   </p:cSld>
@@ -4750,7 +4816,13 @@
   <p:cSld>
     <p:spTree>
       <p:nvGrpSpPr>
-        <p:cNvPr id="1" name=""/>
+        <p:cNvPr id="1" name="">
+          <a:extLst>
+            <a:ext uri="{FF2B5EF4-FFF2-40B4-BE49-F238E27FC236}">
+              <a16:creationId xmlns:a16="http://schemas.microsoft.com/office/drawing/2014/main" id="{5EEFA5B9-719D-72B7-4CE8-6C037A81F61A}"/>
+            </a:ext>
+          </a:extLst>
+        </p:cNvPr>
         <p:cNvGrpSpPr/>
         <p:nvPr/>
       </p:nvGrpSpPr>
@@ -4764,102 +4836,10 @@
       </p:grpSpPr>
       <p:sp>
         <p:nvSpPr>
-          <p:cNvPr id="2" name="Título 1">
-            <a:extLst>
-              <a:ext uri="{FF2B5EF4-FFF2-40B4-BE49-F238E27FC236}">
-                <a16:creationId xmlns:a16="http://schemas.microsoft.com/office/drawing/2014/main" id="{4F68F57F-E595-ACD9-C6C7-3D8CB72BC742}"/>
-              </a:ext>
-            </a:extLst>
-          </p:cNvPr>
-          <p:cNvSpPr>
-            <a:spLocks noGrp="1"/>
-          </p:cNvSpPr>
-          <p:nvPr>
-            <p:ph type="title"/>
-          </p:nvPr>
-        </p:nvSpPr>
-        <p:spPr>
-          <a:xfrm>
-            <a:off x="838200" y="-79488"/>
-            <a:ext cx="10515600" cy="1325563"/>
-          </a:xfrm>
-        </p:spPr>
-        <p:txBody>
-          <a:bodyPr/>
-          <a:lstStyle/>
-          <a:p>
-            <a:r>
-              <a:rPr lang="es-419" dirty="0">
-                <a:latin typeface="Times New Roman" panose="02020603050405020304" pitchFamily="18" charset="0"/>
-                <a:cs typeface="Times New Roman" panose="02020603050405020304" pitchFamily="18" charset="0"/>
-              </a:rPr>
-              <a:t>Preguntas planteadas.</a:t>
-            </a:r>
-            <a:endParaRPr lang="es-ES" dirty="0"/>
-          </a:p>
-        </p:txBody>
-      </p:sp>
-      <p:sp>
-        <p:nvSpPr>
-          <p:cNvPr id="3" name="Marcador de contenido 2">
-            <a:extLst>
-              <a:ext uri="{FF2B5EF4-FFF2-40B4-BE49-F238E27FC236}">
-                <a16:creationId xmlns:a16="http://schemas.microsoft.com/office/drawing/2014/main" id="{8D10A33B-95BF-6708-C9B6-CEA1D2649310}"/>
-              </a:ext>
-            </a:extLst>
-          </p:cNvPr>
-          <p:cNvSpPr>
-            <a:spLocks noGrp="1"/>
-          </p:cNvSpPr>
-          <p:nvPr>
-            <p:ph idx="1"/>
-          </p:nvPr>
-        </p:nvSpPr>
-        <p:spPr>
-          <a:xfrm>
-            <a:off x="838200" y="906201"/>
-            <a:ext cx="10515600" cy="4351338"/>
-          </a:xfrm>
-        </p:spPr>
-        <p:txBody>
-          <a:bodyPr>
-            <a:normAutofit/>
-          </a:bodyPr>
-          <a:lstStyle/>
-          <a:p>
-            <a:pPr algn="l"/>
-            <a:r>
-              <a:rPr lang="es-ES" sz="2400" b="0" i="0" u="none" strike="noStrike" baseline="0" dirty="0">
-                <a:latin typeface="Times New Roman" panose="02020603050405020304" pitchFamily="18" charset="0"/>
-                <a:cs typeface="Times New Roman" panose="02020603050405020304" pitchFamily="18" charset="0"/>
-              </a:rPr>
-              <a:t>Si consideramos la categoría de FRUTAS Y VERDURAS, ¿cuáles son los 5 productos más vendidos?</a:t>
-            </a:r>
-          </a:p>
-          <a:p>
-            <a:pPr marL="0" indent="0" algn="l">
-              <a:buNone/>
-            </a:pPr>
-            <a:r>
-              <a:rPr lang="es-ES" sz="2400" b="0" i="0" u="none" strike="noStrike" baseline="0" dirty="0">
-                <a:latin typeface="Times New Roman" panose="02020603050405020304" pitchFamily="18" charset="0"/>
-                <a:cs typeface="Times New Roman" panose="02020603050405020304" pitchFamily="18" charset="0"/>
-              </a:rPr>
-              <a:t>¿Cuántos kilos se han vendido de cada uno de estos productos?</a:t>
-            </a:r>
-            <a:endParaRPr lang="es-ES" sz="2400" dirty="0">
-              <a:latin typeface="Times New Roman" panose="02020603050405020304" pitchFamily="18" charset="0"/>
-              <a:cs typeface="Times New Roman" panose="02020603050405020304" pitchFamily="18" charset="0"/>
-            </a:endParaRPr>
-          </a:p>
-        </p:txBody>
-      </p:sp>
-      <p:sp>
-        <p:nvSpPr>
           <p:cNvPr id="4" name="Marcador de pie de página 3">
             <a:extLst>
               <a:ext uri="{FF2B5EF4-FFF2-40B4-BE49-F238E27FC236}">
-                <a16:creationId xmlns:a16="http://schemas.microsoft.com/office/drawing/2014/main" id="{3DD09F14-968D-ABF1-1EA4-3801972F7F37}"/>
+                <a16:creationId xmlns:a16="http://schemas.microsoft.com/office/drawing/2014/main" id="{663C3676-BED4-96EC-B9E5-194F20D28B00}"/>
               </a:ext>
             </a:extLst>
           </p:cNvPr>
@@ -4888,7 +4868,7 @@
           <p:cNvPr id="5" name="Marcador de número de diapositiva 4">
             <a:extLst>
               <a:ext uri="{FF2B5EF4-FFF2-40B4-BE49-F238E27FC236}">
-                <a16:creationId xmlns:a16="http://schemas.microsoft.com/office/drawing/2014/main" id="{18ABB47D-287D-7819-5024-7421714F17D6}"/>
+                <a16:creationId xmlns:a16="http://schemas.microsoft.com/office/drawing/2014/main" id="{F2E7E31C-82F3-73F8-E3C2-F479AD68C155}"/>
               </a:ext>
             </a:extLst>
           </p:cNvPr>
@@ -4913,12 +4893,115 @@
           </a:p>
         </p:txBody>
       </p:sp>
+      <p:sp>
+        <p:nvSpPr>
+          <p:cNvPr id="6" name="Rectángulo 5">
+            <a:extLst>
+              <a:ext uri="{FF2B5EF4-FFF2-40B4-BE49-F238E27FC236}">
+                <a16:creationId xmlns:a16="http://schemas.microsoft.com/office/drawing/2014/main" id="{06B25BBC-23B2-135C-FC23-3BF115E53B76}"/>
+              </a:ext>
+            </a:extLst>
+          </p:cNvPr>
+          <p:cNvSpPr/>
+          <p:nvPr/>
+        </p:nvSpPr>
+        <p:spPr>
+          <a:xfrm>
+            <a:off x="0" y="0"/>
+            <a:ext cx="9350477" cy="707886"/>
+          </a:xfrm>
+          <a:prstGeom prst="rect">
+            <a:avLst/>
+          </a:prstGeom>
+          <a:noFill/>
+        </p:spPr>
+        <p:txBody>
+          <a:bodyPr wrap="square" lIns="91440" tIns="45720" rIns="91440" bIns="45720" anchor="ctr">
+            <a:spAutoFit/>
+          </a:bodyPr>
+          <a:lstStyle/>
+          <a:p>
+            <a:r>
+              <a:rPr lang="es-419" sz="4000" b="1" cap="none" spc="0" dirty="0">
+                <a:ln w="22225">
+                  <a:solidFill>
+                    <a:srgbClr val="00965F"/>
+                  </a:solidFill>
+                  <a:prstDash val="solid"/>
+                </a:ln>
+                <a:solidFill>
+                  <a:srgbClr val="00965F"/>
+                </a:solidFill>
+                <a:effectLst/>
+                <a:latin typeface="Cooper Black" panose="020F0502020204030204" pitchFamily="18" charset="0"/>
+              </a:rPr>
+              <a:t>PREGUNTAS PLANTEADAS</a:t>
+            </a:r>
+            <a:endParaRPr lang="es-ES" sz="4000" b="1" cap="none" spc="0" dirty="0">
+              <a:ln w="22225">
+                <a:solidFill>
+                  <a:srgbClr val="00965F"/>
+                </a:solidFill>
+                <a:prstDash val="solid"/>
+              </a:ln>
+              <a:solidFill>
+                <a:srgbClr val="00965F"/>
+              </a:solidFill>
+              <a:effectLst/>
+              <a:latin typeface="Cooper Black" panose="020F0502020204030204" pitchFamily="18" charset="0"/>
+            </a:endParaRPr>
+          </a:p>
+        </p:txBody>
+      </p:sp>
+      <p:sp>
+        <p:nvSpPr>
+          <p:cNvPr id="10" name="CuadroTexto 9">
+            <a:extLst>
+              <a:ext uri="{FF2B5EF4-FFF2-40B4-BE49-F238E27FC236}">
+                <a16:creationId xmlns:a16="http://schemas.microsoft.com/office/drawing/2014/main" id="{D3B8F456-DAEB-4DE4-6076-0B3F3A469723}"/>
+              </a:ext>
+            </a:extLst>
+          </p:cNvPr>
+          <p:cNvSpPr txBox="1"/>
+          <p:nvPr/>
+        </p:nvSpPr>
+        <p:spPr>
+          <a:xfrm>
+            <a:off x="0" y="707886"/>
+            <a:ext cx="12192000" cy="400110"/>
+          </a:xfrm>
+          <a:prstGeom prst="rect">
+            <a:avLst/>
+          </a:prstGeom>
+          <a:noFill/>
+        </p:spPr>
+        <p:txBody>
+          <a:bodyPr wrap="square" rtlCol="0" anchor="ctr">
+            <a:spAutoFit/>
+          </a:bodyPr>
+          <a:lstStyle/>
+          <a:p>
+            <a:pPr algn="l"/>
+            <a:r>
+              <a:rPr lang="es-ES" sz="2000" b="0" i="0" u="none" strike="noStrike" baseline="0" dirty="0">
+                <a:latin typeface="Times New Roman" panose="02020603050405020304" pitchFamily="18" charset="0"/>
+                <a:cs typeface="Times New Roman" panose="02020603050405020304" pitchFamily="18" charset="0"/>
+              </a:rPr>
+              <a:t>¿Qué productos mantienen un volumen de ventas estable, independientemente de cambios en su precio unitario?</a:t>
+            </a:r>
+            <a:endParaRPr lang="es-ES" sz="2000" dirty="0">
+              <a:latin typeface="Times New Roman" panose="02020603050405020304" pitchFamily="18" charset="0"/>
+              <a:cs typeface="Times New Roman" panose="02020603050405020304" pitchFamily="18" charset="0"/>
+            </a:endParaRPr>
+          </a:p>
+        </p:txBody>
+      </p:sp>
       <p:pic>
         <p:nvPicPr>
-          <p:cNvPr id="7" name="Imagen 6" descr="Gráfico, Gráfico de embudo&#10;&#10;El contenido generado por IA puede ser incorrecto.">
-            <a:extLst>
-              <a:ext uri="{FF2B5EF4-FFF2-40B4-BE49-F238E27FC236}">
-                <a16:creationId xmlns:a16="http://schemas.microsoft.com/office/drawing/2014/main" id="{1C86AA5A-DF40-4B5A-5A2A-1CDD8303998B}"/>
+          <p:cNvPr id="3" name="Imagen 2" descr="Imagen que contiene perro, con baldosas&#10;&#10;El contenido generado por IA puede ser incorrecto.">
+            <a:extLst>
+              <a:ext uri="{FF2B5EF4-FFF2-40B4-BE49-F238E27FC236}">
+                <a16:creationId xmlns:a16="http://schemas.microsoft.com/office/drawing/2014/main" id="{A04C7BD5-F229-5E48-C7C1-33C7F7CAA8D1}"/>
               </a:ext>
             </a:extLst>
           </p:cNvPr>
@@ -4941,44 +5024,8 @@
         </p:blipFill>
         <p:spPr>
           <a:xfrm>
-            <a:off x="1019070" y="2275770"/>
-            <a:ext cx="3676029" cy="3676029"/>
-          </a:xfrm>
-          <a:prstGeom prst="rect">
-            <a:avLst/>
-          </a:prstGeom>
-        </p:spPr>
-      </p:pic>
-      <p:pic>
-        <p:nvPicPr>
-          <p:cNvPr id="8" name="Imagen 7" descr="Interfaz de usuario gráfica, Aplicación, Teams&#10;&#10;El contenido generado por IA puede ser incorrecto.">
-            <a:extLst>
-              <a:ext uri="{FF2B5EF4-FFF2-40B4-BE49-F238E27FC236}">
-                <a16:creationId xmlns:a16="http://schemas.microsoft.com/office/drawing/2014/main" id="{EDA9DC3A-A210-26E8-F3D8-88504C2063BE}"/>
-              </a:ext>
-            </a:extLst>
-          </p:cNvPr>
-          <p:cNvPicPr>
-            <a:picLocks noChangeAspect="1"/>
-          </p:cNvPicPr>
-          <p:nvPr/>
-        </p:nvPicPr>
-        <p:blipFill>
-          <a:blip r:embed="rId3">
-            <a:extLst>
-              <a:ext uri="{28A0092B-C50C-407E-A947-70E740481C1C}">
-                <a14:useLocalDpi xmlns:a14="http://schemas.microsoft.com/office/drawing/2010/main" val="0"/>
-              </a:ext>
-            </a:extLst>
-          </a:blip>
-          <a:stretch>
-            <a:fillRect/>
-          </a:stretch>
-        </p:blipFill>
-        <p:spPr>
-          <a:xfrm>
-            <a:off x="5700712" y="2562434"/>
-            <a:ext cx="4905375" cy="2838450"/>
+            <a:off x="1054509" y="1302533"/>
+            <a:ext cx="10082981" cy="4560459"/>
           </a:xfrm>
           <a:prstGeom prst="rect">
             <a:avLst/>
@@ -4988,7 +5035,7 @@
     </p:spTree>
     <p:extLst>
       <p:ext uri="{BB962C8B-B14F-4D97-AF65-F5344CB8AC3E}">
-        <p14:creationId xmlns:p14="http://schemas.microsoft.com/office/powerpoint/2010/main" val="1449690368"/>
+        <p14:creationId xmlns:p14="http://schemas.microsoft.com/office/powerpoint/2010/main" val="1113615878"/>
       </p:ext>
     </p:extLst>
   </p:cSld>
@@ -5003,7 +5050,13 @@
   <p:cSld>
     <p:spTree>
       <p:nvGrpSpPr>
-        <p:cNvPr id="1" name=""/>
+        <p:cNvPr id="1" name="">
+          <a:extLst>
+            <a:ext uri="{FF2B5EF4-FFF2-40B4-BE49-F238E27FC236}">
+              <a16:creationId xmlns:a16="http://schemas.microsoft.com/office/drawing/2014/main" id="{6EBDFDD0-2098-E00D-DB6F-1A778DBABF4E}"/>
+            </a:ext>
+          </a:extLst>
+        </p:cNvPr>
         <p:cNvGrpSpPr/>
         <p:nvPr/>
       </p:nvGrpSpPr>
@@ -5017,90 +5070,10 @@
       </p:grpSpPr>
       <p:sp>
         <p:nvSpPr>
-          <p:cNvPr id="2" name="Título 1">
-            <a:extLst>
-              <a:ext uri="{FF2B5EF4-FFF2-40B4-BE49-F238E27FC236}">
-                <a16:creationId xmlns:a16="http://schemas.microsoft.com/office/drawing/2014/main" id="{2C240DA3-36E2-CBFC-255E-869FB5E0CA32}"/>
-              </a:ext>
-            </a:extLst>
-          </p:cNvPr>
-          <p:cNvSpPr>
-            <a:spLocks noGrp="1"/>
-          </p:cNvSpPr>
-          <p:nvPr>
-            <p:ph type="title"/>
-          </p:nvPr>
-        </p:nvSpPr>
-        <p:spPr>
-          <a:xfrm>
-            <a:off x="838200" y="0"/>
-            <a:ext cx="10515600" cy="1325563"/>
-          </a:xfrm>
-        </p:spPr>
-        <p:txBody>
-          <a:bodyPr/>
-          <a:lstStyle/>
-          <a:p>
-            <a:r>
-              <a:rPr lang="es-419" dirty="0">
-                <a:latin typeface="Times New Roman" panose="02020603050405020304" pitchFamily="18" charset="0"/>
-                <a:cs typeface="Times New Roman" panose="02020603050405020304" pitchFamily="18" charset="0"/>
-              </a:rPr>
-              <a:t>Preguntas planteadas.</a:t>
-            </a:r>
-            <a:endParaRPr lang="es-ES" dirty="0"/>
-          </a:p>
-        </p:txBody>
-      </p:sp>
-      <p:sp>
-        <p:nvSpPr>
-          <p:cNvPr id="3" name="Marcador de contenido 2">
-            <a:extLst>
-              <a:ext uri="{FF2B5EF4-FFF2-40B4-BE49-F238E27FC236}">
-                <a16:creationId xmlns:a16="http://schemas.microsoft.com/office/drawing/2014/main" id="{EF9A0FCD-84D6-C30A-8D27-31BDF0247104}"/>
-              </a:ext>
-            </a:extLst>
-          </p:cNvPr>
-          <p:cNvSpPr>
-            <a:spLocks noGrp="1"/>
-          </p:cNvSpPr>
-          <p:nvPr>
-            <p:ph idx="1"/>
-          </p:nvPr>
-        </p:nvSpPr>
-        <p:spPr>
-          <a:xfrm>
-            <a:off x="838200" y="1157410"/>
-            <a:ext cx="10515600" cy="4351338"/>
-          </a:xfrm>
-        </p:spPr>
-        <p:txBody>
-          <a:bodyPr>
-            <a:normAutofit/>
-          </a:bodyPr>
-          <a:lstStyle/>
-          <a:p>
-            <a:pPr algn="l"/>
-            <a:r>
-              <a:rPr lang="es-ES" sz="2400" b="0" i="0" u="none" strike="noStrike" baseline="0" dirty="0">
-                <a:latin typeface="Times New Roman" panose="02020603050405020304" pitchFamily="18" charset="0"/>
-                <a:cs typeface="Times New Roman" panose="02020603050405020304" pitchFamily="18" charset="0"/>
-              </a:rPr>
-              <a:t>¿Qué productos mantienen un volumen de ventas estable, independientemente de cambios en su precio unitario?</a:t>
-            </a:r>
-            <a:endParaRPr lang="es-ES" sz="2400" dirty="0">
-              <a:latin typeface="Times New Roman" panose="02020603050405020304" pitchFamily="18" charset="0"/>
-              <a:cs typeface="Times New Roman" panose="02020603050405020304" pitchFamily="18" charset="0"/>
-            </a:endParaRPr>
-          </a:p>
-        </p:txBody>
-      </p:sp>
-      <p:sp>
-        <p:nvSpPr>
           <p:cNvPr id="4" name="Marcador de pie de página 3">
             <a:extLst>
               <a:ext uri="{FF2B5EF4-FFF2-40B4-BE49-F238E27FC236}">
-                <a16:creationId xmlns:a16="http://schemas.microsoft.com/office/drawing/2014/main" id="{9D915A5C-562C-9028-65B8-C9854FD74802}"/>
+                <a16:creationId xmlns:a16="http://schemas.microsoft.com/office/drawing/2014/main" id="{1852D6EF-6199-C3D4-41D9-F324B10A36B4}"/>
               </a:ext>
             </a:extLst>
           </p:cNvPr>
@@ -5129,7 +5102,7 @@
           <p:cNvPr id="5" name="Marcador de número de diapositiva 4">
             <a:extLst>
               <a:ext uri="{FF2B5EF4-FFF2-40B4-BE49-F238E27FC236}">
-                <a16:creationId xmlns:a16="http://schemas.microsoft.com/office/drawing/2014/main" id="{A53B34DB-5513-8B4D-1A4C-D419A7274DF3}"/>
+                <a16:creationId xmlns:a16="http://schemas.microsoft.com/office/drawing/2014/main" id="{486C77AF-DE46-EC72-81B2-FAD4BB6C6109}"/>
               </a:ext>
             </a:extLst>
           </p:cNvPr>
@@ -5154,12 +5127,121 @@
           </a:p>
         </p:txBody>
       </p:sp>
+      <p:sp>
+        <p:nvSpPr>
+          <p:cNvPr id="6" name="Rectángulo 5">
+            <a:extLst>
+              <a:ext uri="{FF2B5EF4-FFF2-40B4-BE49-F238E27FC236}">
+                <a16:creationId xmlns:a16="http://schemas.microsoft.com/office/drawing/2014/main" id="{B83DD972-EEF7-9246-5FC6-3104658DBC89}"/>
+              </a:ext>
+            </a:extLst>
+          </p:cNvPr>
+          <p:cNvSpPr/>
+          <p:nvPr/>
+        </p:nvSpPr>
+        <p:spPr>
+          <a:xfrm>
+            <a:off x="0" y="0"/>
+            <a:ext cx="9350477" cy="707886"/>
+          </a:xfrm>
+          <a:prstGeom prst="rect">
+            <a:avLst/>
+          </a:prstGeom>
+          <a:noFill/>
+        </p:spPr>
+        <p:txBody>
+          <a:bodyPr wrap="square" lIns="91440" tIns="45720" rIns="91440" bIns="45720" anchor="ctr">
+            <a:spAutoFit/>
+          </a:bodyPr>
+          <a:lstStyle/>
+          <a:p>
+            <a:r>
+              <a:rPr lang="es-419" sz="4000" b="1" cap="none" spc="0" dirty="0">
+                <a:ln w="22225">
+                  <a:solidFill>
+                    <a:srgbClr val="00965F"/>
+                  </a:solidFill>
+                  <a:prstDash val="solid"/>
+                </a:ln>
+                <a:solidFill>
+                  <a:srgbClr val="00965F"/>
+                </a:solidFill>
+                <a:effectLst/>
+                <a:latin typeface="Cooper Black" panose="020F0502020204030204" pitchFamily="18" charset="0"/>
+              </a:rPr>
+              <a:t>PREGUNTAS PLANTEADAS</a:t>
+            </a:r>
+            <a:endParaRPr lang="es-ES" sz="4000" b="1" cap="none" spc="0" dirty="0">
+              <a:ln w="22225">
+                <a:solidFill>
+                  <a:srgbClr val="00965F"/>
+                </a:solidFill>
+                <a:prstDash val="solid"/>
+              </a:ln>
+              <a:solidFill>
+                <a:srgbClr val="00965F"/>
+              </a:solidFill>
+              <a:effectLst/>
+              <a:latin typeface="Cooper Black" panose="020F0502020204030204" pitchFamily="18" charset="0"/>
+            </a:endParaRPr>
+          </a:p>
+        </p:txBody>
+      </p:sp>
+      <p:sp>
+        <p:nvSpPr>
+          <p:cNvPr id="10" name="CuadroTexto 9">
+            <a:extLst>
+              <a:ext uri="{FF2B5EF4-FFF2-40B4-BE49-F238E27FC236}">
+                <a16:creationId xmlns:a16="http://schemas.microsoft.com/office/drawing/2014/main" id="{355CDA06-B821-02A0-7897-ACCFF2FF84CD}"/>
+              </a:ext>
+            </a:extLst>
+          </p:cNvPr>
+          <p:cNvSpPr txBox="1"/>
+          <p:nvPr/>
+        </p:nvSpPr>
+        <p:spPr>
+          <a:xfrm>
+            <a:off x="0" y="553998"/>
+            <a:ext cx="12192000" cy="707886"/>
+          </a:xfrm>
+          <a:prstGeom prst="rect">
+            <a:avLst/>
+          </a:prstGeom>
+          <a:noFill/>
+        </p:spPr>
+        <p:txBody>
+          <a:bodyPr wrap="square" rtlCol="0" anchor="ctr">
+            <a:spAutoFit/>
+          </a:bodyPr>
+          <a:lstStyle/>
+          <a:p>
+            <a:pPr algn="ctr"/>
+            <a:r>
+              <a:rPr lang="es-ES" sz="2000" dirty="0">
+                <a:latin typeface="Times New Roman" panose="02020603050405020304" pitchFamily="18" charset="0"/>
+                <a:cs typeface="Times New Roman" panose="02020603050405020304" pitchFamily="18" charset="0"/>
+              </a:rPr>
+              <a:t>Si consideramos la categoría de PESCADO, </a:t>
+            </a:r>
+          </a:p>
+          <a:p>
+            <a:pPr algn="ctr"/>
+            <a:r>
+              <a:rPr lang="es-ES" sz="2000" dirty="0">
+                <a:latin typeface="Times New Roman" panose="02020603050405020304" pitchFamily="18" charset="0"/>
+                <a:cs typeface="Times New Roman" panose="02020603050405020304" pitchFamily="18" charset="0"/>
+              </a:rPr>
+              <a:t>¿Cuáles son los 5 productos más vendidos? ¿Cuántos kilos se han vendido de cada uno de estos productos?</a:t>
+            </a:r>
+          </a:p>
+        </p:txBody>
+      </p:sp>
       <p:pic>
         <p:nvPicPr>
-          <p:cNvPr id="7" name="Imagen 6" descr="Gráfico, Diagrama, Gráfico de rectángulos&#10;&#10;El contenido generado por IA puede ser incorrecto.">
-            <a:extLst>
-              <a:ext uri="{FF2B5EF4-FFF2-40B4-BE49-F238E27FC236}">
-                <a16:creationId xmlns:a16="http://schemas.microsoft.com/office/drawing/2014/main" id="{5601022E-D22B-2E25-31A6-E07E7AEB0DB6}"/>
+          <p:cNvPr id="2" name="Imagen 1">
+            <a:extLst>
+              <a:ext uri="{FF2B5EF4-FFF2-40B4-BE49-F238E27FC236}">
+                <a16:creationId xmlns:a16="http://schemas.microsoft.com/office/drawing/2014/main" id="{175BB63D-7EB6-172C-D21F-2738324988B4}"/>
               </a:ext>
             </a:extLst>
           </p:cNvPr>
@@ -5169,21 +5251,15 @@
           <p:nvPr/>
         </p:nvPicPr>
         <p:blipFill>
-          <a:blip r:embed="rId2">
-            <a:extLst>
-              <a:ext uri="{28A0092B-C50C-407E-A947-70E740481C1C}">
-                <a14:useLocalDpi xmlns:a14="http://schemas.microsoft.com/office/drawing/2010/main" val="0"/>
-              </a:ext>
-            </a:extLst>
-          </a:blip>
+          <a:blip r:embed="rId2"/>
           <a:stretch>
             <a:fillRect/>
           </a:stretch>
         </p:blipFill>
         <p:spPr>
           <a:xfrm>
-            <a:off x="4089008" y="1977086"/>
-            <a:ext cx="4013984" cy="4013984"/>
+            <a:off x="1568829" y="2110480"/>
+            <a:ext cx="9054342" cy="2637039"/>
           </a:xfrm>
           <a:prstGeom prst="rect">
             <a:avLst/>
@@ -5193,7 +5269,7 @@
     </p:spTree>
     <p:extLst>
       <p:ext uri="{BB962C8B-B14F-4D97-AF65-F5344CB8AC3E}">
-        <p14:creationId xmlns:p14="http://schemas.microsoft.com/office/powerpoint/2010/main" val="2558315437"/>
+        <p14:creationId xmlns:p14="http://schemas.microsoft.com/office/powerpoint/2010/main" val="3483804874"/>
       </p:ext>
     </p:extLst>
   </p:cSld>
@@ -5208,7 +5284,13 @@
   <p:cSld>
     <p:spTree>
       <p:nvGrpSpPr>
-        <p:cNvPr id="1" name=""/>
+        <p:cNvPr id="1" name="">
+          <a:extLst>
+            <a:ext uri="{FF2B5EF4-FFF2-40B4-BE49-F238E27FC236}">
+              <a16:creationId xmlns:a16="http://schemas.microsoft.com/office/drawing/2014/main" id="{F0BE59CB-5B2F-1CF8-24DF-D6D027EB350D}"/>
+            </a:ext>
+          </a:extLst>
+        </p:cNvPr>
         <p:cNvGrpSpPr/>
         <p:nvPr/>
       </p:nvGrpSpPr>
@@ -5222,90 +5304,10 @@
       </p:grpSpPr>
       <p:sp>
         <p:nvSpPr>
-          <p:cNvPr id="2" name="Título 1">
-            <a:extLst>
-              <a:ext uri="{FF2B5EF4-FFF2-40B4-BE49-F238E27FC236}">
-                <a16:creationId xmlns:a16="http://schemas.microsoft.com/office/drawing/2014/main" id="{D0C81A7F-E746-FAD9-0A5C-DDB1F9736227}"/>
-              </a:ext>
-            </a:extLst>
-          </p:cNvPr>
-          <p:cNvSpPr>
-            <a:spLocks noGrp="1"/>
-          </p:cNvSpPr>
-          <p:nvPr>
-            <p:ph type="title"/>
-          </p:nvPr>
-        </p:nvSpPr>
-        <p:spPr>
-          <a:xfrm>
-            <a:off x="838200" y="0"/>
-            <a:ext cx="10515600" cy="1325563"/>
-          </a:xfrm>
-        </p:spPr>
-        <p:txBody>
-          <a:bodyPr/>
-          <a:lstStyle/>
-          <a:p>
-            <a:r>
-              <a:rPr lang="es-419" dirty="0">
-                <a:latin typeface="Times New Roman" panose="02020603050405020304" pitchFamily="18" charset="0"/>
-                <a:cs typeface="Times New Roman" panose="02020603050405020304" pitchFamily="18" charset="0"/>
-              </a:rPr>
-              <a:t>Preguntas planteadas.</a:t>
-            </a:r>
-            <a:endParaRPr lang="es-ES" dirty="0"/>
-          </a:p>
-        </p:txBody>
-      </p:sp>
-      <p:sp>
-        <p:nvSpPr>
-          <p:cNvPr id="3" name="Marcador de contenido 2">
-            <a:extLst>
-              <a:ext uri="{FF2B5EF4-FFF2-40B4-BE49-F238E27FC236}">
-                <a16:creationId xmlns:a16="http://schemas.microsoft.com/office/drawing/2014/main" id="{FFA0B18F-6CF4-B930-3DB4-AAC91F6801D5}"/>
-              </a:ext>
-            </a:extLst>
-          </p:cNvPr>
-          <p:cNvSpPr>
-            <a:spLocks noGrp="1"/>
-          </p:cNvSpPr>
-          <p:nvPr>
-            <p:ph idx="1"/>
-          </p:nvPr>
-        </p:nvSpPr>
-        <p:spPr>
-          <a:xfrm>
-            <a:off x="838200" y="1046879"/>
-            <a:ext cx="10515600" cy="4351338"/>
-          </a:xfrm>
-        </p:spPr>
-        <p:txBody>
-          <a:bodyPr>
-            <a:normAutofit/>
-          </a:bodyPr>
-          <a:lstStyle/>
-          <a:p>
-            <a:pPr algn="l"/>
-            <a:r>
-              <a:rPr lang="es-ES" sz="2400" b="0" i="0" u="none" strike="noStrike" baseline="0" dirty="0">
-                <a:latin typeface="Times New Roman" panose="02020603050405020304" pitchFamily="18" charset="0"/>
-                <a:cs typeface="Times New Roman" panose="02020603050405020304" pitchFamily="18" charset="0"/>
-              </a:rPr>
-              <a:t>Si consideramos la categoría de PESCADO, ¿Cuáles son los 5 productos más vendidos? ¿Cuántos kilos se han vendido de cada uno de estos productos?</a:t>
-            </a:r>
-            <a:endParaRPr lang="es-ES" sz="2400" dirty="0">
-              <a:latin typeface="Times New Roman" panose="02020603050405020304" pitchFamily="18" charset="0"/>
-              <a:cs typeface="Times New Roman" panose="02020603050405020304" pitchFamily="18" charset="0"/>
-            </a:endParaRPr>
-          </a:p>
-        </p:txBody>
-      </p:sp>
-      <p:sp>
-        <p:nvSpPr>
           <p:cNvPr id="4" name="Marcador de pie de página 3">
             <a:extLst>
               <a:ext uri="{FF2B5EF4-FFF2-40B4-BE49-F238E27FC236}">
-                <a16:creationId xmlns:a16="http://schemas.microsoft.com/office/drawing/2014/main" id="{9A1D855A-52B2-9B97-68E6-F9120D86660E}"/>
+                <a16:creationId xmlns:a16="http://schemas.microsoft.com/office/drawing/2014/main" id="{230E21CE-2A88-FEB2-8462-A40C45607B8B}"/>
               </a:ext>
             </a:extLst>
           </p:cNvPr>
@@ -5334,7 +5336,7 @@
           <p:cNvPr id="5" name="Marcador de número de diapositiva 4">
             <a:extLst>
               <a:ext uri="{FF2B5EF4-FFF2-40B4-BE49-F238E27FC236}">
-                <a16:creationId xmlns:a16="http://schemas.microsoft.com/office/drawing/2014/main" id="{0392A84E-75F6-8311-82E4-E1D31C814D23}"/>
+                <a16:creationId xmlns:a16="http://schemas.microsoft.com/office/drawing/2014/main" id="{CF9C8C07-5DCA-F620-B80D-261DF90DF2C4}"/>
               </a:ext>
             </a:extLst>
           </p:cNvPr>
@@ -5359,12 +5361,111 @@
           </a:p>
         </p:txBody>
       </p:sp>
+      <p:sp>
+        <p:nvSpPr>
+          <p:cNvPr id="6" name="Rectángulo 5">
+            <a:extLst>
+              <a:ext uri="{FF2B5EF4-FFF2-40B4-BE49-F238E27FC236}">
+                <a16:creationId xmlns:a16="http://schemas.microsoft.com/office/drawing/2014/main" id="{1A3677D2-9679-0DCC-B69D-40460105043C}"/>
+              </a:ext>
+            </a:extLst>
+          </p:cNvPr>
+          <p:cNvSpPr/>
+          <p:nvPr/>
+        </p:nvSpPr>
+        <p:spPr>
+          <a:xfrm>
+            <a:off x="0" y="0"/>
+            <a:ext cx="9350477" cy="707886"/>
+          </a:xfrm>
+          <a:prstGeom prst="rect">
+            <a:avLst/>
+          </a:prstGeom>
+          <a:noFill/>
+        </p:spPr>
+        <p:txBody>
+          <a:bodyPr wrap="square" lIns="91440" tIns="45720" rIns="91440" bIns="45720" anchor="ctr">
+            <a:spAutoFit/>
+          </a:bodyPr>
+          <a:lstStyle/>
+          <a:p>
+            <a:r>
+              <a:rPr lang="es-419" sz="4000" b="1" cap="none" spc="0" dirty="0">
+                <a:ln w="22225">
+                  <a:solidFill>
+                    <a:srgbClr val="00965F"/>
+                  </a:solidFill>
+                  <a:prstDash val="solid"/>
+                </a:ln>
+                <a:solidFill>
+                  <a:srgbClr val="00965F"/>
+                </a:solidFill>
+                <a:effectLst/>
+                <a:latin typeface="Cooper Black" panose="020F0502020204030204" pitchFamily="18" charset="0"/>
+              </a:rPr>
+              <a:t>PREGUNTAS PLANTEADAS</a:t>
+            </a:r>
+            <a:endParaRPr lang="es-ES" sz="4000" b="1" cap="none" spc="0" dirty="0">
+              <a:ln w="22225">
+                <a:solidFill>
+                  <a:srgbClr val="00965F"/>
+                </a:solidFill>
+                <a:prstDash val="solid"/>
+              </a:ln>
+              <a:solidFill>
+                <a:srgbClr val="00965F"/>
+              </a:solidFill>
+              <a:effectLst/>
+              <a:latin typeface="Cooper Black" panose="020F0502020204030204" pitchFamily="18" charset="0"/>
+            </a:endParaRPr>
+          </a:p>
+        </p:txBody>
+      </p:sp>
+      <p:sp>
+        <p:nvSpPr>
+          <p:cNvPr id="10" name="CuadroTexto 9">
+            <a:extLst>
+              <a:ext uri="{FF2B5EF4-FFF2-40B4-BE49-F238E27FC236}">
+                <a16:creationId xmlns:a16="http://schemas.microsoft.com/office/drawing/2014/main" id="{45FE9750-FCD4-43CB-4933-31118D84AFB2}"/>
+              </a:ext>
+            </a:extLst>
+          </p:cNvPr>
+          <p:cNvSpPr txBox="1"/>
+          <p:nvPr/>
+        </p:nvSpPr>
+        <p:spPr>
+          <a:xfrm>
+            <a:off x="0" y="553998"/>
+            <a:ext cx="12192000" cy="707886"/>
+          </a:xfrm>
+          <a:prstGeom prst="rect">
+            <a:avLst/>
+          </a:prstGeom>
+          <a:noFill/>
+        </p:spPr>
+        <p:txBody>
+          <a:bodyPr wrap="square" rtlCol="0" anchor="ctr">
+            <a:spAutoFit/>
+          </a:bodyPr>
+          <a:lstStyle/>
+          <a:p>
+            <a:pPr algn="ctr"/>
+            <a:r>
+              <a:rPr lang="es-ES" sz="2000" dirty="0">
+                <a:latin typeface="Times New Roman" panose="02020603050405020304" pitchFamily="18" charset="0"/>
+                <a:cs typeface="Times New Roman" panose="02020603050405020304" pitchFamily="18" charset="0"/>
+              </a:rPr>
+              <a:t>Muestra mediante un gráfico de líneas como ha variado el precio por kilo de las bananas y los plátanos en los tickets disponibles, a lo largo del tiempo.</a:t>
+            </a:r>
+          </a:p>
+        </p:txBody>
+      </p:sp>
       <p:pic>
         <p:nvPicPr>
-          <p:cNvPr id="7" name="Imagen 6">
-            <a:extLst>
-              <a:ext uri="{FF2B5EF4-FFF2-40B4-BE49-F238E27FC236}">
-                <a16:creationId xmlns:a16="http://schemas.microsoft.com/office/drawing/2014/main" id="{E6B8F4AD-3776-E1A3-4357-EE62794B754A}"/>
+          <p:cNvPr id="3" name="Imagen 2" descr="Diagrama&#10;&#10;El contenido generado por IA puede ser incorrecto.">
+            <a:extLst>
+              <a:ext uri="{FF2B5EF4-FFF2-40B4-BE49-F238E27FC236}">
+                <a16:creationId xmlns:a16="http://schemas.microsoft.com/office/drawing/2014/main" id="{1E094151-5599-45E2-7FFC-706EE83E0837}"/>
               </a:ext>
             </a:extLst>
           </p:cNvPr>
@@ -5374,15 +5475,21 @@
           <p:nvPr/>
         </p:nvPicPr>
         <p:blipFill>
-          <a:blip r:embed="rId2"/>
+          <a:blip r:embed="rId2">
+            <a:extLst>
+              <a:ext uri="{28A0092B-C50C-407E-A947-70E740481C1C}">
+                <a14:useLocalDpi xmlns:a14="http://schemas.microsoft.com/office/drawing/2010/main" val="0"/>
+              </a:ext>
+            </a:extLst>
+          </a:blip>
           <a:stretch>
             <a:fillRect/>
           </a:stretch>
         </p:blipFill>
         <p:spPr>
           <a:xfrm>
-            <a:off x="1568829" y="2372442"/>
-            <a:ext cx="9054342" cy="2637039"/>
+            <a:off x="2787445" y="1490901"/>
+            <a:ext cx="6617109" cy="4311451"/>
           </a:xfrm>
           <a:prstGeom prst="rect">
             <a:avLst/>
@@ -5392,7 +5499,7 @@
     </p:spTree>
     <p:extLst>
       <p:ext uri="{BB962C8B-B14F-4D97-AF65-F5344CB8AC3E}">
-        <p14:creationId xmlns:p14="http://schemas.microsoft.com/office/powerpoint/2010/main" val="3884221794"/>
+        <p14:creationId xmlns:p14="http://schemas.microsoft.com/office/powerpoint/2010/main" val="502150561"/>
       </p:ext>
     </p:extLst>
   </p:cSld>
@@ -5407,7 +5514,13 @@
   <p:cSld>
     <p:spTree>
       <p:nvGrpSpPr>
-        <p:cNvPr id="1" name=""/>
+        <p:cNvPr id="1" name="">
+          <a:extLst>
+            <a:ext uri="{FF2B5EF4-FFF2-40B4-BE49-F238E27FC236}">
+              <a16:creationId xmlns:a16="http://schemas.microsoft.com/office/drawing/2014/main" id="{01CFB5E7-D9DB-07CA-2DBE-965899DE4980}"/>
+            </a:ext>
+          </a:extLst>
+        </p:cNvPr>
         <p:cNvGrpSpPr/>
         <p:nvPr/>
       </p:nvGrpSpPr>
@@ -5421,110 +5534,29 @@
       </p:grpSpPr>
       <p:sp>
         <p:nvSpPr>
-          <p:cNvPr id="2" name="Título 1">
-            <a:extLst>
-              <a:ext uri="{FF2B5EF4-FFF2-40B4-BE49-F238E27FC236}">
-                <a16:creationId xmlns:a16="http://schemas.microsoft.com/office/drawing/2014/main" id="{9D03DAC2-3A62-36AD-6E55-69863CBD4CA0}"/>
-              </a:ext>
-            </a:extLst>
-          </p:cNvPr>
-          <p:cNvSpPr>
-            <a:spLocks noGrp="1"/>
-          </p:cNvSpPr>
-          <p:nvPr>
-            <p:ph type="title"/>
-          </p:nvPr>
-        </p:nvSpPr>
-        <p:spPr>
-          <a:xfrm>
-            <a:off x="838200" y="136525"/>
-            <a:ext cx="10515600" cy="1325563"/>
-          </a:xfrm>
-        </p:spPr>
+          <p:cNvPr id="4" name="Marcador de pie de página 3">
+            <a:extLst>
+              <a:ext uri="{FF2B5EF4-FFF2-40B4-BE49-F238E27FC236}">
+                <a16:creationId xmlns:a16="http://schemas.microsoft.com/office/drawing/2014/main" id="{4BC6D77D-AD68-CF6F-2E99-D901398F50C4}"/>
+              </a:ext>
+            </a:extLst>
+          </p:cNvPr>
+          <p:cNvSpPr>
+            <a:spLocks noGrp="1"/>
+          </p:cNvSpPr>
+          <p:nvPr>
+            <p:ph type="ftr" sz="quarter" idx="11"/>
+          </p:nvPr>
+        </p:nvSpPr>
+        <p:spPr/>
         <p:txBody>
           <a:bodyPr/>
           <a:lstStyle/>
           <a:p>
             <a:r>
-              <a:rPr lang="es-419" dirty="0">
-                <a:latin typeface="Times New Roman" panose="02020603050405020304" pitchFamily="18" charset="0"/>
-                <a:cs typeface="Times New Roman" panose="02020603050405020304" pitchFamily="18" charset="0"/>
-              </a:rPr>
-              <a:t>Preguntas planteadas.</a:t>
-            </a:r>
-            <a:endParaRPr lang="es-ES" dirty="0"/>
-          </a:p>
-        </p:txBody>
-      </p:sp>
-      <p:sp>
-        <p:nvSpPr>
-          <p:cNvPr id="3" name="Marcador de contenido 2">
-            <a:extLst>
-              <a:ext uri="{FF2B5EF4-FFF2-40B4-BE49-F238E27FC236}">
-                <a16:creationId xmlns:a16="http://schemas.microsoft.com/office/drawing/2014/main" id="{8E371D1A-7A38-2C3F-C428-E62A7FD44170}"/>
-              </a:ext>
-            </a:extLst>
-          </p:cNvPr>
-          <p:cNvSpPr>
-            <a:spLocks noGrp="1"/>
-          </p:cNvSpPr>
-          <p:nvPr>
-            <p:ph idx="1"/>
-          </p:nvPr>
-        </p:nvSpPr>
-        <p:spPr>
-          <a:xfrm>
-            <a:off x="838200" y="1056088"/>
-            <a:ext cx="10515600" cy="4351338"/>
-          </a:xfrm>
-        </p:spPr>
-        <p:txBody>
-          <a:bodyPr>
-            <a:normAutofit/>
-          </a:bodyPr>
-          <a:lstStyle/>
-          <a:p>
-            <a:pPr algn="l"/>
-            <a:r>
-              <a:rPr lang="es-ES" sz="2400" b="0" i="0" u="none" strike="noStrike" baseline="0" dirty="0">
-                <a:latin typeface="Times New Roman" panose="02020603050405020304" pitchFamily="18" charset="0"/>
-                <a:cs typeface="Times New Roman" panose="02020603050405020304" pitchFamily="18" charset="0"/>
-              </a:rPr>
-              <a:t>Muestra mediante un gráfico de líneas como ha variado el precio por kilo de las bananas y los plátanos en los tickets disponibles, a lo largo del tiempo.</a:t>
-            </a:r>
-            <a:endParaRPr lang="es-ES" sz="2400" dirty="0">
-              <a:latin typeface="Times New Roman" panose="02020603050405020304" pitchFamily="18" charset="0"/>
-              <a:cs typeface="Times New Roman" panose="02020603050405020304" pitchFamily="18" charset="0"/>
-            </a:endParaRPr>
-          </a:p>
-        </p:txBody>
-      </p:sp>
-      <p:sp>
-        <p:nvSpPr>
-          <p:cNvPr id="4" name="Marcador de pie de página 3">
-            <a:extLst>
-              <a:ext uri="{FF2B5EF4-FFF2-40B4-BE49-F238E27FC236}">
-                <a16:creationId xmlns:a16="http://schemas.microsoft.com/office/drawing/2014/main" id="{5B3C68A5-04C0-A6F5-F810-CCCB486E151A}"/>
-              </a:ext>
-            </a:extLst>
-          </p:cNvPr>
-          <p:cNvSpPr>
-            <a:spLocks noGrp="1"/>
-          </p:cNvSpPr>
-          <p:nvPr>
-            <p:ph type="ftr" sz="quarter" idx="11"/>
-          </p:nvPr>
-        </p:nvSpPr>
-        <p:spPr/>
-        <p:txBody>
-          <a:bodyPr/>
-          <a:lstStyle/>
-          <a:p>
-            <a:r>
-              <a:rPr lang="es-ES"/>
+              <a:rPr lang="es-ES" dirty="0"/>
               <a:t>Mini Proyecto</a:t>
             </a:r>
-            <a:endParaRPr lang="es-ES" dirty="0"/>
           </a:p>
         </p:txBody>
       </p:sp>
@@ -5533,7 +5565,7 @@
           <p:cNvPr id="5" name="Marcador de número de diapositiva 4">
             <a:extLst>
               <a:ext uri="{FF2B5EF4-FFF2-40B4-BE49-F238E27FC236}">
-                <a16:creationId xmlns:a16="http://schemas.microsoft.com/office/drawing/2014/main" id="{7E7A77EE-F2ED-6C6F-78E2-704040774D54}"/>
+                <a16:creationId xmlns:a16="http://schemas.microsoft.com/office/drawing/2014/main" id="{FC70395E-1F0D-17DB-C045-E2AD921507BA}"/>
               </a:ext>
             </a:extLst>
           </p:cNvPr>
@@ -5558,46 +5590,155 @@
           </a:p>
         </p:txBody>
       </p:sp>
-      <p:pic>
-        <p:nvPicPr>
-          <p:cNvPr id="7" name="Imagen 6" descr="Diagrama&#10;&#10;El contenido generado por IA puede ser incorrecto.">
-            <a:extLst>
-              <a:ext uri="{FF2B5EF4-FFF2-40B4-BE49-F238E27FC236}">
-                <a16:creationId xmlns:a16="http://schemas.microsoft.com/office/drawing/2014/main" id="{99B815A9-557F-E2E4-8DCC-2030C7FCAA4A}"/>
-              </a:ext>
-            </a:extLst>
-          </p:cNvPr>
-          <p:cNvPicPr>
-            <a:picLocks noChangeAspect="1"/>
-          </p:cNvPicPr>
+      <p:sp>
+        <p:nvSpPr>
+          <p:cNvPr id="6" name="Rectángulo 5">
+            <a:extLst>
+              <a:ext uri="{FF2B5EF4-FFF2-40B4-BE49-F238E27FC236}">
+                <a16:creationId xmlns:a16="http://schemas.microsoft.com/office/drawing/2014/main" id="{8122605C-807B-80A4-E840-9C1EB0BDA3B5}"/>
+              </a:ext>
+            </a:extLst>
+          </p:cNvPr>
+          <p:cNvSpPr/>
           <p:nvPr/>
-        </p:nvPicPr>
-        <p:blipFill>
-          <a:blip r:embed="rId2">
-            <a:extLst>
-              <a:ext uri="{28A0092B-C50C-407E-A947-70E740481C1C}">
-                <a14:useLocalDpi xmlns:a14="http://schemas.microsoft.com/office/drawing/2010/main" val="0"/>
-              </a:ext>
-            </a:extLst>
-          </a:blip>
-          <a:stretch>
-            <a:fillRect/>
-          </a:stretch>
-        </p:blipFill>
+        </p:nvSpPr>
         <p:spPr>
           <a:xfrm>
-            <a:off x="3909644" y="1787768"/>
-            <a:ext cx="4372711" cy="4372711"/>
+            <a:off x="1" y="647803"/>
+            <a:ext cx="6095999" cy="894735"/>
           </a:xfrm>
           <a:prstGeom prst="rect">
             <a:avLst/>
           </a:prstGeom>
+          <a:noFill/>
         </p:spPr>
-      </p:pic>
+        <p:txBody>
+          <a:bodyPr wrap="square" lIns="91440" tIns="45720" rIns="91440" bIns="45720" anchor="ctr">
+            <a:spAutoFit/>
+          </a:bodyPr>
+          <a:lstStyle/>
+          <a:p>
+            <a:pPr algn="ctr"/>
+            <a:r>
+              <a:rPr lang="es-419" sz="5000" b="1" dirty="0">
+                <a:ln w="22225">
+                  <a:solidFill>
+                    <a:srgbClr val="00965F"/>
+                  </a:solidFill>
+                  <a:prstDash val="solid"/>
+                </a:ln>
+                <a:solidFill>
+                  <a:srgbClr val="00965F"/>
+                </a:solidFill>
+                <a:latin typeface="Cooper Black" panose="020F0502020204030204" pitchFamily="18" charset="0"/>
+              </a:rPr>
+              <a:t>CONCLUSIONES</a:t>
+            </a:r>
+            <a:endParaRPr lang="es-ES" sz="5000" b="1" cap="none" spc="0" dirty="0">
+              <a:ln w="22225">
+                <a:solidFill>
+                  <a:srgbClr val="00965F"/>
+                </a:solidFill>
+                <a:prstDash val="solid"/>
+              </a:ln>
+              <a:solidFill>
+                <a:srgbClr val="00965F"/>
+              </a:solidFill>
+              <a:effectLst/>
+              <a:latin typeface="Cooper Black" panose="020F0502020204030204" pitchFamily="18" charset="0"/>
+            </a:endParaRPr>
+          </a:p>
+        </p:txBody>
+      </p:sp>
+      <p:sp>
+        <p:nvSpPr>
+          <p:cNvPr id="7" name="CuadroTexto 6">
+            <a:extLst>
+              <a:ext uri="{FF2B5EF4-FFF2-40B4-BE49-F238E27FC236}">
+                <a16:creationId xmlns:a16="http://schemas.microsoft.com/office/drawing/2014/main" id="{8F361DFA-BCB6-89A8-8D11-954826817572}"/>
+              </a:ext>
+            </a:extLst>
+          </p:cNvPr>
+          <p:cNvSpPr txBox="1"/>
+          <p:nvPr/>
+        </p:nvSpPr>
+        <p:spPr>
+          <a:xfrm>
+            <a:off x="1246238" y="2228671"/>
+            <a:ext cx="10107562" cy="1938992"/>
+          </a:xfrm>
+          <a:prstGeom prst="rect">
+            <a:avLst/>
+          </a:prstGeom>
+          <a:noFill/>
+        </p:spPr>
+        <p:txBody>
+          <a:bodyPr wrap="square" rtlCol="0">
+            <a:spAutoFit/>
+          </a:bodyPr>
+          <a:lstStyle/>
+          <a:p>
+            <a:pPr marL="342900" indent="-342900">
+              <a:buFontTx/>
+              <a:buChar char="-"/>
+            </a:pPr>
+            <a:r>
+              <a:rPr lang="es-419" sz="3000" dirty="0">
+                <a:latin typeface="Times New Roman" panose="02020603050405020304" pitchFamily="18" charset="0"/>
+                <a:cs typeface="Times New Roman" panose="02020603050405020304" pitchFamily="18" charset="0"/>
+              </a:rPr>
+              <a:t>Hábitos de consumo 💰</a:t>
+            </a:r>
+          </a:p>
+          <a:p>
+            <a:pPr marL="342900" indent="-342900">
+              <a:buFontTx/>
+              <a:buChar char="-"/>
+            </a:pPr>
+            <a:r>
+              <a:rPr lang="es-ES" sz="3000" dirty="0">
+                <a:latin typeface="Times New Roman" panose="02020603050405020304" pitchFamily="18" charset="0"/>
+                <a:cs typeface="Times New Roman" panose="02020603050405020304" pitchFamily="18" charset="0"/>
+              </a:rPr>
+              <a:t>Variaciones en precios unitarios por producto 📈</a:t>
+            </a:r>
+          </a:p>
+          <a:p>
+            <a:pPr marL="342900" indent="-342900">
+              <a:buFontTx/>
+              <a:buChar char="-"/>
+            </a:pPr>
+            <a:r>
+              <a:rPr lang="es-ES" sz="3000" dirty="0">
+                <a:latin typeface="Times New Roman" panose="02020603050405020304" pitchFamily="18" charset="0"/>
+                <a:cs typeface="Times New Roman" panose="02020603050405020304" pitchFamily="18" charset="0"/>
+              </a:rPr>
+              <a:t>Patrones de compra</a:t>
+            </a:r>
+          </a:p>
+          <a:p>
+            <a:pPr marL="342900" indent="-342900">
+              <a:buFontTx/>
+              <a:buChar char="-"/>
+            </a:pPr>
+            <a:r>
+              <a:rPr lang="es-419" sz="3000" dirty="0">
+                <a:latin typeface="Times New Roman" panose="02020603050405020304" pitchFamily="18" charset="0"/>
+                <a:cs typeface="Times New Roman" panose="02020603050405020304" pitchFamily="18" charset="0"/>
+              </a:rPr>
+              <a:t>Estrategias de ahorro personal 📊 </a:t>
+            </a:r>
+            <a:endParaRPr lang="es-ES" sz="3000" dirty="0">
+              <a:latin typeface="Times New Roman" panose="02020603050405020304" pitchFamily="18" charset="0"/>
+              <a:cs typeface="Times New Roman" panose="02020603050405020304" pitchFamily="18" charset="0"/>
+            </a:endParaRPr>
+          </a:p>
+        </p:txBody>
+      </p:sp>
     </p:spTree>
     <p:extLst>
       <p:ext uri="{BB962C8B-B14F-4D97-AF65-F5344CB8AC3E}">
-        <p14:creationId xmlns:p14="http://schemas.microsoft.com/office/powerpoint/2010/main" val="3447622527"/>
+        <p14:creationId xmlns:p14="http://schemas.microsoft.com/office/powerpoint/2010/main" val="1797453614"/>
       </p:ext>
     </p:extLst>
   </p:cSld>
@@ -5612,7 +5753,13 @@
   <p:cSld>
     <p:spTree>
       <p:nvGrpSpPr>
-        <p:cNvPr id="1" name=""/>
+        <p:cNvPr id="1" name="">
+          <a:extLst>
+            <a:ext uri="{FF2B5EF4-FFF2-40B4-BE49-F238E27FC236}">
+              <a16:creationId xmlns:a16="http://schemas.microsoft.com/office/drawing/2014/main" id="{86841BBC-FCB7-1A3F-26E9-6DF50D2ABD76}"/>
+            </a:ext>
+          </a:extLst>
+        </p:cNvPr>
         <p:cNvGrpSpPr/>
         <p:nvPr/>
       </p:nvGrpSpPr>
@@ -5626,18 +5773,18 @@
       </p:grpSpPr>
       <p:sp>
         <p:nvSpPr>
-          <p:cNvPr id="2" name="Título 1">
-            <a:extLst>
-              <a:ext uri="{FF2B5EF4-FFF2-40B4-BE49-F238E27FC236}">
-                <a16:creationId xmlns:a16="http://schemas.microsoft.com/office/drawing/2014/main" id="{B8CBAAC1-DB26-6664-FE99-80535EB78E1B}"/>
-              </a:ext>
-            </a:extLst>
-          </p:cNvPr>
-          <p:cNvSpPr>
-            <a:spLocks noGrp="1"/>
-          </p:cNvSpPr>
-          <p:nvPr>
-            <p:ph type="title"/>
+          <p:cNvPr id="4" name="Marcador de pie de página 3">
+            <a:extLst>
+              <a:ext uri="{FF2B5EF4-FFF2-40B4-BE49-F238E27FC236}">
+                <a16:creationId xmlns:a16="http://schemas.microsoft.com/office/drawing/2014/main" id="{6E008C3C-0DD8-8074-F899-8ACE91D2B295}"/>
+              </a:ext>
+            </a:extLst>
+          </p:cNvPr>
+          <p:cNvSpPr>
+            <a:spLocks noGrp="1"/>
+          </p:cNvSpPr>
+          <p:nvPr>
+            <p:ph type="ftr" sz="quarter" idx="11"/>
           </p:nvPr>
         </p:nvSpPr>
         <p:spPr/>
@@ -5646,70 +5793,9 @@
           <a:lstStyle/>
           <a:p>
             <a:r>
-              <a:rPr lang="es-419" dirty="0">
-                <a:latin typeface="Times New Roman" panose="02020603050405020304" pitchFamily="18" charset="0"/>
-                <a:cs typeface="Times New Roman" panose="02020603050405020304" pitchFamily="18" charset="0"/>
-              </a:rPr>
-              <a:t>Conclusiones.</a:t>
-            </a:r>
-            <a:endParaRPr lang="es-ES" dirty="0">
-              <a:latin typeface="Times New Roman" panose="02020603050405020304" pitchFamily="18" charset="0"/>
-              <a:cs typeface="Times New Roman" panose="02020603050405020304" pitchFamily="18" charset="0"/>
-            </a:endParaRPr>
-          </a:p>
-        </p:txBody>
-      </p:sp>
-      <p:sp>
-        <p:nvSpPr>
-          <p:cNvPr id="3" name="Marcador de contenido 2">
-            <a:extLst>
-              <a:ext uri="{FF2B5EF4-FFF2-40B4-BE49-F238E27FC236}">
-                <a16:creationId xmlns:a16="http://schemas.microsoft.com/office/drawing/2014/main" id="{9E170571-36AF-74DB-F8D1-C4366074EE2F}"/>
-              </a:ext>
-            </a:extLst>
-          </p:cNvPr>
-          <p:cNvSpPr>
-            <a:spLocks noGrp="1"/>
-          </p:cNvSpPr>
-          <p:nvPr>
-            <p:ph idx="1"/>
-          </p:nvPr>
-        </p:nvSpPr>
-        <p:spPr/>
-        <p:txBody>
-          <a:bodyPr/>
-          <a:lstStyle/>
-          <a:p>
-            <a:endParaRPr lang="es-ES" dirty="0"/>
-          </a:p>
-        </p:txBody>
-      </p:sp>
-      <p:sp>
-        <p:nvSpPr>
-          <p:cNvPr id="4" name="Marcador de pie de página 3">
-            <a:extLst>
-              <a:ext uri="{FF2B5EF4-FFF2-40B4-BE49-F238E27FC236}">
-                <a16:creationId xmlns:a16="http://schemas.microsoft.com/office/drawing/2014/main" id="{7D6235B3-E800-EAF8-7477-E7422058E870}"/>
-              </a:ext>
-            </a:extLst>
-          </p:cNvPr>
-          <p:cNvSpPr>
-            <a:spLocks noGrp="1"/>
-          </p:cNvSpPr>
-          <p:nvPr>
-            <p:ph type="ftr" sz="quarter" idx="11"/>
-          </p:nvPr>
-        </p:nvSpPr>
-        <p:spPr/>
-        <p:txBody>
-          <a:bodyPr/>
-          <a:lstStyle/>
-          <a:p>
-            <a:r>
-              <a:rPr lang="es-ES"/>
+              <a:rPr lang="es-ES" dirty="0"/>
               <a:t>Mini Proyecto</a:t>
             </a:r>
-            <a:endParaRPr lang="es-ES" dirty="0"/>
           </a:p>
         </p:txBody>
       </p:sp>
@@ -5718,7 +5804,7 @@
           <p:cNvPr id="5" name="Marcador de número de diapositiva 4">
             <a:extLst>
               <a:ext uri="{FF2B5EF4-FFF2-40B4-BE49-F238E27FC236}">
-                <a16:creationId xmlns:a16="http://schemas.microsoft.com/office/drawing/2014/main" id="{57657E57-7447-E0F9-F19B-DAD458B1D8D9}"/>
+                <a16:creationId xmlns:a16="http://schemas.microsoft.com/office/drawing/2014/main" id="{07C0F9BA-2E17-73D1-74DA-763C93FC85B8}"/>
               </a:ext>
             </a:extLst>
           </p:cNvPr>
@@ -5743,16 +5829,187 @@
           </a:p>
         </p:txBody>
       </p:sp>
+      <p:sp>
+        <p:nvSpPr>
+          <p:cNvPr id="6" name="Rectángulo 5">
+            <a:extLst>
+              <a:ext uri="{FF2B5EF4-FFF2-40B4-BE49-F238E27FC236}">
+                <a16:creationId xmlns:a16="http://schemas.microsoft.com/office/drawing/2014/main" id="{B9CF6696-5FEC-5B2C-3A99-6F1BCA6CA4E2}"/>
+              </a:ext>
+            </a:extLst>
+          </p:cNvPr>
+          <p:cNvSpPr/>
+          <p:nvPr/>
+        </p:nvSpPr>
+        <p:spPr>
+          <a:xfrm>
+            <a:off x="1" y="2534265"/>
+            <a:ext cx="6095999" cy="894735"/>
+          </a:xfrm>
+          <a:prstGeom prst="rect">
+            <a:avLst/>
+          </a:prstGeom>
+          <a:noFill/>
+        </p:spPr>
+        <p:txBody>
+          <a:bodyPr wrap="square" lIns="91440" tIns="45720" rIns="91440" bIns="45720" anchor="ctr">
+            <a:spAutoFit/>
+          </a:bodyPr>
+          <a:lstStyle/>
+          <a:p>
+            <a:pPr algn="ctr"/>
+            <a:r>
+              <a:rPr lang="es-419" sz="5000" b="1" dirty="0">
+                <a:ln w="22225">
+                  <a:solidFill>
+                    <a:srgbClr val="00965F"/>
+                  </a:solidFill>
+                  <a:prstDash val="solid"/>
+                </a:ln>
+                <a:solidFill>
+                  <a:srgbClr val="00965F"/>
+                </a:solidFill>
+                <a:latin typeface="Cooper Black" panose="020F0502020204030204" pitchFamily="18" charset="0"/>
+              </a:rPr>
+              <a:t>¿PREGUNTAS?</a:t>
+            </a:r>
+            <a:endParaRPr lang="es-ES" sz="5000" b="1" cap="none" spc="0" dirty="0">
+              <a:ln w="22225">
+                <a:solidFill>
+                  <a:srgbClr val="00965F"/>
+                </a:solidFill>
+                <a:prstDash val="solid"/>
+              </a:ln>
+              <a:solidFill>
+                <a:srgbClr val="00965F"/>
+              </a:solidFill>
+              <a:effectLst/>
+              <a:latin typeface="Cooper Black" panose="020F0502020204030204" pitchFamily="18" charset="0"/>
+            </a:endParaRPr>
+          </a:p>
+        </p:txBody>
+      </p:sp>
+      <p:pic>
+        <p:nvPicPr>
+          <p:cNvPr id="3" name="Imagen 2" descr="Imagen que contiene a rayas, hombre, computadora, tabla&#10;&#10;El contenido generado por IA puede ser incorrecto.">
+            <a:extLst>
+              <a:ext uri="{FF2B5EF4-FFF2-40B4-BE49-F238E27FC236}">
+                <a16:creationId xmlns:a16="http://schemas.microsoft.com/office/drawing/2014/main" id="{2A958066-F4A6-873C-5DD8-FB5E28B789C3}"/>
+              </a:ext>
+            </a:extLst>
+          </p:cNvPr>
+          <p:cNvPicPr>
+            <a:picLocks noChangeAspect="1"/>
+          </p:cNvPicPr>
+          <p:nvPr/>
+        </p:nvPicPr>
+        <p:blipFill>
+          <a:blip r:embed="rId2">
+            <a:extLst>
+              <a:ext uri="{28A0092B-C50C-407E-A947-70E740481C1C}">
+                <a14:useLocalDpi xmlns:a14="http://schemas.microsoft.com/office/drawing/2010/main" val="0"/>
+              </a:ext>
+            </a:extLst>
+          </a:blip>
+          <a:stretch>
+            <a:fillRect/>
+          </a:stretch>
+        </p:blipFill>
+        <p:spPr>
+          <a:xfrm>
+            <a:off x="7239000" y="1361843"/>
+            <a:ext cx="4076139" cy="3229822"/>
+          </a:xfrm>
+          <a:prstGeom prst="rect">
+            <a:avLst/>
+          </a:prstGeom>
+        </p:spPr>
+      </p:pic>
     </p:spTree>
     <p:extLst>
       <p:ext uri="{BB962C8B-B14F-4D97-AF65-F5344CB8AC3E}">
-        <p14:creationId xmlns:p14="http://schemas.microsoft.com/office/powerpoint/2010/main" val="2518881021"/>
+        <p14:creationId xmlns:p14="http://schemas.microsoft.com/office/powerpoint/2010/main" val="2239403758"/>
       </p:ext>
     </p:extLst>
   </p:cSld>
   <p:clrMapOvr>
     <a:masterClrMapping/>
   </p:clrMapOvr>
+  <p:timing>
+    <p:tnLst>
+      <p:par>
+        <p:cTn id="1" dur="indefinite" restart="never" nodeType="tmRoot">
+          <p:childTnLst>
+            <p:seq concurrent="1" nextAc="seek">
+              <p:cTn id="2" dur="indefinite" nodeType="mainSeq">
+                <p:childTnLst>
+                  <p:par>
+                    <p:cTn id="3" fill="hold">
+                      <p:stCondLst>
+                        <p:cond delay="indefinite"/>
+                      </p:stCondLst>
+                      <p:childTnLst>
+                        <p:par>
+                          <p:cTn id="4" fill="hold">
+                            <p:stCondLst>
+                              <p:cond delay="0"/>
+                            </p:stCondLst>
+                            <p:childTnLst>
+                              <p:par>
+                                <p:cTn id="5" presetID="1" presetClass="entr" presetSubtype="0" fill="hold" nodeType="clickEffect">
+                                  <p:stCondLst>
+                                    <p:cond delay="0"/>
+                                  </p:stCondLst>
+                                  <p:childTnLst>
+                                    <p:set>
+                                      <p:cBhvr>
+                                        <p:cTn id="6" dur="1" fill="hold">
+                                          <p:stCondLst>
+                                            <p:cond delay="0"/>
+                                          </p:stCondLst>
+                                        </p:cTn>
+                                        <p:tgtEl>
+                                          <p:spTgt spid="3"/>
+                                        </p:tgtEl>
+                                        <p:attrNameLst>
+                                          <p:attrName>style.visibility</p:attrName>
+                                        </p:attrNameLst>
+                                      </p:cBhvr>
+                                      <p:to>
+                                        <p:strVal val="visible"/>
+                                      </p:to>
+                                    </p:set>
+                                  </p:childTnLst>
+                                </p:cTn>
+                              </p:par>
+                            </p:childTnLst>
+                          </p:cTn>
+                        </p:par>
+                      </p:childTnLst>
+                    </p:cTn>
+                  </p:par>
+                </p:childTnLst>
+              </p:cTn>
+              <p:prevCondLst>
+                <p:cond evt="onPrev" delay="0">
+                  <p:tgtEl>
+                    <p:sldTgt/>
+                  </p:tgtEl>
+                </p:cond>
+              </p:prevCondLst>
+              <p:nextCondLst>
+                <p:cond evt="onNext" delay="0">
+                  <p:tgtEl>
+                    <p:sldTgt/>
+                  </p:tgtEl>
+                </p:cond>
+              </p:nextCondLst>
+            </p:seq>
+          </p:childTnLst>
+        </p:cTn>
+      </p:par>
+    </p:tnLst>
+  </p:timing>
 </p:sld>
 </file>
 
@@ -5778,7 +6035,7 @@
           <p:cNvPr id="4" name="Marcador de pie de página 3">
             <a:extLst>
               <a:ext uri="{FF2B5EF4-FFF2-40B4-BE49-F238E27FC236}">
-                <a16:creationId xmlns:a16="http://schemas.microsoft.com/office/drawing/2014/main" id="{5B913D98-E958-BF34-0704-FD46D3F08431}"/>
+                <a16:creationId xmlns:a16="http://schemas.microsoft.com/office/drawing/2014/main" id="{F38377CD-7F5C-8770-A3A5-BB7BD667BB95}"/>
               </a:ext>
             </a:extLst>
           </p:cNvPr>
@@ -5795,10 +6052,9 @@
           <a:lstStyle/>
           <a:p>
             <a:r>
-              <a:rPr lang="es-ES"/>
+              <a:rPr lang="es-ES" dirty="0"/>
               <a:t>Mini Proyecto</a:t>
             </a:r>
-            <a:endParaRPr lang="es-ES" dirty="0"/>
           </a:p>
         </p:txBody>
       </p:sp>
@@ -5807,7 +6063,7 @@
           <p:cNvPr id="5" name="Marcador de número de diapositiva 4">
             <a:extLst>
               <a:ext uri="{FF2B5EF4-FFF2-40B4-BE49-F238E27FC236}">
-                <a16:creationId xmlns:a16="http://schemas.microsoft.com/office/drawing/2014/main" id="{F1AF81DB-9683-5FD0-32E4-6F52F10269B5}"/>
+                <a16:creationId xmlns:a16="http://schemas.microsoft.com/office/drawing/2014/main" id="{BCB9C6C5-6230-0CD0-390A-DF2E98E053FB}"/>
               </a:ext>
             </a:extLst>
           </p:cNvPr>
@@ -5832,12 +6088,166 @@
           </a:p>
         </p:txBody>
       </p:sp>
+      <p:sp>
+        <p:nvSpPr>
+          <p:cNvPr id="6" name="Rectángulo 5">
+            <a:extLst>
+              <a:ext uri="{FF2B5EF4-FFF2-40B4-BE49-F238E27FC236}">
+                <a16:creationId xmlns:a16="http://schemas.microsoft.com/office/drawing/2014/main" id="{0C607BB8-92C8-AD87-4D35-40C00878FCEE}"/>
+              </a:ext>
+            </a:extLst>
+          </p:cNvPr>
+          <p:cNvSpPr/>
+          <p:nvPr/>
+        </p:nvSpPr>
+        <p:spPr>
+          <a:xfrm>
+            <a:off x="1" y="647803"/>
+            <a:ext cx="6095999" cy="894735"/>
+          </a:xfrm>
+          <a:prstGeom prst="rect">
+            <a:avLst/>
+          </a:prstGeom>
+          <a:noFill/>
+        </p:spPr>
+        <p:txBody>
+          <a:bodyPr wrap="square" lIns="91440" tIns="45720" rIns="91440" bIns="45720" anchor="ctr">
+            <a:spAutoFit/>
+          </a:bodyPr>
+          <a:lstStyle/>
+          <a:p>
+            <a:pPr algn="ctr"/>
+            <a:r>
+              <a:rPr lang="es-419" sz="5000" b="1" dirty="0">
+                <a:ln w="22225">
+                  <a:solidFill>
+                    <a:srgbClr val="00965F"/>
+                  </a:solidFill>
+                  <a:prstDash val="solid"/>
+                </a:ln>
+                <a:solidFill>
+                  <a:srgbClr val="00965F"/>
+                </a:solidFill>
+                <a:latin typeface="Cooper Black" panose="020F0502020204030204" pitchFamily="18" charset="0"/>
+              </a:rPr>
+              <a:t>ÍNDICE</a:t>
+            </a:r>
+            <a:endParaRPr lang="es-ES" sz="5000" b="1" cap="none" spc="0" dirty="0">
+              <a:ln w="22225">
+                <a:solidFill>
+                  <a:srgbClr val="00965F"/>
+                </a:solidFill>
+                <a:prstDash val="solid"/>
+              </a:ln>
+              <a:solidFill>
+                <a:srgbClr val="00965F"/>
+              </a:solidFill>
+              <a:effectLst/>
+              <a:latin typeface="Cooper Black" panose="020F0502020204030204" pitchFamily="18" charset="0"/>
+            </a:endParaRPr>
+          </a:p>
+        </p:txBody>
+      </p:sp>
+      <p:sp>
+        <p:nvSpPr>
+          <p:cNvPr id="7" name="CuadroTexto 6">
+            <a:extLst>
+              <a:ext uri="{FF2B5EF4-FFF2-40B4-BE49-F238E27FC236}">
+                <a16:creationId xmlns:a16="http://schemas.microsoft.com/office/drawing/2014/main" id="{DA9D05B7-8148-970C-C22D-167BC79EC1FA}"/>
+              </a:ext>
+            </a:extLst>
+          </p:cNvPr>
+          <p:cNvSpPr txBox="1"/>
+          <p:nvPr/>
+        </p:nvSpPr>
+        <p:spPr>
+          <a:xfrm>
+            <a:off x="1246238" y="2228671"/>
+            <a:ext cx="4849762" cy="2400657"/>
+          </a:xfrm>
+          <a:prstGeom prst="rect">
+            <a:avLst/>
+          </a:prstGeom>
+          <a:noFill/>
+        </p:spPr>
+        <p:txBody>
+          <a:bodyPr wrap="square" rtlCol="0">
+            <a:spAutoFit/>
+          </a:bodyPr>
+          <a:lstStyle/>
+          <a:p>
+            <a:pPr marL="342900" indent="-342900">
+              <a:buFont typeface="+mj-lt"/>
+              <a:buAutoNum type="arabicPeriod"/>
+            </a:pPr>
+            <a:r>
+              <a:rPr lang="es-419" sz="3000" dirty="0">
+                <a:latin typeface="Times New Roman" panose="02020603050405020304" pitchFamily="18" charset="0"/>
+                <a:cs typeface="Times New Roman" panose="02020603050405020304" pitchFamily="18" charset="0"/>
+              </a:rPr>
+              <a:t>Introducción </a:t>
+            </a:r>
+          </a:p>
+          <a:p>
+            <a:pPr marL="800100" lvl="1" indent="-342900">
+              <a:buFont typeface="+mj-lt"/>
+              <a:buAutoNum type="arabicPeriod"/>
+            </a:pPr>
+            <a:r>
+              <a:rPr lang="es-419" sz="3000" dirty="0">
+                <a:latin typeface="Times New Roman" panose="02020603050405020304" pitchFamily="18" charset="0"/>
+                <a:cs typeface="Times New Roman" panose="02020603050405020304" pitchFamily="18" charset="0"/>
+              </a:rPr>
+              <a:t>Análisis ticket </a:t>
+            </a:r>
+          </a:p>
+          <a:p>
+            <a:pPr marL="342900" indent="-342900">
+              <a:buFont typeface="+mj-lt"/>
+              <a:buAutoNum type="arabicPeriod"/>
+            </a:pPr>
+            <a:r>
+              <a:rPr lang="es-419" sz="3000" dirty="0">
+                <a:latin typeface="Times New Roman" panose="02020603050405020304" pitchFamily="18" charset="0"/>
+                <a:cs typeface="Times New Roman" panose="02020603050405020304" pitchFamily="18" charset="0"/>
+              </a:rPr>
+              <a:t>Análisis productos </a:t>
+            </a:r>
+          </a:p>
+          <a:p>
+            <a:pPr marL="800100" lvl="1" indent="-342900">
+              <a:buFont typeface="+mj-lt"/>
+              <a:buAutoNum type="arabicPeriod"/>
+            </a:pPr>
+            <a:r>
+              <a:rPr lang="es-419" sz="3000" dirty="0">
+                <a:latin typeface="Times New Roman" panose="02020603050405020304" pitchFamily="18" charset="0"/>
+                <a:cs typeface="Times New Roman" panose="02020603050405020304" pitchFamily="18" charset="0"/>
+              </a:rPr>
+              <a:t>Preguntas planteadas</a:t>
+            </a:r>
+          </a:p>
+          <a:p>
+            <a:pPr marL="342900" indent="-342900">
+              <a:buFont typeface="+mj-lt"/>
+              <a:buAutoNum type="arabicPeriod"/>
+            </a:pPr>
+            <a:r>
+              <a:rPr lang="es-419" sz="3000" dirty="0">
+                <a:latin typeface="Times New Roman" panose="02020603050405020304" pitchFamily="18" charset="0"/>
+                <a:cs typeface="Times New Roman" panose="02020603050405020304" pitchFamily="18" charset="0"/>
+              </a:rPr>
+              <a:t>Conclusiones</a:t>
+            </a:r>
+          </a:p>
+        </p:txBody>
+      </p:sp>
       <p:pic>
         <p:nvPicPr>
-          <p:cNvPr id="11" name="Marcador de contenido 10" descr="Texto&#10;&#10;El contenido generado por IA puede ser incorrecto.">
-            <a:extLst>
-              <a:ext uri="{FF2B5EF4-FFF2-40B4-BE49-F238E27FC236}">
-                <a16:creationId xmlns:a16="http://schemas.microsoft.com/office/drawing/2014/main" id="{B29C65DF-A8F5-66F2-A2B4-6989C7795155}"/>
+          <p:cNvPr id="2" name="Marcador de contenido 10" descr="Texto&#10;&#10;El contenido generado por IA puede ser incorrecto.">
+            <a:extLst>
+              <a:ext uri="{FF2B5EF4-FFF2-40B4-BE49-F238E27FC236}">
+                <a16:creationId xmlns:a16="http://schemas.microsoft.com/office/drawing/2014/main" id="{1A61C779-4431-EED7-EFD8-D203E26E9335}"/>
               </a:ext>
             </a:extLst>
           </p:cNvPr>
@@ -5862,15 +6272,15 @@
         </p:blipFill>
         <p:spPr>
           <a:xfrm>
-            <a:off x="3137178" y="215570"/>
-            <a:ext cx="5917644" cy="5913087"/>
+            <a:off x="6341807" y="647803"/>
+            <a:ext cx="5154562" cy="5150593"/>
           </a:xfrm>
         </p:spPr>
       </p:pic>
     </p:spTree>
     <p:extLst>
       <p:ext uri="{BB962C8B-B14F-4D97-AF65-F5344CB8AC3E}">
-        <p14:creationId xmlns:p14="http://schemas.microsoft.com/office/powerpoint/2010/main" val="3159337177"/>
+        <p14:creationId xmlns:p14="http://schemas.microsoft.com/office/powerpoint/2010/main" val="336396107"/>
       </p:ext>
     </p:extLst>
   </p:cSld>
@@ -5902,7 +6312,7 @@
           <p:cNvPr id="4" name="Marcador de pie de página 3">
             <a:extLst>
               <a:ext uri="{FF2B5EF4-FFF2-40B4-BE49-F238E27FC236}">
-                <a16:creationId xmlns:a16="http://schemas.microsoft.com/office/drawing/2014/main" id="{F38377CD-7F5C-8770-A3A5-BB7BD667BB95}"/>
+                <a16:creationId xmlns:a16="http://schemas.microsoft.com/office/drawing/2014/main" id="{7A3AB84F-FC0E-79ED-2AA2-CCF2B4172D85}"/>
               </a:ext>
             </a:extLst>
           </p:cNvPr>
@@ -5919,9 +6329,10 @@
           <a:lstStyle/>
           <a:p>
             <a:r>
-              <a:rPr lang="es-ES" dirty="0"/>
+              <a:rPr lang="es-ES"/>
               <a:t>Mini Proyecto</a:t>
             </a:r>
+            <a:endParaRPr lang="es-ES" dirty="0"/>
           </a:p>
         </p:txBody>
       </p:sp>
@@ -5930,7 +6341,7 @@
           <p:cNvPr id="5" name="Marcador de número de diapositiva 4">
             <a:extLst>
               <a:ext uri="{FF2B5EF4-FFF2-40B4-BE49-F238E27FC236}">
-                <a16:creationId xmlns:a16="http://schemas.microsoft.com/office/drawing/2014/main" id="{BCB9C6C5-6230-0CD0-390A-DF2E98E053FB}"/>
+                <a16:creationId xmlns:a16="http://schemas.microsoft.com/office/drawing/2014/main" id="{94EF5044-A1DD-0A16-78FB-64AFC25C1C1A}"/>
               </a:ext>
             </a:extLst>
           </p:cNvPr>
@@ -5957,10 +6368,10 @@
       </p:sp>
       <p:sp>
         <p:nvSpPr>
-          <p:cNvPr id="6" name="Rectángulo 5">
-            <a:extLst>
-              <a:ext uri="{FF2B5EF4-FFF2-40B4-BE49-F238E27FC236}">
-                <a16:creationId xmlns:a16="http://schemas.microsoft.com/office/drawing/2014/main" id="{0C607BB8-92C8-AD87-4D35-40C00878FCEE}"/>
+          <p:cNvPr id="3" name="Rectángulo 2">
+            <a:extLst>
+              <a:ext uri="{FF2B5EF4-FFF2-40B4-BE49-F238E27FC236}">
+                <a16:creationId xmlns:a16="http://schemas.microsoft.com/office/drawing/2014/main" id="{4C7755DD-11A3-785E-0DC9-A86054158ABF}"/>
               </a:ext>
             </a:extLst>
           </p:cNvPr>
@@ -5969,8 +6380,8 @@
         </p:nvSpPr>
         <p:spPr>
           <a:xfrm>
-            <a:off x="-1273629" y="419553"/>
-            <a:ext cx="7238999" cy="861774"/>
+            <a:off x="0" y="0"/>
+            <a:ext cx="6096000" cy="894735"/>
           </a:xfrm>
           <a:prstGeom prst="rect">
             <a:avLst/>
@@ -5978,7 +6389,7 @@
           <a:noFill/>
         </p:spPr>
         <p:txBody>
-          <a:bodyPr wrap="square" lIns="91440" tIns="45720" rIns="91440" bIns="45720">
+          <a:bodyPr wrap="square" lIns="91440" tIns="45720" rIns="91440" bIns="45720" anchor="ctr">
             <a:spAutoFit/>
           </a:bodyPr>
           <a:lstStyle/>
@@ -5997,7 +6408,7 @@
                 </a:solidFill>
                 <a:latin typeface="Cooper Black" panose="020F0502020204030204" pitchFamily="18" charset="0"/>
               </a:rPr>
-              <a:t>ÍNDICE</a:t>
+              <a:t>INTRODUCCIÓN</a:t>
             </a:r>
             <a:endParaRPr lang="es-ES" sz="5000" b="1" cap="none" spc="0" dirty="0">
               <a:ln w="22225">
@@ -6015,12 +6426,200 @@
           </a:p>
         </p:txBody>
       </p:sp>
-      <p:sp>
-        <p:nvSpPr>
-          <p:cNvPr id="7" name="CuadroTexto 6">
-            <a:extLst>
-              <a:ext uri="{FF2B5EF4-FFF2-40B4-BE49-F238E27FC236}">
-                <a16:creationId xmlns:a16="http://schemas.microsoft.com/office/drawing/2014/main" id="{DA9D05B7-8148-970C-C22D-167BC79EC1FA}"/>
+      <p:pic>
+        <p:nvPicPr>
+          <p:cNvPr id="12" name="Imagen 11" descr="Imagen de la pantalla de un celular con texto&#10;&#10;El contenido generado por IA puede ser incorrecto.">
+            <a:extLst>
+              <a:ext uri="{FF2B5EF4-FFF2-40B4-BE49-F238E27FC236}">
+                <a16:creationId xmlns:a16="http://schemas.microsoft.com/office/drawing/2014/main" id="{E3283573-B335-1108-03E0-C56AB214913C}"/>
+              </a:ext>
+            </a:extLst>
+          </p:cNvPr>
+          <p:cNvPicPr>
+            <a:picLocks noChangeAspect="1"/>
+          </p:cNvPicPr>
+          <p:nvPr/>
+        </p:nvPicPr>
+        <p:blipFill>
+          <a:blip r:embed="rId2">
+            <a:extLst>
+              <a:ext uri="{28A0092B-C50C-407E-A947-70E740481C1C}">
+                <a14:useLocalDpi xmlns:a14="http://schemas.microsoft.com/office/drawing/2010/main" val="0"/>
+              </a:ext>
+            </a:extLst>
+          </a:blip>
+          <a:srcRect b="20822"/>
+          <a:stretch/>
+        </p:blipFill>
+        <p:spPr>
+          <a:xfrm>
+            <a:off x="4981414" y="1038963"/>
+            <a:ext cx="2229172" cy="4780073"/>
+          </a:xfrm>
+          <a:prstGeom prst="rect">
+            <a:avLst/>
+          </a:prstGeom>
+        </p:spPr>
+      </p:pic>
+      <p:sp>
+        <p:nvSpPr>
+          <p:cNvPr id="13" name="Elipse 12">
+            <a:extLst>
+              <a:ext uri="{FF2B5EF4-FFF2-40B4-BE49-F238E27FC236}">
+                <a16:creationId xmlns:a16="http://schemas.microsoft.com/office/drawing/2014/main" id="{D3323FC7-F01E-B079-6494-F12DCAFB6759}"/>
+              </a:ext>
+            </a:extLst>
+          </p:cNvPr>
+          <p:cNvSpPr/>
+          <p:nvPr/>
+        </p:nvSpPr>
+        <p:spPr>
+          <a:xfrm>
+            <a:off x="5096256" y="1481328"/>
+            <a:ext cx="1999488" cy="713232"/>
+          </a:xfrm>
+          <a:prstGeom prst="ellipse">
+            <a:avLst/>
+          </a:prstGeom>
+          <a:noFill/>
+          <a:ln>
+            <a:solidFill>
+              <a:srgbClr val="FF0000"/>
+            </a:solidFill>
+          </a:ln>
+        </p:spPr>
+        <p:style>
+          <a:lnRef idx="2">
+            <a:schemeClr val="accent1">
+              <a:shade val="15000"/>
+            </a:schemeClr>
+          </a:lnRef>
+          <a:fillRef idx="1">
+            <a:schemeClr val="accent1"/>
+          </a:fillRef>
+          <a:effectRef idx="0">
+            <a:schemeClr val="accent1"/>
+          </a:effectRef>
+          <a:fontRef idx="minor">
+            <a:schemeClr val="lt1"/>
+          </a:fontRef>
+        </p:style>
+        <p:txBody>
+          <a:bodyPr rtlCol="0" anchor="ctr"/>
+          <a:lstStyle/>
+          <a:p>
+            <a:pPr algn="ctr"/>
+            <a:endParaRPr lang="es-ES"/>
+          </a:p>
+        </p:txBody>
+      </p:sp>
+      <p:sp>
+        <p:nvSpPr>
+          <p:cNvPr id="14" name="Abrir llave 13">
+            <a:extLst>
+              <a:ext uri="{FF2B5EF4-FFF2-40B4-BE49-F238E27FC236}">
+                <a16:creationId xmlns:a16="http://schemas.microsoft.com/office/drawing/2014/main" id="{7971F626-14A4-28DC-311E-DA455A290168}"/>
+              </a:ext>
+            </a:extLst>
+          </p:cNvPr>
+          <p:cNvSpPr/>
+          <p:nvPr/>
+        </p:nvSpPr>
+        <p:spPr>
+          <a:xfrm>
+            <a:off x="4590288" y="2487168"/>
+            <a:ext cx="505968" cy="2542032"/>
+          </a:xfrm>
+          <a:prstGeom prst="leftBrace">
+            <a:avLst/>
+          </a:prstGeom>
+          <a:ln>
+            <a:solidFill>
+              <a:srgbClr val="FF0000"/>
+            </a:solidFill>
+          </a:ln>
+        </p:spPr>
+        <p:style>
+          <a:lnRef idx="2">
+            <a:schemeClr val="accent1"/>
+          </a:lnRef>
+          <a:fillRef idx="0">
+            <a:schemeClr val="accent1"/>
+          </a:fillRef>
+          <a:effectRef idx="1">
+            <a:schemeClr val="accent1"/>
+          </a:effectRef>
+          <a:fontRef idx="minor">
+            <a:schemeClr val="tx1"/>
+          </a:fontRef>
+        </p:style>
+        <p:txBody>
+          <a:bodyPr rtlCol="0" anchor="ctr"/>
+          <a:lstStyle/>
+          <a:p>
+            <a:pPr algn="ctr"/>
+            <a:endParaRPr lang="es-ES"/>
+          </a:p>
+        </p:txBody>
+      </p:sp>
+      <p:sp>
+        <p:nvSpPr>
+          <p:cNvPr id="15" name="Elipse 14">
+            <a:extLst>
+              <a:ext uri="{FF2B5EF4-FFF2-40B4-BE49-F238E27FC236}">
+                <a16:creationId xmlns:a16="http://schemas.microsoft.com/office/drawing/2014/main" id="{BC280D7E-2BD7-8EC2-DCD9-9C52053D2202}"/>
+              </a:ext>
+            </a:extLst>
+          </p:cNvPr>
+          <p:cNvSpPr/>
+          <p:nvPr/>
+        </p:nvSpPr>
+        <p:spPr>
+          <a:xfrm>
+            <a:off x="5961888" y="4962144"/>
+            <a:ext cx="1248698" cy="414528"/>
+          </a:xfrm>
+          <a:prstGeom prst="ellipse">
+            <a:avLst/>
+          </a:prstGeom>
+          <a:noFill/>
+          <a:ln>
+            <a:solidFill>
+              <a:srgbClr val="FF0000"/>
+            </a:solidFill>
+          </a:ln>
+        </p:spPr>
+        <p:style>
+          <a:lnRef idx="2">
+            <a:schemeClr val="accent1">
+              <a:shade val="15000"/>
+            </a:schemeClr>
+          </a:lnRef>
+          <a:fillRef idx="1">
+            <a:schemeClr val="accent1"/>
+          </a:fillRef>
+          <a:effectRef idx="0">
+            <a:schemeClr val="accent1"/>
+          </a:effectRef>
+          <a:fontRef idx="minor">
+            <a:schemeClr val="lt1"/>
+          </a:fontRef>
+        </p:style>
+        <p:txBody>
+          <a:bodyPr rtlCol="0" anchor="ctr"/>
+          <a:lstStyle/>
+          <a:p>
+            <a:pPr algn="ctr"/>
+            <a:endParaRPr lang="es-ES"/>
+          </a:p>
+        </p:txBody>
+      </p:sp>
+      <p:sp>
+        <p:nvSpPr>
+          <p:cNvPr id="17" name="CuadroTexto 16">
+            <a:extLst>
+              <a:ext uri="{FF2B5EF4-FFF2-40B4-BE49-F238E27FC236}">
+                <a16:creationId xmlns:a16="http://schemas.microsoft.com/office/drawing/2014/main" id="{A7FDE6D4-A0AE-D1D3-13E3-486F74E08CA6}"/>
               </a:ext>
             </a:extLst>
           </p:cNvPr>
@@ -6029,8 +6628,8 @@
         </p:nvSpPr>
         <p:spPr>
           <a:xfrm>
-            <a:off x="1099457" y="1572069"/>
-            <a:ext cx="5878286" cy="2246769"/>
+            <a:off x="8153400" y="1330113"/>
+            <a:ext cx="2930012" cy="1015663"/>
           </a:xfrm>
           <a:prstGeom prst="rect">
             <a:avLst/>
@@ -6038,87 +6637,460 @@
           <a:noFill/>
         </p:spPr>
         <p:txBody>
-          <a:bodyPr wrap="square" rtlCol="0">
+          <a:bodyPr wrap="square" rtlCol="0" anchor="ctr">
             <a:spAutoFit/>
           </a:bodyPr>
           <a:lstStyle/>
           <a:p>
-            <a:pPr marL="342900" indent="-342900">
-              <a:buFont typeface="+mj-lt"/>
-              <a:buAutoNum type="arabicPeriod"/>
-            </a:pPr>
-            <a:r>
-              <a:rPr lang="es-419" sz="2800" dirty="0">
+            <a:pPr algn="ctr"/>
+            <a:r>
+              <a:rPr lang="es-419" sz="2000" dirty="0">
                 <a:latin typeface="Times New Roman" panose="02020603050405020304" pitchFamily="18" charset="0"/>
                 <a:cs typeface="Times New Roman" panose="02020603050405020304" pitchFamily="18" charset="0"/>
               </a:rPr>
-              <a:t>Introducción </a:t>
-            </a:r>
-          </a:p>
-          <a:p>
-            <a:pPr marL="342900" indent="-342900">
-              <a:buFont typeface="+mj-lt"/>
-              <a:buAutoNum type="arabicPeriod"/>
-            </a:pPr>
-            <a:r>
-              <a:rPr lang="es-419" sz="2800" dirty="0">
+              <a:t>Procedencia de los tickets</a:t>
+            </a:r>
+          </a:p>
+          <a:p>
+            <a:pPr algn="ctr"/>
+            <a:endParaRPr lang="es-419" sz="2000" dirty="0">
+              <a:latin typeface="Times New Roman" panose="02020603050405020304" pitchFamily="18" charset="0"/>
+              <a:cs typeface="Times New Roman" panose="02020603050405020304" pitchFamily="18" charset="0"/>
+            </a:endParaRPr>
+          </a:p>
+          <a:p>
+            <a:pPr algn="ctr"/>
+            <a:r>
+              <a:rPr lang="es-419" sz="2000" dirty="0">
                 <a:latin typeface="Times New Roman" panose="02020603050405020304" pitchFamily="18" charset="0"/>
                 <a:cs typeface="Times New Roman" panose="02020603050405020304" pitchFamily="18" charset="0"/>
               </a:rPr>
-              <a:t>Análisis ticket </a:t>
-            </a:r>
-          </a:p>
-          <a:p>
-            <a:pPr marL="342900" indent="-342900">
-              <a:buFont typeface="+mj-lt"/>
-              <a:buAutoNum type="arabicPeriod"/>
-            </a:pPr>
-            <a:r>
-              <a:rPr lang="es-419" sz="2800" dirty="0">
+              <a:t>34 tiendas</a:t>
+            </a:r>
+            <a:endParaRPr lang="es-ES" sz="2000" dirty="0">
+              <a:latin typeface="Times New Roman" panose="02020603050405020304" pitchFamily="18" charset="0"/>
+              <a:cs typeface="Times New Roman" panose="02020603050405020304" pitchFamily="18" charset="0"/>
+            </a:endParaRPr>
+          </a:p>
+        </p:txBody>
+      </p:sp>
+      <p:sp>
+        <p:nvSpPr>
+          <p:cNvPr id="18" name="CuadroTexto 17">
+            <a:extLst>
+              <a:ext uri="{FF2B5EF4-FFF2-40B4-BE49-F238E27FC236}">
+                <a16:creationId xmlns:a16="http://schemas.microsoft.com/office/drawing/2014/main" id="{08BFD5FA-40F5-485C-6AC4-E04DA0622FB1}"/>
+              </a:ext>
+            </a:extLst>
+          </p:cNvPr>
+          <p:cNvSpPr txBox="1"/>
+          <p:nvPr/>
+        </p:nvSpPr>
+        <p:spPr>
+          <a:xfrm>
+            <a:off x="907713" y="2634800"/>
+            <a:ext cx="3136490" cy="2246769"/>
+          </a:xfrm>
+          <a:prstGeom prst="rect">
+            <a:avLst/>
+          </a:prstGeom>
+          <a:noFill/>
+        </p:spPr>
+        <p:txBody>
+          <a:bodyPr wrap="square" rtlCol="0" anchor="ctr">
+            <a:spAutoFit/>
+          </a:bodyPr>
+          <a:lstStyle/>
+          <a:p>
+            <a:pPr algn="ctr"/>
+            <a:r>
+              <a:rPr lang="es-419" sz="2000" dirty="0">
                 <a:latin typeface="Times New Roman" panose="02020603050405020304" pitchFamily="18" charset="0"/>
                 <a:cs typeface="Times New Roman" panose="02020603050405020304" pitchFamily="18" charset="0"/>
               </a:rPr>
-              <a:t>Análisis productos </a:t>
-            </a:r>
-          </a:p>
-          <a:p>
-            <a:pPr marL="800100" lvl="1" indent="-342900">
-              <a:buFont typeface="+mj-lt"/>
-              <a:buAutoNum type="arabicPeriod"/>
-            </a:pPr>
-            <a:r>
-              <a:rPr lang="es-419" sz="2800" dirty="0">
+              <a:t>Identificación de productos</a:t>
+            </a:r>
+          </a:p>
+          <a:p>
+            <a:pPr algn="ctr"/>
+            <a:endParaRPr lang="es-419" sz="2000" dirty="0">
+              <a:latin typeface="Times New Roman" panose="02020603050405020304" pitchFamily="18" charset="0"/>
+              <a:cs typeface="Times New Roman" panose="02020603050405020304" pitchFamily="18" charset="0"/>
+            </a:endParaRPr>
+          </a:p>
+          <a:p>
+            <a:pPr algn="ctr"/>
+            <a:r>
+              <a:rPr lang="es-419" sz="2000" dirty="0">
                 <a:latin typeface="Times New Roman" panose="02020603050405020304" pitchFamily="18" charset="0"/>
                 <a:cs typeface="Times New Roman" panose="02020603050405020304" pitchFamily="18" charset="0"/>
               </a:rPr>
-              <a:t>Preguntas planteadas</a:t>
-            </a:r>
-          </a:p>
-          <a:p>
-            <a:pPr marL="342900" indent="-342900">
-              <a:buFont typeface="+mj-lt"/>
-              <a:buAutoNum type="arabicPeriod"/>
-            </a:pPr>
-            <a:r>
-              <a:rPr lang="es-419" sz="2800" dirty="0">
+              <a:t>Productos unitarios</a:t>
+            </a:r>
+          </a:p>
+          <a:p>
+            <a:pPr algn="ctr"/>
+            <a:r>
+              <a:rPr lang="es-419" sz="2000" dirty="0">
                 <a:latin typeface="Times New Roman" panose="02020603050405020304" pitchFamily="18" charset="0"/>
                 <a:cs typeface="Times New Roman" panose="02020603050405020304" pitchFamily="18" charset="0"/>
               </a:rPr>
-              <a:t>Conclusiones</a:t>
-            </a:r>
+              <a:t>Productos peso (pescado)</a:t>
+            </a:r>
+          </a:p>
+          <a:p>
+            <a:pPr algn="ctr"/>
+            <a:r>
+              <a:rPr lang="es-419" sz="2000" dirty="0">
+                <a:latin typeface="Times New Roman" panose="02020603050405020304" pitchFamily="18" charset="0"/>
+                <a:cs typeface="Times New Roman" panose="02020603050405020304" pitchFamily="18" charset="0"/>
+              </a:rPr>
+              <a:t>Productos peso (frutas)</a:t>
+            </a:r>
+          </a:p>
+          <a:p>
+            <a:pPr algn="ctr"/>
+            <a:endParaRPr lang="es-419" sz="2000" dirty="0">
+              <a:latin typeface="Times New Roman" panose="02020603050405020304" pitchFamily="18" charset="0"/>
+              <a:cs typeface="Times New Roman" panose="02020603050405020304" pitchFamily="18" charset="0"/>
+            </a:endParaRPr>
+          </a:p>
+          <a:p>
+            <a:pPr algn="ctr"/>
+            <a:r>
+              <a:rPr lang="es-419" sz="2000" dirty="0">
+                <a:latin typeface="Times New Roman" panose="02020603050405020304" pitchFamily="18" charset="0"/>
+                <a:cs typeface="Times New Roman" panose="02020603050405020304" pitchFamily="18" charset="0"/>
+              </a:rPr>
+              <a:t>4807 productos</a:t>
+            </a:r>
+          </a:p>
+        </p:txBody>
+      </p:sp>
+      <p:sp>
+        <p:nvSpPr>
+          <p:cNvPr id="19" name="CuadroTexto 18">
+            <a:extLst>
+              <a:ext uri="{FF2B5EF4-FFF2-40B4-BE49-F238E27FC236}">
+                <a16:creationId xmlns:a16="http://schemas.microsoft.com/office/drawing/2014/main" id="{6A700CDD-AE0F-D450-4F91-BAB022E2C1F6}"/>
+              </a:ext>
+            </a:extLst>
+          </p:cNvPr>
+          <p:cNvSpPr txBox="1"/>
+          <p:nvPr/>
+        </p:nvSpPr>
+        <p:spPr>
+          <a:xfrm>
+            <a:off x="8153400" y="4507689"/>
+            <a:ext cx="2930012" cy="1323439"/>
+          </a:xfrm>
+          <a:prstGeom prst="rect">
+            <a:avLst/>
+          </a:prstGeom>
+          <a:noFill/>
+        </p:spPr>
+        <p:txBody>
+          <a:bodyPr wrap="square" rtlCol="0" anchor="ctr">
+            <a:spAutoFit/>
+          </a:bodyPr>
+          <a:lstStyle/>
+          <a:p>
+            <a:pPr algn="ctr"/>
+            <a:r>
+              <a:rPr lang="es-419" sz="2000" dirty="0">
+                <a:latin typeface="Times New Roman" panose="02020603050405020304" pitchFamily="18" charset="0"/>
+                <a:cs typeface="Times New Roman" panose="02020603050405020304" pitchFamily="18" charset="0"/>
+              </a:rPr>
+              <a:t>Importe pagado - Forma de pago</a:t>
+            </a:r>
+          </a:p>
+          <a:p>
+            <a:pPr algn="ctr"/>
+            <a:endParaRPr lang="es-419" sz="2000" dirty="0">
+              <a:latin typeface="Times New Roman" panose="02020603050405020304" pitchFamily="18" charset="0"/>
+              <a:cs typeface="Times New Roman" panose="02020603050405020304" pitchFamily="18" charset="0"/>
+            </a:endParaRPr>
+          </a:p>
+          <a:p>
+            <a:pPr algn="ctr"/>
+            <a:r>
+              <a:rPr lang="es-419" sz="2000" dirty="0">
+                <a:latin typeface="Times New Roman" panose="02020603050405020304" pitchFamily="18" charset="0"/>
+                <a:cs typeface="Times New Roman" panose="02020603050405020304" pitchFamily="18" charset="0"/>
+              </a:rPr>
+              <a:t>Todos con tarjeta</a:t>
+            </a:r>
+            <a:endParaRPr lang="es-ES" sz="2000" dirty="0">
+              <a:latin typeface="Times New Roman" panose="02020603050405020304" pitchFamily="18" charset="0"/>
+              <a:cs typeface="Times New Roman" panose="02020603050405020304" pitchFamily="18" charset="0"/>
+            </a:endParaRPr>
           </a:p>
         </p:txBody>
       </p:sp>
     </p:spTree>
     <p:extLst>
       <p:ext uri="{BB962C8B-B14F-4D97-AF65-F5344CB8AC3E}">
-        <p14:creationId xmlns:p14="http://schemas.microsoft.com/office/powerpoint/2010/main" val="336396107"/>
+        <p14:creationId xmlns:p14="http://schemas.microsoft.com/office/powerpoint/2010/main" val="1754407880"/>
       </p:ext>
     </p:extLst>
   </p:cSld>
   <p:clrMapOvr>
     <a:masterClrMapping/>
   </p:clrMapOvr>
+  <p:timing>
+    <p:tnLst>
+      <p:par>
+        <p:cTn id="1" dur="indefinite" restart="never" nodeType="tmRoot">
+          <p:childTnLst>
+            <p:seq concurrent="1" nextAc="seek">
+              <p:cTn id="2" dur="indefinite" nodeType="mainSeq">
+                <p:childTnLst>
+                  <p:par>
+                    <p:cTn id="3" fill="hold">
+                      <p:stCondLst>
+                        <p:cond delay="indefinite"/>
+                      </p:stCondLst>
+                      <p:childTnLst>
+                        <p:par>
+                          <p:cTn id="4" fill="hold">
+                            <p:stCondLst>
+                              <p:cond delay="0"/>
+                            </p:stCondLst>
+                            <p:childTnLst>
+                              <p:par>
+                                <p:cTn id="5" presetID="1" presetClass="entr" presetSubtype="0" fill="hold" grpId="0" nodeType="clickEffect">
+                                  <p:stCondLst>
+                                    <p:cond delay="0"/>
+                                  </p:stCondLst>
+                                  <p:childTnLst>
+                                    <p:set>
+                                      <p:cBhvr>
+                                        <p:cTn id="6" dur="1" fill="hold">
+                                          <p:stCondLst>
+                                            <p:cond delay="0"/>
+                                          </p:stCondLst>
+                                        </p:cTn>
+                                        <p:tgtEl>
+                                          <p:spTgt spid="13"/>
+                                        </p:tgtEl>
+                                        <p:attrNameLst>
+                                          <p:attrName>style.visibility</p:attrName>
+                                        </p:attrNameLst>
+                                      </p:cBhvr>
+                                      <p:to>
+                                        <p:strVal val="visible"/>
+                                      </p:to>
+                                    </p:set>
+                                  </p:childTnLst>
+                                </p:cTn>
+                              </p:par>
+                              <p:par>
+                                <p:cTn id="7" presetID="1" presetClass="entr" presetSubtype="0" fill="hold" grpId="0" nodeType="withEffect">
+                                  <p:stCondLst>
+                                    <p:cond delay="0"/>
+                                  </p:stCondLst>
+                                  <p:childTnLst>
+                                    <p:set>
+                                      <p:cBhvr>
+                                        <p:cTn id="8" dur="1" fill="hold">
+                                          <p:stCondLst>
+                                            <p:cond delay="0"/>
+                                          </p:stCondLst>
+                                        </p:cTn>
+                                        <p:tgtEl>
+                                          <p:spTgt spid="17"/>
+                                        </p:tgtEl>
+                                        <p:attrNameLst>
+                                          <p:attrName>style.visibility</p:attrName>
+                                        </p:attrNameLst>
+                                      </p:cBhvr>
+                                      <p:to>
+                                        <p:strVal val="visible"/>
+                                      </p:to>
+                                    </p:set>
+                                  </p:childTnLst>
+                                </p:cTn>
+                              </p:par>
+                            </p:childTnLst>
+                          </p:cTn>
+                        </p:par>
+                      </p:childTnLst>
+                    </p:cTn>
+                  </p:par>
+                  <p:par>
+                    <p:cTn id="9" fill="hold">
+                      <p:stCondLst>
+                        <p:cond delay="indefinite"/>
+                      </p:stCondLst>
+                      <p:childTnLst>
+                        <p:par>
+                          <p:cTn id="10" fill="hold">
+                            <p:stCondLst>
+                              <p:cond delay="0"/>
+                            </p:stCondLst>
+                            <p:childTnLst>
+                              <p:par>
+                                <p:cTn id="11" presetID="1" presetClass="entr" presetSubtype="0" fill="hold" grpId="0" nodeType="clickEffect">
+                                  <p:stCondLst>
+                                    <p:cond delay="0"/>
+                                  </p:stCondLst>
+                                  <p:childTnLst>
+                                    <p:set>
+                                      <p:cBhvr>
+                                        <p:cTn id="12" dur="1" fill="hold">
+                                          <p:stCondLst>
+                                            <p:cond delay="0"/>
+                                          </p:stCondLst>
+                                        </p:cTn>
+                                        <p:tgtEl>
+                                          <p:spTgt spid="14"/>
+                                        </p:tgtEl>
+                                        <p:attrNameLst>
+                                          <p:attrName>style.visibility</p:attrName>
+                                        </p:attrNameLst>
+                                      </p:cBhvr>
+                                      <p:to>
+                                        <p:strVal val="visible"/>
+                                      </p:to>
+                                    </p:set>
+                                  </p:childTnLst>
+                                </p:cTn>
+                              </p:par>
+                              <p:par>
+                                <p:cTn id="13" presetID="1" presetClass="entr" presetSubtype="0" fill="hold" grpId="0" nodeType="withEffect">
+                                  <p:stCondLst>
+                                    <p:cond delay="0"/>
+                                  </p:stCondLst>
+                                  <p:childTnLst>
+                                    <p:set>
+                                      <p:cBhvr>
+                                        <p:cTn id="14" dur="1" fill="hold">
+                                          <p:stCondLst>
+                                            <p:cond delay="0"/>
+                                          </p:stCondLst>
+                                        </p:cTn>
+                                        <p:tgtEl>
+                                          <p:spTgt spid="18"/>
+                                        </p:tgtEl>
+                                        <p:attrNameLst>
+                                          <p:attrName>style.visibility</p:attrName>
+                                        </p:attrNameLst>
+                                      </p:cBhvr>
+                                      <p:to>
+                                        <p:strVal val="visible"/>
+                                      </p:to>
+                                    </p:set>
+                                  </p:childTnLst>
+                                </p:cTn>
+                              </p:par>
+                            </p:childTnLst>
+                          </p:cTn>
+                        </p:par>
+                      </p:childTnLst>
+                    </p:cTn>
+                  </p:par>
+                  <p:par>
+                    <p:cTn id="15" fill="hold">
+                      <p:stCondLst>
+                        <p:cond delay="indefinite"/>
+                      </p:stCondLst>
+                      <p:childTnLst>
+                        <p:par>
+                          <p:cTn id="16" fill="hold">
+                            <p:stCondLst>
+                              <p:cond delay="0"/>
+                            </p:stCondLst>
+                            <p:childTnLst>
+                              <p:par>
+                                <p:cTn id="17" presetID="1" presetClass="entr" presetSubtype="0" fill="hold" grpId="0" nodeType="clickEffect">
+                                  <p:stCondLst>
+                                    <p:cond delay="0"/>
+                                  </p:stCondLst>
+                                  <p:childTnLst>
+                                    <p:set>
+                                      <p:cBhvr>
+                                        <p:cTn id="18" dur="1" fill="hold">
+                                          <p:stCondLst>
+                                            <p:cond delay="0"/>
+                                          </p:stCondLst>
+                                        </p:cTn>
+                                        <p:tgtEl>
+                                          <p:spTgt spid="15"/>
+                                        </p:tgtEl>
+                                        <p:attrNameLst>
+                                          <p:attrName>style.visibility</p:attrName>
+                                        </p:attrNameLst>
+                                      </p:cBhvr>
+                                      <p:to>
+                                        <p:strVal val="visible"/>
+                                      </p:to>
+                                    </p:set>
+                                  </p:childTnLst>
+                                </p:cTn>
+                              </p:par>
+                              <p:par>
+                                <p:cTn id="19" presetID="1" presetClass="entr" presetSubtype="0" fill="hold" grpId="0" nodeType="withEffect">
+                                  <p:stCondLst>
+                                    <p:cond delay="0"/>
+                                  </p:stCondLst>
+                                  <p:childTnLst>
+                                    <p:set>
+                                      <p:cBhvr>
+                                        <p:cTn id="20" dur="1" fill="hold">
+                                          <p:stCondLst>
+                                            <p:cond delay="0"/>
+                                          </p:stCondLst>
+                                        </p:cTn>
+                                        <p:tgtEl>
+                                          <p:spTgt spid="19"/>
+                                        </p:tgtEl>
+                                        <p:attrNameLst>
+                                          <p:attrName>style.visibility</p:attrName>
+                                        </p:attrNameLst>
+                                      </p:cBhvr>
+                                      <p:to>
+                                        <p:strVal val="visible"/>
+                                      </p:to>
+                                    </p:set>
+                                  </p:childTnLst>
+                                </p:cTn>
+                              </p:par>
+                            </p:childTnLst>
+                          </p:cTn>
+                        </p:par>
+                      </p:childTnLst>
+                    </p:cTn>
+                  </p:par>
+                </p:childTnLst>
+              </p:cTn>
+              <p:prevCondLst>
+                <p:cond evt="onPrev" delay="0">
+                  <p:tgtEl>
+                    <p:sldTgt/>
+                  </p:tgtEl>
+                </p:cond>
+              </p:prevCondLst>
+              <p:nextCondLst>
+                <p:cond evt="onNext" delay="0">
+                  <p:tgtEl>
+                    <p:sldTgt/>
+                  </p:tgtEl>
+                </p:cond>
+              </p:nextCondLst>
+            </p:seq>
+          </p:childTnLst>
+        </p:cTn>
+      </p:par>
+    </p:tnLst>
+    <p:bldLst>
+      <p:bldP spid="13" grpId="0" animBg="1"/>
+      <p:bldP spid="14" grpId="0" animBg="1"/>
+      <p:bldP spid="15" grpId="0" animBg="1"/>
+      <p:bldP spid="17" grpId="0"/>
+      <p:bldP spid="18" grpId="0"/>
+      <p:bldP spid="19" grpId="0"/>
+    </p:bldLst>
+  </p:timing>
 </p:sld>
 </file>
 
@@ -6141,79 +7113,10 @@
       </p:grpSpPr>
       <p:sp>
         <p:nvSpPr>
-          <p:cNvPr id="2" name="Título 1">
-            <a:extLst>
-              <a:ext uri="{FF2B5EF4-FFF2-40B4-BE49-F238E27FC236}">
-                <a16:creationId xmlns:a16="http://schemas.microsoft.com/office/drawing/2014/main" id="{289C11F7-C57A-EEC2-46EE-23AE9E2E4EBB}"/>
-              </a:ext>
-            </a:extLst>
-          </p:cNvPr>
-          <p:cNvSpPr>
-            <a:spLocks noGrp="1"/>
-          </p:cNvSpPr>
-          <p:nvPr>
-            <p:ph type="title"/>
-          </p:nvPr>
-        </p:nvSpPr>
-        <p:spPr/>
-        <p:txBody>
-          <a:bodyPr/>
-          <a:lstStyle/>
-          <a:p>
-            <a:r>
-              <a:rPr lang="es-419" dirty="0">
-                <a:latin typeface="Times New Roman" panose="02020603050405020304" pitchFamily="18" charset="0"/>
-                <a:cs typeface="Times New Roman" panose="02020603050405020304" pitchFamily="18" charset="0"/>
-              </a:rPr>
-              <a:t>Introducción.</a:t>
-            </a:r>
-            <a:endParaRPr lang="es-ES" dirty="0">
-              <a:latin typeface="Times New Roman" panose="02020603050405020304" pitchFamily="18" charset="0"/>
-              <a:cs typeface="Times New Roman" panose="02020603050405020304" pitchFamily="18" charset="0"/>
-            </a:endParaRPr>
-          </a:p>
-        </p:txBody>
-      </p:sp>
-      <p:pic>
-        <p:nvPicPr>
-          <p:cNvPr id="7" name="Marcador de contenido 6" descr="Imagen de la pantalla de un celular de un mensaje en letras negras&#10;&#10;El contenido generado por IA puede ser incorrecto.">
-            <a:extLst>
-              <a:ext uri="{FF2B5EF4-FFF2-40B4-BE49-F238E27FC236}">
-                <a16:creationId xmlns:a16="http://schemas.microsoft.com/office/drawing/2014/main" id="{4C61F77A-62FB-06A7-9557-72268B9A6AF5}"/>
-              </a:ext>
-            </a:extLst>
-          </p:cNvPr>
-          <p:cNvPicPr>
-            <a:picLocks noGrp="1" noChangeAspect="1"/>
-          </p:cNvPicPr>
-          <p:nvPr>
-            <p:ph idx="1"/>
-          </p:nvPr>
-        </p:nvPicPr>
-        <p:blipFill>
-          <a:blip r:embed="rId2">
-            <a:extLst>
-              <a:ext uri="{28A0092B-C50C-407E-A947-70E740481C1C}">
-                <a14:useLocalDpi xmlns:a14="http://schemas.microsoft.com/office/drawing/2010/main" val="0"/>
-              </a:ext>
-            </a:extLst>
-          </a:blip>
-          <a:srcRect b="32453"/>
-          <a:stretch/>
-        </p:blipFill>
-        <p:spPr>
-          <a:xfrm>
-            <a:off x="4652991" y="971589"/>
-            <a:ext cx="2886017" cy="4914821"/>
-          </a:xfrm>
-        </p:spPr>
-      </p:pic>
-      <p:sp>
-        <p:nvSpPr>
           <p:cNvPr id="4" name="Marcador de pie de página 3">
             <a:extLst>
               <a:ext uri="{FF2B5EF4-FFF2-40B4-BE49-F238E27FC236}">
-                <a16:creationId xmlns:a16="http://schemas.microsoft.com/office/drawing/2014/main" id="{7A3AB84F-FC0E-79ED-2AA2-CCF2B4172D85}"/>
+                <a16:creationId xmlns:a16="http://schemas.microsoft.com/office/drawing/2014/main" id="{ACDF7CF0-1F76-FBC7-863A-B8F88C406835}"/>
               </a:ext>
             </a:extLst>
           </p:cNvPr>
@@ -6242,7 +7145,7 @@
           <p:cNvPr id="5" name="Marcador de número de diapositiva 4">
             <a:extLst>
               <a:ext uri="{FF2B5EF4-FFF2-40B4-BE49-F238E27FC236}">
-                <a16:creationId xmlns:a16="http://schemas.microsoft.com/office/drawing/2014/main" id="{94EF5044-A1DD-0A16-78FB-64AFC25C1C1A}"/>
+                <a16:creationId xmlns:a16="http://schemas.microsoft.com/office/drawing/2014/main" id="{31619FCD-55A0-EE63-4D51-5BD4F9C2325C}"/>
               </a:ext>
             </a:extLst>
           </p:cNvPr>
@@ -6267,180 +7170,111 @@
           </a:p>
         </p:txBody>
       </p:sp>
-    </p:spTree>
-    <p:extLst>
-      <p:ext uri="{BB962C8B-B14F-4D97-AF65-F5344CB8AC3E}">
-        <p14:creationId xmlns:p14="http://schemas.microsoft.com/office/powerpoint/2010/main" val="1754407880"/>
-      </p:ext>
-    </p:extLst>
-  </p:cSld>
-  <p:clrMapOvr>
-    <a:masterClrMapping/>
-  </p:clrMapOvr>
-</p:sld>
-</file>
-
-<file path=ppt/slides/slide5.xml><?xml version="1.0" encoding="utf-8"?>
-<p:sld xmlns:a="http://schemas.openxmlformats.org/drawingml/2006/main" xmlns:r="http://schemas.openxmlformats.org/officeDocument/2006/relationships" xmlns:p="http://schemas.openxmlformats.org/presentationml/2006/main">
-  <p:cSld>
-    <p:spTree>
-      <p:nvGrpSpPr>
-        <p:cNvPr id="1" name=""/>
-        <p:cNvGrpSpPr/>
-        <p:nvPr/>
-      </p:nvGrpSpPr>
-      <p:grpSpPr>
-        <a:xfrm>
-          <a:off x="0" y="0"/>
-          <a:ext cx="0" cy="0"/>
-          <a:chOff x="0" y="0"/>
-          <a:chExt cx="0" cy="0"/>
-        </a:xfrm>
-      </p:grpSpPr>
-      <p:sp>
-        <p:nvSpPr>
-          <p:cNvPr id="2" name="Título 1">
-            <a:extLst>
-              <a:ext uri="{FF2B5EF4-FFF2-40B4-BE49-F238E27FC236}">
-                <a16:creationId xmlns:a16="http://schemas.microsoft.com/office/drawing/2014/main" id="{650B8606-ED91-07B8-C9CC-D069A6E92DFC}"/>
-              </a:ext>
-            </a:extLst>
-          </p:cNvPr>
-          <p:cNvSpPr>
-            <a:spLocks noGrp="1"/>
-          </p:cNvSpPr>
-          <p:nvPr>
-            <p:ph type="title"/>
-          </p:nvPr>
+      <p:sp>
+        <p:nvSpPr>
+          <p:cNvPr id="6" name="Rectángulo 5">
+            <a:extLst>
+              <a:ext uri="{FF2B5EF4-FFF2-40B4-BE49-F238E27FC236}">
+                <a16:creationId xmlns:a16="http://schemas.microsoft.com/office/drawing/2014/main" id="{C0A24AE2-AA2D-1B7E-42CD-1DD07419A621}"/>
+              </a:ext>
+            </a:extLst>
+          </p:cNvPr>
+          <p:cNvSpPr/>
+          <p:nvPr/>
         </p:nvSpPr>
         <p:spPr>
           <a:xfrm>
-            <a:off x="838200" y="0"/>
-            <a:ext cx="10515600" cy="1325563"/>
+            <a:off x="0" y="0"/>
+            <a:ext cx="9350477" cy="707886"/>
           </a:xfrm>
+          <a:prstGeom prst="rect">
+            <a:avLst/>
+          </a:prstGeom>
+          <a:noFill/>
         </p:spPr>
         <p:txBody>
-          <a:bodyPr/>
-          <a:lstStyle/>
-          <a:p>
-            <a:r>
-              <a:rPr lang="es-419" dirty="0">
+          <a:bodyPr wrap="square" lIns="91440" tIns="45720" rIns="91440" bIns="45720" anchor="ctr">
+            <a:spAutoFit/>
+          </a:bodyPr>
+          <a:lstStyle/>
+          <a:p>
+            <a:r>
+              <a:rPr lang="es-419" sz="4000" b="1" cap="none" spc="0" dirty="0">
+                <a:ln w="22225">
+                  <a:solidFill>
+                    <a:srgbClr val="00965F"/>
+                  </a:solidFill>
+                  <a:prstDash val="solid"/>
+                </a:ln>
+                <a:solidFill>
+                  <a:srgbClr val="00965F"/>
+                </a:solidFill>
+                <a:effectLst/>
+                <a:latin typeface="Cooper Black" panose="020F0502020204030204" pitchFamily="18" charset="0"/>
+              </a:rPr>
+              <a:t>PREGUNTAS PLANTEADAS</a:t>
+            </a:r>
+            <a:endParaRPr lang="es-ES" sz="4000" b="1" cap="none" spc="0" dirty="0">
+              <a:ln w="22225">
+                <a:solidFill>
+                  <a:srgbClr val="00965F"/>
+                </a:solidFill>
+                <a:prstDash val="solid"/>
+              </a:ln>
+              <a:solidFill>
+                <a:srgbClr val="00965F"/>
+              </a:solidFill>
+              <a:effectLst/>
+              <a:latin typeface="Cooper Black" panose="020F0502020204030204" pitchFamily="18" charset="0"/>
+            </a:endParaRPr>
+          </a:p>
+        </p:txBody>
+      </p:sp>
+      <p:sp>
+        <p:nvSpPr>
+          <p:cNvPr id="10" name="CuadroTexto 9">
+            <a:extLst>
+              <a:ext uri="{FF2B5EF4-FFF2-40B4-BE49-F238E27FC236}">
+                <a16:creationId xmlns:a16="http://schemas.microsoft.com/office/drawing/2014/main" id="{16FCF643-7C92-3952-C93F-4F7A2A52F53B}"/>
+              </a:ext>
+            </a:extLst>
+          </p:cNvPr>
+          <p:cNvSpPr txBox="1"/>
+          <p:nvPr/>
+        </p:nvSpPr>
+        <p:spPr>
+          <a:xfrm>
+            <a:off x="0" y="707886"/>
+            <a:ext cx="12192000" cy="400110"/>
+          </a:xfrm>
+          <a:prstGeom prst="rect">
+            <a:avLst/>
+          </a:prstGeom>
+          <a:noFill/>
+        </p:spPr>
+        <p:txBody>
+          <a:bodyPr wrap="square" rtlCol="0" anchor="ctr">
+            <a:spAutoFit/>
+          </a:bodyPr>
+          <a:lstStyle/>
+          <a:p>
+            <a:pPr algn="ctr"/>
+            <a:r>
+              <a:rPr lang="es-ES" sz="2000" dirty="0">
                 <a:latin typeface="Times New Roman" panose="02020603050405020304" pitchFamily="18" charset="0"/>
                 <a:cs typeface="Times New Roman" panose="02020603050405020304" pitchFamily="18" charset="0"/>
               </a:rPr>
-              <a:t>Preguntas planteadas.</a:t>
-            </a:r>
-            <a:endParaRPr lang="es-ES" dirty="0"/>
-          </a:p>
-        </p:txBody>
-      </p:sp>
-      <p:sp>
-        <p:nvSpPr>
-          <p:cNvPr id="3" name="Marcador de contenido 2">
-            <a:extLst>
-              <a:ext uri="{FF2B5EF4-FFF2-40B4-BE49-F238E27FC236}">
-                <a16:creationId xmlns:a16="http://schemas.microsoft.com/office/drawing/2014/main" id="{7AB139BA-67A8-5E40-8EE8-F2DD7C870305}"/>
-              </a:ext>
-            </a:extLst>
-          </p:cNvPr>
-          <p:cNvSpPr>
-            <a:spLocks noGrp="1"/>
-          </p:cNvSpPr>
-          <p:nvPr>
-            <p:ph idx="1"/>
-          </p:nvPr>
-        </p:nvSpPr>
-        <p:spPr>
-          <a:xfrm>
-            <a:off x="838200" y="1056088"/>
-            <a:ext cx="10515600" cy="4351338"/>
-          </a:xfrm>
-        </p:spPr>
-        <p:txBody>
-          <a:bodyPr>
-            <a:normAutofit/>
-          </a:bodyPr>
-          <a:lstStyle/>
-          <a:p>
-            <a:r>
-              <a:rPr lang="es-ES" sz="2400" b="0" i="0" u="none" strike="noStrike" baseline="0" dirty="0">
-                <a:latin typeface="Times New Roman" panose="02020603050405020304" pitchFamily="18" charset="0"/>
-                <a:cs typeface="Times New Roman" panose="02020603050405020304" pitchFamily="18" charset="0"/>
-              </a:rPr>
-              <a:t>¿Cuál es la procedencia de los tickets? ¿Qué ciudad/ pueblo tiene un mayor número de tickets?</a:t>
-            </a:r>
-            <a:endParaRPr lang="es-ES" sz="2400" dirty="0">
-              <a:latin typeface="Times New Roman" panose="02020603050405020304" pitchFamily="18" charset="0"/>
-              <a:cs typeface="Times New Roman" panose="02020603050405020304" pitchFamily="18" charset="0"/>
-            </a:endParaRPr>
-          </a:p>
-        </p:txBody>
-      </p:sp>
-      <p:sp>
-        <p:nvSpPr>
-          <p:cNvPr id="4" name="Marcador de pie de página 3">
-            <a:extLst>
-              <a:ext uri="{FF2B5EF4-FFF2-40B4-BE49-F238E27FC236}">
-                <a16:creationId xmlns:a16="http://schemas.microsoft.com/office/drawing/2014/main" id="{ACDF7CF0-1F76-FBC7-863A-B8F88C406835}"/>
-              </a:ext>
-            </a:extLst>
-          </p:cNvPr>
-          <p:cNvSpPr>
-            <a:spLocks noGrp="1"/>
-          </p:cNvSpPr>
-          <p:nvPr>
-            <p:ph type="ftr" sz="quarter" idx="11"/>
-          </p:nvPr>
-        </p:nvSpPr>
-        <p:spPr/>
-        <p:txBody>
-          <a:bodyPr/>
-          <a:lstStyle/>
-          <a:p>
-            <a:r>
-              <a:rPr lang="es-ES"/>
-              <a:t>Mini Proyecto</a:t>
-            </a:r>
-            <a:endParaRPr lang="es-ES" dirty="0"/>
-          </a:p>
-        </p:txBody>
-      </p:sp>
-      <p:sp>
-        <p:nvSpPr>
-          <p:cNvPr id="5" name="Marcador de número de diapositiva 4">
-            <a:extLst>
-              <a:ext uri="{FF2B5EF4-FFF2-40B4-BE49-F238E27FC236}">
-                <a16:creationId xmlns:a16="http://schemas.microsoft.com/office/drawing/2014/main" id="{31619FCD-55A0-EE63-4D51-5BD4F9C2325C}"/>
-              </a:ext>
-            </a:extLst>
-          </p:cNvPr>
-          <p:cNvSpPr>
-            <a:spLocks noGrp="1"/>
-          </p:cNvSpPr>
-          <p:nvPr>
-            <p:ph type="sldNum" sz="quarter" idx="12"/>
-          </p:nvPr>
-        </p:nvSpPr>
-        <p:spPr/>
-        <p:txBody>
-          <a:bodyPr/>
-          <a:lstStyle/>
-          <a:p>
-            <a:fld id="{57CCFD16-40BC-4790-95C3-D9FCA59BD7C9}" type="slidenum">
-              <a:rPr lang="es-ES" smtClean="0"/>
-              <a:pPr/>
-              <a:t>5</a:t>
-            </a:fld>
-            <a:endParaRPr lang="es-ES" dirty="0"/>
+              <a:t>¿Cuál es la procedencia de los tickets? ¿Qué ciudad/pueblo tiene un mayor número de tickets?</a:t>
+            </a:r>
           </a:p>
         </p:txBody>
       </p:sp>
       <p:pic>
         <p:nvPicPr>
-          <p:cNvPr id="7" name="Imagen 6" descr="Imagen que contiene Diagrama&#10;&#10;El contenido generado por IA puede ser incorrecto.">
-            <a:extLst>
-              <a:ext uri="{FF2B5EF4-FFF2-40B4-BE49-F238E27FC236}">
-                <a16:creationId xmlns:a16="http://schemas.microsoft.com/office/drawing/2014/main" id="{59D54823-76D1-FC86-6761-5C1CE737E873}"/>
+          <p:cNvPr id="12" name="Imagen 11" descr="Imagen que contiene Diagrama&#10;&#10;El contenido generado por IA puede ser incorrecto.">
+            <a:extLst>
+              <a:ext uri="{FF2B5EF4-FFF2-40B4-BE49-F238E27FC236}">
+                <a16:creationId xmlns:a16="http://schemas.microsoft.com/office/drawing/2014/main" id="{E786C255-A32C-896C-130A-E28D0AB42D83}"/>
               </a:ext>
             </a:extLst>
           </p:cNvPr>
@@ -6463,8 +7297,44 @@
         </p:blipFill>
         <p:spPr>
           <a:xfrm>
-            <a:off x="2600835" y="1518534"/>
-            <a:ext cx="4449752" cy="4449752"/>
+            <a:off x="855094" y="1391608"/>
+            <a:ext cx="4564632" cy="4564632"/>
+          </a:xfrm>
+          <a:prstGeom prst="rect">
+            <a:avLst/>
+          </a:prstGeom>
+        </p:spPr>
+      </p:pic>
+      <p:pic>
+        <p:nvPicPr>
+          <p:cNvPr id="14" name="Imagen 13" descr="Aplicación&#10;&#10;El contenido generado por IA puede ser incorrecto.">
+            <a:extLst>
+              <a:ext uri="{FF2B5EF4-FFF2-40B4-BE49-F238E27FC236}">
+                <a16:creationId xmlns:a16="http://schemas.microsoft.com/office/drawing/2014/main" id="{28F48480-C460-6F47-A525-B635E6D8AC25}"/>
+              </a:ext>
+            </a:extLst>
+          </p:cNvPr>
+          <p:cNvPicPr>
+            <a:picLocks noChangeAspect="1"/>
+          </p:cNvPicPr>
+          <p:nvPr/>
+        </p:nvPicPr>
+        <p:blipFill>
+          <a:blip r:embed="rId3">
+            <a:extLst>
+              <a:ext uri="{28A0092B-C50C-407E-A947-70E740481C1C}">
+                <a14:useLocalDpi xmlns:a14="http://schemas.microsoft.com/office/drawing/2010/main" val="0"/>
+              </a:ext>
+            </a:extLst>
+          </a:blip>
+          <a:stretch>
+            <a:fillRect/>
+          </a:stretch>
+        </p:blipFill>
+        <p:spPr>
+          <a:xfrm>
+            <a:off x="6772275" y="2043112"/>
+            <a:ext cx="4581525" cy="2771775"/>
           </a:xfrm>
           <a:prstGeom prst="rect">
             <a:avLst/>
@@ -6484,12 +7354,18 @@
 </p:sld>
 </file>
 
-<file path=ppt/slides/slide6.xml><?xml version="1.0" encoding="utf-8"?>
+<file path=ppt/slides/slide5.xml><?xml version="1.0" encoding="utf-8"?>
 <p:sld xmlns:a="http://schemas.openxmlformats.org/drawingml/2006/main" xmlns:r="http://schemas.openxmlformats.org/officeDocument/2006/relationships" xmlns:p="http://schemas.openxmlformats.org/presentationml/2006/main">
   <p:cSld>
     <p:spTree>
       <p:nvGrpSpPr>
-        <p:cNvPr id="1" name=""/>
+        <p:cNvPr id="1" name="">
+          <a:extLst>
+            <a:ext uri="{FF2B5EF4-FFF2-40B4-BE49-F238E27FC236}">
+              <a16:creationId xmlns:a16="http://schemas.microsoft.com/office/drawing/2014/main" id="{2C92F39C-1742-2629-CA4F-684497118BB0}"/>
+            </a:ext>
+          </a:extLst>
+        </p:cNvPr>
         <p:cNvGrpSpPr/>
         <p:nvPr/>
       </p:nvGrpSpPr>
@@ -6503,149 +7379,178 @@
       </p:grpSpPr>
       <p:sp>
         <p:nvSpPr>
-          <p:cNvPr id="2" name="Título 1">
-            <a:extLst>
-              <a:ext uri="{FF2B5EF4-FFF2-40B4-BE49-F238E27FC236}">
-                <a16:creationId xmlns:a16="http://schemas.microsoft.com/office/drawing/2014/main" id="{470FC65E-9122-0F11-C709-2CAF608B11DA}"/>
-              </a:ext>
-            </a:extLst>
-          </p:cNvPr>
-          <p:cNvSpPr>
-            <a:spLocks noGrp="1"/>
-          </p:cNvSpPr>
-          <p:nvPr>
-            <p:ph type="title"/>
-          </p:nvPr>
+          <p:cNvPr id="4" name="Marcador de pie de página 3">
+            <a:extLst>
+              <a:ext uri="{FF2B5EF4-FFF2-40B4-BE49-F238E27FC236}">
+                <a16:creationId xmlns:a16="http://schemas.microsoft.com/office/drawing/2014/main" id="{AAC03F0B-101E-BFC2-12E7-9B5746FBDCEE}"/>
+              </a:ext>
+            </a:extLst>
+          </p:cNvPr>
+          <p:cNvSpPr>
+            <a:spLocks noGrp="1"/>
+          </p:cNvSpPr>
+          <p:nvPr>
+            <p:ph type="ftr" sz="quarter" idx="11"/>
+          </p:nvPr>
+        </p:nvSpPr>
+        <p:spPr/>
+        <p:txBody>
+          <a:bodyPr/>
+          <a:lstStyle/>
+          <a:p>
+            <a:r>
+              <a:rPr lang="es-ES"/>
+              <a:t>Mini Proyecto</a:t>
+            </a:r>
+            <a:endParaRPr lang="es-ES" dirty="0"/>
+          </a:p>
+        </p:txBody>
+      </p:sp>
+      <p:sp>
+        <p:nvSpPr>
+          <p:cNvPr id="5" name="Marcador de número de diapositiva 4">
+            <a:extLst>
+              <a:ext uri="{FF2B5EF4-FFF2-40B4-BE49-F238E27FC236}">
+                <a16:creationId xmlns:a16="http://schemas.microsoft.com/office/drawing/2014/main" id="{FA16AAAA-2814-E6EC-4E35-26699EE14B36}"/>
+              </a:ext>
+            </a:extLst>
+          </p:cNvPr>
+          <p:cNvSpPr>
+            <a:spLocks noGrp="1"/>
+          </p:cNvSpPr>
+          <p:nvPr>
+            <p:ph type="sldNum" sz="quarter" idx="12"/>
+          </p:nvPr>
+        </p:nvSpPr>
+        <p:spPr/>
+        <p:txBody>
+          <a:bodyPr/>
+          <a:lstStyle/>
+          <a:p>
+            <a:fld id="{57CCFD16-40BC-4790-95C3-D9FCA59BD7C9}" type="slidenum">
+              <a:rPr lang="es-ES" smtClean="0"/>
+              <a:pPr/>
+              <a:t>5</a:t>
+            </a:fld>
+            <a:endParaRPr lang="es-ES" dirty="0"/>
+          </a:p>
+        </p:txBody>
+      </p:sp>
+      <p:sp>
+        <p:nvSpPr>
+          <p:cNvPr id="6" name="Rectángulo 5">
+            <a:extLst>
+              <a:ext uri="{FF2B5EF4-FFF2-40B4-BE49-F238E27FC236}">
+                <a16:creationId xmlns:a16="http://schemas.microsoft.com/office/drawing/2014/main" id="{3289D0F3-98C4-DD26-F6D6-6F9677F96488}"/>
+              </a:ext>
+            </a:extLst>
+          </p:cNvPr>
+          <p:cNvSpPr/>
+          <p:nvPr/>
         </p:nvSpPr>
         <p:spPr>
           <a:xfrm>
-            <a:off x="838200" y="-190919"/>
-            <a:ext cx="10515600" cy="1325563"/>
+            <a:off x="0" y="0"/>
+            <a:ext cx="9350477" cy="707886"/>
           </a:xfrm>
+          <a:prstGeom prst="rect">
+            <a:avLst/>
+          </a:prstGeom>
+          <a:noFill/>
         </p:spPr>
         <p:txBody>
-          <a:bodyPr/>
-          <a:lstStyle/>
-          <a:p>
-            <a:r>
-              <a:rPr lang="es-419" dirty="0">
+          <a:bodyPr wrap="square" lIns="91440" tIns="45720" rIns="91440" bIns="45720" anchor="ctr">
+            <a:spAutoFit/>
+          </a:bodyPr>
+          <a:lstStyle/>
+          <a:p>
+            <a:r>
+              <a:rPr lang="es-419" sz="4000" b="1" cap="none" spc="0" dirty="0">
+                <a:ln w="22225">
+                  <a:solidFill>
+                    <a:srgbClr val="00965F"/>
+                  </a:solidFill>
+                  <a:prstDash val="solid"/>
+                </a:ln>
+                <a:solidFill>
+                  <a:srgbClr val="00965F"/>
+                </a:solidFill>
+                <a:effectLst/>
+                <a:latin typeface="Cooper Black" panose="020F0502020204030204" pitchFamily="18" charset="0"/>
+              </a:rPr>
+              <a:t>PREGUNTAS PLANTEADAS</a:t>
+            </a:r>
+            <a:endParaRPr lang="es-ES" sz="4000" b="1" cap="none" spc="0" dirty="0">
+              <a:ln w="22225">
+                <a:solidFill>
+                  <a:srgbClr val="00965F"/>
+                </a:solidFill>
+                <a:prstDash val="solid"/>
+              </a:ln>
+              <a:solidFill>
+                <a:srgbClr val="00965F"/>
+              </a:solidFill>
+              <a:effectLst/>
+              <a:latin typeface="Cooper Black" panose="020F0502020204030204" pitchFamily="18" charset="0"/>
+            </a:endParaRPr>
+          </a:p>
+        </p:txBody>
+      </p:sp>
+      <p:sp>
+        <p:nvSpPr>
+          <p:cNvPr id="10" name="CuadroTexto 9">
+            <a:extLst>
+              <a:ext uri="{FF2B5EF4-FFF2-40B4-BE49-F238E27FC236}">
+                <a16:creationId xmlns:a16="http://schemas.microsoft.com/office/drawing/2014/main" id="{E8A43B42-80EE-3A58-9EB5-9326B693F631}"/>
+              </a:ext>
+            </a:extLst>
+          </p:cNvPr>
+          <p:cNvSpPr txBox="1"/>
+          <p:nvPr/>
+        </p:nvSpPr>
+        <p:spPr>
+          <a:xfrm>
+            <a:off x="0" y="553998"/>
+            <a:ext cx="12192000" cy="707886"/>
+          </a:xfrm>
+          <a:prstGeom prst="rect">
+            <a:avLst/>
+          </a:prstGeom>
+          <a:noFill/>
+        </p:spPr>
+        <p:txBody>
+          <a:bodyPr wrap="square" rtlCol="0" anchor="ctr">
+            <a:spAutoFit/>
+          </a:bodyPr>
+          <a:lstStyle/>
+          <a:p>
+            <a:pPr algn="ctr"/>
+            <a:r>
+              <a:rPr lang="es-ES" sz="2000" dirty="0">
                 <a:latin typeface="Times New Roman" panose="02020603050405020304" pitchFamily="18" charset="0"/>
                 <a:cs typeface="Times New Roman" panose="02020603050405020304" pitchFamily="18" charset="0"/>
               </a:rPr>
-              <a:t>Preguntas planteadas.</a:t>
-            </a:r>
-            <a:endParaRPr lang="es-ES" dirty="0"/>
-          </a:p>
-        </p:txBody>
-      </p:sp>
-      <p:sp>
-        <p:nvSpPr>
-          <p:cNvPr id="3" name="Marcador de contenido 2">
-            <a:extLst>
-              <a:ext uri="{FF2B5EF4-FFF2-40B4-BE49-F238E27FC236}">
-                <a16:creationId xmlns:a16="http://schemas.microsoft.com/office/drawing/2014/main" id="{6BDA08F0-32D6-7BB1-8676-1C4DBAD84093}"/>
-              </a:ext>
-            </a:extLst>
-          </p:cNvPr>
-          <p:cNvSpPr>
-            <a:spLocks noGrp="1"/>
-          </p:cNvSpPr>
-          <p:nvPr>
-            <p:ph idx="1"/>
-          </p:nvPr>
-        </p:nvSpPr>
-        <p:spPr>
-          <a:xfrm>
-            <a:off x="838200" y="818278"/>
-            <a:ext cx="10515600" cy="4351338"/>
-          </a:xfrm>
-        </p:spPr>
-        <p:txBody>
-          <a:bodyPr>
-            <a:normAutofit/>
-          </a:bodyPr>
-          <a:lstStyle/>
-          <a:p>
-            <a:pPr algn="l"/>
-            <a:r>
-              <a:rPr lang="es-ES" sz="2400" b="0" i="0" u="none" strike="noStrike" baseline="0" dirty="0">
+              <a:t>Muestra mediante un diagrama el número de tickets recogidos cada día de las semanas. </a:t>
+            </a:r>
+          </a:p>
+          <a:p>
+            <a:pPr algn="ctr"/>
+            <a:r>
+              <a:rPr lang="es-ES" sz="2000" dirty="0">
                 <a:latin typeface="Times New Roman" panose="02020603050405020304" pitchFamily="18" charset="0"/>
                 <a:cs typeface="Times New Roman" panose="02020603050405020304" pitchFamily="18" charset="0"/>
               </a:rPr>
-              <a:t>Muestra mediante un diagrama el número de tickets recogidos cada día de las semanas. ¿Si tuvieses que cerrar un día entre semana qué día lo harías?</a:t>
-            </a:r>
-            <a:endParaRPr lang="es-ES" sz="2400" dirty="0">
-              <a:latin typeface="Times New Roman" panose="02020603050405020304" pitchFamily="18" charset="0"/>
-              <a:cs typeface="Times New Roman" panose="02020603050405020304" pitchFamily="18" charset="0"/>
-            </a:endParaRPr>
-          </a:p>
-        </p:txBody>
-      </p:sp>
-      <p:sp>
-        <p:nvSpPr>
-          <p:cNvPr id="4" name="Marcador de pie de página 3">
-            <a:extLst>
-              <a:ext uri="{FF2B5EF4-FFF2-40B4-BE49-F238E27FC236}">
-                <a16:creationId xmlns:a16="http://schemas.microsoft.com/office/drawing/2014/main" id="{C8122CA9-CEFB-A8C3-A381-9132870E6197}"/>
-              </a:ext>
-            </a:extLst>
-          </p:cNvPr>
-          <p:cNvSpPr>
-            <a:spLocks noGrp="1"/>
-          </p:cNvSpPr>
-          <p:nvPr>
-            <p:ph type="ftr" sz="quarter" idx="11"/>
-          </p:nvPr>
-        </p:nvSpPr>
-        <p:spPr/>
-        <p:txBody>
-          <a:bodyPr/>
-          <a:lstStyle/>
-          <a:p>
-            <a:r>
-              <a:rPr lang="es-ES"/>
-              <a:t>Mini Proyecto</a:t>
-            </a:r>
-            <a:endParaRPr lang="es-ES" dirty="0"/>
-          </a:p>
-        </p:txBody>
-      </p:sp>
-      <p:sp>
-        <p:nvSpPr>
-          <p:cNvPr id="5" name="Marcador de número de diapositiva 4">
-            <a:extLst>
-              <a:ext uri="{FF2B5EF4-FFF2-40B4-BE49-F238E27FC236}">
-                <a16:creationId xmlns:a16="http://schemas.microsoft.com/office/drawing/2014/main" id="{0B68B907-2033-D076-C1BE-DCAE9C888532}"/>
-              </a:ext>
-            </a:extLst>
-          </p:cNvPr>
-          <p:cNvSpPr>
-            <a:spLocks noGrp="1"/>
-          </p:cNvSpPr>
-          <p:nvPr>
-            <p:ph type="sldNum" sz="quarter" idx="12"/>
-          </p:nvPr>
-        </p:nvSpPr>
-        <p:spPr/>
-        <p:txBody>
-          <a:bodyPr/>
-          <a:lstStyle/>
-          <a:p>
-            <a:fld id="{57CCFD16-40BC-4790-95C3-D9FCA59BD7C9}" type="slidenum">
-              <a:rPr lang="es-ES" smtClean="0"/>
-              <a:pPr/>
-              <a:t>6</a:t>
-            </a:fld>
-            <a:endParaRPr lang="es-ES" dirty="0"/>
+              <a:t>¿Si tuvieses que cerrar un día entre semana qué día lo harías?</a:t>
+            </a:r>
           </a:p>
         </p:txBody>
       </p:sp>
       <p:pic>
         <p:nvPicPr>
-          <p:cNvPr id="7" name="Imagen 6" descr="Gráfico, Gráfico de barras&#10;&#10;El contenido generado por IA puede ser incorrecto.">
-            <a:extLst>
-              <a:ext uri="{FF2B5EF4-FFF2-40B4-BE49-F238E27FC236}">
-                <a16:creationId xmlns:a16="http://schemas.microsoft.com/office/drawing/2014/main" id="{25E9E832-A342-DD7E-0AA2-F6388882F589}"/>
+          <p:cNvPr id="8" name="Imagen 7" descr="Gráfico, Gráfico de barras&#10;&#10;El contenido generado por IA puede ser incorrecto.">
+            <a:extLst>
+              <a:ext uri="{FF2B5EF4-FFF2-40B4-BE49-F238E27FC236}">
+                <a16:creationId xmlns:a16="http://schemas.microsoft.com/office/drawing/2014/main" id="{67DDF4A0-7D75-59FD-8540-F289B1CFD0E3}"/>
               </a:ext>
             </a:extLst>
           </p:cNvPr>
@@ -6668,8 +7573,8 @@
         </p:blipFill>
         <p:spPr>
           <a:xfrm>
-            <a:off x="2823935" y="1899652"/>
-            <a:ext cx="6544130" cy="4039586"/>
+            <a:off x="2277395" y="1488704"/>
+            <a:ext cx="7637209" cy="4640826"/>
           </a:xfrm>
           <a:prstGeom prst="rect">
             <a:avLst/>
@@ -6679,7 +7584,251 @@
     </p:spTree>
     <p:extLst>
       <p:ext uri="{BB962C8B-B14F-4D97-AF65-F5344CB8AC3E}">
-        <p14:creationId xmlns:p14="http://schemas.microsoft.com/office/powerpoint/2010/main" val="118555930"/>
+        <p14:creationId xmlns:p14="http://schemas.microsoft.com/office/powerpoint/2010/main" val="1146445535"/>
+      </p:ext>
+    </p:extLst>
+  </p:cSld>
+  <p:clrMapOvr>
+    <a:masterClrMapping/>
+  </p:clrMapOvr>
+</p:sld>
+</file>
+
+<file path=ppt/slides/slide6.xml><?xml version="1.0" encoding="utf-8"?>
+<p:sld xmlns:a="http://schemas.openxmlformats.org/drawingml/2006/main" xmlns:r="http://schemas.openxmlformats.org/officeDocument/2006/relationships" xmlns:p="http://schemas.openxmlformats.org/presentationml/2006/main">
+  <p:cSld>
+    <p:spTree>
+      <p:nvGrpSpPr>
+        <p:cNvPr id="1" name="">
+          <a:extLst>
+            <a:ext uri="{FF2B5EF4-FFF2-40B4-BE49-F238E27FC236}">
+              <a16:creationId xmlns:a16="http://schemas.microsoft.com/office/drawing/2014/main" id="{6D1F2C4B-3C1E-7307-254D-568F2350DDE4}"/>
+            </a:ext>
+          </a:extLst>
+        </p:cNvPr>
+        <p:cNvGrpSpPr/>
+        <p:nvPr/>
+      </p:nvGrpSpPr>
+      <p:grpSpPr>
+        <a:xfrm>
+          <a:off x="0" y="0"/>
+          <a:ext cx="0" cy="0"/>
+          <a:chOff x="0" y="0"/>
+          <a:chExt cx="0" cy="0"/>
+        </a:xfrm>
+      </p:grpSpPr>
+      <p:sp>
+        <p:nvSpPr>
+          <p:cNvPr id="4" name="Marcador de pie de página 3">
+            <a:extLst>
+              <a:ext uri="{FF2B5EF4-FFF2-40B4-BE49-F238E27FC236}">
+                <a16:creationId xmlns:a16="http://schemas.microsoft.com/office/drawing/2014/main" id="{34237D3B-67FB-7FF3-86EF-78CFBBCA3868}"/>
+              </a:ext>
+            </a:extLst>
+          </p:cNvPr>
+          <p:cNvSpPr>
+            <a:spLocks noGrp="1"/>
+          </p:cNvSpPr>
+          <p:nvPr>
+            <p:ph type="ftr" sz="quarter" idx="11"/>
+          </p:nvPr>
+        </p:nvSpPr>
+        <p:spPr/>
+        <p:txBody>
+          <a:bodyPr/>
+          <a:lstStyle/>
+          <a:p>
+            <a:r>
+              <a:rPr lang="es-ES"/>
+              <a:t>Mini Proyecto</a:t>
+            </a:r>
+            <a:endParaRPr lang="es-ES" dirty="0"/>
+          </a:p>
+        </p:txBody>
+      </p:sp>
+      <p:sp>
+        <p:nvSpPr>
+          <p:cNvPr id="5" name="Marcador de número de diapositiva 4">
+            <a:extLst>
+              <a:ext uri="{FF2B5EF4-FFF2-40B4-BE49-F238E27FC236}">
+                <a16:creationId xmlns:a16="http://schemas.microsoft.com/office/drawing/2014/main" id="{1E0F5BAF-1C72-40CA-62F3-D91864358273}"/>
+              </a:ext>
+            </a:extLst>
+          </p:cNvPr>
+          <p:cNvSpPr>
+            <a:spLocks noGrp="1"/>
+          </p:cNvSpPr>
+          <p:nvPr>
+            <p:ph type="sldNum" sz="quarter" idx="12"/>
+          </p:nvPr>
+        </p:nvSpPr>
+        <p:spPr/>
+        <p:txBody>
+          <a:bodyPr/>
+          <a:lstStyle/>
+          <a:p>
+            <a:fld id="{57CCFD16-40BC-4790-95C3-D9FCA59BD7C9}" type="slidenum">
+              <a:rPr lang="es-ES" smtClean="0"/>
+              <a:pPr/>
+              <a:t>6</a:t>
+            </a:fld>
+            <a:endParaRPr lang="es-ES" dirty="0"/>
+          </a:p>
+        </p:txBody>
+      </p:sp>
+      <p:sp>
+        <p:nvSpPr>
+          <p:cNvPr id="6" name="Rectángulo 5">
+            <a:extLst>
+              <a:ext uri="{FF2B5EF4-FFF2-40B4-BE49-F238E27FC236}">
+                <a16:creationId xmlns:a16="http://schemas.microsoft.com/office/drawing/2014/main" id="{7C67DF40-E3EB-3ABE-B139-35A31BE5E16F}"/>
+              </a:ext>
+            </a:extLst>
+          </p:cNvPr>
+          <p:cNvSpPr/>
+          <p:nvPr/>
+        </p:nvSpPr>
+        <p:spPr>
+          <a:xfrm>
+            <a:off x="0" y="0"/>
+            <a:ext cx="9350477" cy="707886"/>
+          </a:xfrm>
+          <a:prstGeom prst="rect">
+            <a:avLst/>
+          </a:prstGeom>
+          <a:noFill/>
+        </p:spPr>
+        <p:txBody>
+          <a:bodyPr wrap="square" lIns="91440" tIns="45720" rIns="91440" bIns="45720" anchor="ctr">
+            <a:spAutoFit/>
+          </a:bodyPr>
+          <a:lstStyle/>
+          <a:p>
+            <a:r>
+              <a:rPr lang="es-419" sz="4000" b="1" cap="none" spc="0" dirty="0">
+                <a:ln w="22225">
+                  <a:solidFill>
+                    <a:srgbClr val="00965F"/>
+                  </a:solidFill>
+                  <a:prstDash val="solid"/>
+                </a:ln>
+                <a:solidFill>
+                  <a:srgbClr val="00965F"/>
+                </a:solidFill>
+                <a:effectLst/>
+                <a:latin typeface="Cooper Black" panose="020F0502020204030204" pitchFamily="18" charset="0"/>
+              </a:rPr>
+              <a:t>PREGUNTAS PLANTEADAS</a:t>
+            </a:r>
+            <a:endParaRPr lang="es-ES" sz="4000" b="1" cap="none" spc="0" dirty="0">
+              <a:ln w="22225">
+                <a:solidFill>
+                  <a:srgbClr val="00965F"/>
+                </a:solidFill>
+                <a:prstDash val="solid"/>
+              </a:ln>
+              <a:solidFill>
+                <a:srgbClr val="00965F"/>
+              </a:solidFill>
+              <a:effectLst/>
+              <a:latin typeface="Cooper Black" panose="020F0502020204030204" pitchFamily="18" charset="0"/>
+            </a:endParaRPr>
+          </a:p>
+        </p:txBody>
+      </p:sp>
+      <p:sp>
+        <p:nvSpPr>
+          <p:cNvPr id="10" name="CuadroTexto 9">
+            <a:extLst>
+              <a:ext uri="{FF2B5EF4-FFF2-40B4-BE49-F238E27FC236}">
+                <a16:creationId xmlns:a16="http://schemas.microsoft.com/office/drawing/2014/main" id="{2B0005ED-B57A-7259-C5A5-171AFB496A42}"/>
+              </a:ext>
+            </a:extLst>
+          </p:cNvPr>
+          <p:cNvSpPr txBox="1"/>
+          <p:nvPr/>
+        </p:nvSpPr>
+        <p:spPr>
+          <a:xfrm>
+            <a:off x="0" y="707886"/>
+            <a:ext cx="12192000" cy="400110"/>
+          </a:xfrm>
+          <a:prstGeom prst="rect">
+            <a:avLst/>
+          </a:prstGeom>
+          <a:noFill/>
+        </p:spPr>
+        <p:txBody>
+          <a:bodyPr wrap="square" rtlCol="0" anchor="ctr">
+            <a:spAutoFit/>
+          </a:bodyPr>
+          <a:lstStyle/>
+          <a:p>
+            <a:pPr algn="ctr"/>
+            <a:r>
+              <a:rPr lang="es-ES" sz="2000" dirty="0">
+                <a:latin typeface="Times New Roman" panose="02020603050405020304" pitchFamily="18" charset="0"/>
+                <a:cs typeface="Times New Roman" panose="02020603050405020304" pitchFamily="18" charset="0"/>
+              </a:rPr>
+              <a:t>¿Cuál es el número promedio de </a:t>
+            </a:r>
+            <a:r>
+              <a:rPr lang="es-ES" sz="2000" dirty="0" err="1">
+                <a:latin typeface="Times New Roman" panose="02020603050405020304" pitchFamily="18" charset="0"/>
+                <a:cs typeface="Times New Roman" panose="02020603050405020304" pitchFamily="18" charset="0"/>
+              </a:rPr>
+              <a:t>tiquets</a:t>
+            </a:r>
+            <a:r>
+              <a:rPr lang="es-ES" sz="2000" dirty="0">
+                <a:latin typeface="Times New Roman" panose="02020603050405020304" pitchFamily="18" charset="0"/>
+                <a:cs typeface="Times New Roman" panose="02020603050405020304" pitchFamily="18" charset="0"/>
+              </a:rPr>
+              <a:t> por hora y el gasto promedio por compra, según el día y la hora?</a:t>
+            </a:r>
+          </a:p>
+        </p:txBody>
+      </p:sp>
+      <p:pic>
+        <p:nvPicPr>
+          <p:cNvPr id="3" name="Imagen 2" descr="Gráfico, Gráfico de líneas&#10;&#10;El contenido generado por IA puede ser incorrecto.">
+            <a:extLst>
+              <a:ext uri="{FF2B5EF4-FFF2-40B4-BE49-F238E27FC236}">
+                <a16:creationId xmlns:a16="http://schemas.microsoft.com/office/drawing/2014/main" id="{310BED06-0D8C-B129-ECAB-79F5A31CA6D0}"/>
+              </a:ext>
+            </a:extLst>
+          </p:cNvPr>
+          <p:cNvPicPr>
+            <a:picLocks noChangeAspect="1"/>
+          </p:cNvPicPr>
+          <p:nvPr/>
+        </p:nvPicPr>
+        <p:blipFill>
+          <a:blip r:embed="rId2">
+            <a:extLst>
+              <a:ext uri="{28A0092B-C50C-407E-A947-70E740481C1C}">
+                <a14:useLocalDpi xmlns:a14="http://schemas.microsoft.com/office/drawing/2010/main" val="0"/>
+              </a:ext>
+            </a:extLst>
+          </a:blip>
+          <a:stretch>
+            <a:fillRect/>
+          </a:stretch>
+        </p:blipFill>
+        <p:spPr>
+          <a:xfrm>
+            <a:off x="2803421" y="1212170"/>
+            <a:ext cx="6585158" cy="4864166"/>
+          </a:xfrm>
+          <a:prstGeom prst="rect">
+            <a:avLst/>
+          </a:prstGeom>
+        </p:spPr>
+      </p:pic>
+    </p:spTree>
+    <p:extLst>
+      <p:ext uri="{BB962C8B-B14F-4D97-AF65-F5344CB8AC3E}">
+        <p14:creationId xmlns:p14="http://schemas.microsoft.com/office/powerpoint/2010/main" val="3765251628"/>
       </p:ext>
     </p:extLst>
   </p:cSld>
@@ -6694,7 +7843,13 @@
   <p:cSld>
     <p:spTree>
       <p:nvGrpSpPr>
-        <p:cNvPr id="1" name=""/>
+        <p:cNvPr id="1" name="">
+          <a:extLst>
+            <a:ext uri="{FF2B5EF4-FFF2-40B4-BE49-F238E27FC236}">
+              <a16:creationId xmlns:a16="http://schemas.microsoft.com/office/drawing/2014/main" id="{0AE20D71-7F1E-CA9A-FBE7-3D041AEC149A}"/>
+            </a:ext>
+          </a:extLst>
+        </p:cNvPr>
         <p:cNvGrpSpPr/>
         <p:nvPr/>
       </p:nvGrpSpPr>
@@ -6708,90 +7863,10 @@
       </p:grpSpPr>
       <p:sp>
         <p:nvSpPr>
-          <p:cNvPr id="2" name="Título 1">
-            <a:extLst>
-              <a:ext uri="{FF2B5EF4-FFF2-40B4-BE49-F238E27FC236}">
-                <a16:creationId xmlns:a16="http://schemas.microsoft.com/office/drawing/2014/main" id="{14A27815-CA71-B16C-D281-3651B8A210DE}"/>
-              </a:ext>
-            </a:extLst>
-          </p:cNvPr>
-          <p:cNvSpPr>
-            <a:spLocks noGrp="1"/>
-          </p:cNvSpPr>
-          <p:nvPr>
-            <p:ph type="title"/>
-          </p:nvPr>
-        </p:nvSpPr>
-        <p:spPr>
-          <a:xfrm>
-            <a:off x="838200" y="0"/>
-            <a:ext cx="10515600" cy="1325563"/>
-          </a:xfrm>
-        </p:spPr>
-        <p:txBody>
-          <a:bodyPr/>
-          <a:lstStyle/>
-          <a:p>
-            <a:r>
-              <a:rPr lang="es-419" dirty="0">
-                <a:latin typeface="Times New Roman" panose="02020603050405020304" pitchFamily="18" charset="0"/>
-                <a:cs typeface="Times New Roman" panose="02020603050405020304" pitchFamily="18" charset="0"/>
-              </a:rPr>
-              <a:t>Preguntas planteadas.</a:t>
-            </a:r>
-            <a:endParaRPr lang="es-ES" dirty="0"/>
-          </a:p>
-        </p:txBody>
-      </p:sp>
-      <p:sp>
-        <p:nvSpPr>
-          <p:cNvPr id="3" name="Marcador de contenido 2">
-            <a:extLst>
-              <a:ext uri="{FF2B5EF4-FFF2-40B4-BE49-F238E27FC236}">
-                <a16:creationId xmlns:a16="http://schemas.microsoft.com/office/drawing/2014/main" id="{B85F91E4-DB39-D6E1-656F-FBC8F804464C}"/>
-              </a:ext>
-            </a:extLst>
-          </p:cNvPr>
-          <p:cNvSpPr>
-            <a:spLocks noGrp="1"/>
-          </p:cNvSpPr>
-          <p:nvPr>
-            <p:ph idx="1"/>
-          </p:nvPr>
-        </p:nvSpPr>
-        <p:spPr>
-          <a:xfrm>
-            <a:off x="838200" y="1101307"/>
-            <a:ext cx="10515600" cy="4351338"/>
-          </a:xfrm>
-        </p:spPr>
-        <p:txBody>
-          <a:bodyPr>
-            <a:normAutofit/>
-          </a:bodyPr>
-          <a:lstStyle/>
-          <a:p>
-            <a:pPr algn="l"/>
-            <a:r>
-              <a:rPr lang="es-ES" sz="2400" b="0" i="0" u="none" strike="noStrike" baseline="0" dirty="0">
-                <a:latin typeface="Times New Roman" panose="02020603050405020304" pitchFamily="18" charset="0"/>
-                <a:cs typeface="Times New Roman" panose="02020603050405020304" pitchFamily="18" charset="0"/>
-              </a:rPr>
-              <a:t>¿Cuál es el número promedio de tickets por hora y el gasto promedio por compra, según el día y la hora?</a:t>
-            </a:r>
-            <a:endParaRPr lang="es-ES" sz="2400" dirty="0">
-              <a:latin typeface="Times New Roman" panose="02020603050405020304" pitchFamily="18" charset="0"/>
-              <a:cs typeface="Times New Roman" panose="02020603050405020304" pitchFamily="18" charset="0"/>
-            </a:endParaRPr>
-          </a:p>
-        </p:txBody>
-      </p:sp>
-      <p:sp>
-        <p:nvSpPr>
           <p:cNvPr id="4" name="Marcador de pie de página 3">
             <a:extLst>
               <a:ext uri="{FF2B5EF4-FFF2-40B4-BE49-F238E27FC236}">
-                <a16:creationId xmlns:a16="http://schemas.microsoft.com/office/drawing/2014/main" id="{68F263F0-54E5-6189-26F5-57BD709D2839}"/>
+                <a16:creationId xmlns:a16="http://schemas.microsoft.com/office/drawing/2014/main" id="{3D48F1C2-FE5F-512D-4117-8F42C58A5A5E}"/>
               </a:ext>
             </a:extLst>
           </p:cNvPr>
@@ -6820,7 +7895,7 @@
           <p:cNvPr id="5" name="Marcador de número de diapositiva 4">
             <a:extLst>
               <a:ext uri="{FF2B5EF4-FFF2-40B4-BE49-F238E27FC236}">
-                <a16:creationId xmlns:a16="http://schemas.microsoft.com/office/drawing/2014/main" id="{32641850-05E3-DAB2-4BC1-584533388099}"/>
+                <a16:creationId xmlns:a16="http://schemas.microsoft.com/office/drawing/2014/main" id="{45FF3EE8-7B1E-5A90-68DB-E2397682A23C}"/>
               </a:ext>
             </a:extLst>
           </p:cNvPr>
@@ -6845,12 +7920,111 @@
           </a:p>
         </p:txBody>
       </p:sp>
+      <p:sp>
+        <p:nvSpPr>
+          <p:cNvPr id="6" name="Rectángulo 5">
+            <a:extLst>
+              <a:ext uri="{FF2B5EF4-FFF2-40B4-BE49-F238E27FC236}">
+                <a16:creationId xmlns:a16="http://schemas.microsoft.com/office/drawing/2014/main" id="{241CD47B-3BAB-BE40-0076-E4507CF415E3}"/>
+              </a:ext>
+            </a:extLst>
+          </p:cNvPr>
+          <p:cNvSpPr/>
+          <p:nvPr/>
+        </p:nvSpPr>
+        <p:spPr>
+          <a:xfrm>
+            <a:off x="0" y="0"/>
+            <a:ext cx="9350477" cy="707886"/>
+          </a:xfrm>
+          <a:prstGeom prst="rect">
+            <a:avLst/>
+          </a:prstGeom>
+          <a:noFill/>
+        </p:spPr>
+        <p:txBody>
+          <a:bodyPr wrap="square" lIns="91440" tIns="45720" rIns="91440" bIns="45720" anchor="ctr">
+            <a:spAutoFit/>
+          </a:bodyPr>
+          <a:lstStyle/>
+          <a:p>
+            <a:r>
+              <a:rPr lang="es-419" sz="4000" b="1" cap="none" spc="0" dirty="0">
+                <a:ln w="22225">
+                  <a:solidFill>
+                    <a:srgbClr val="00965F"/>
+                  </a:solidFill>
+                  <a:prstDash val="solid"/>
+                </a:ln>
+                <a:solidFill>
+                  <a:srgbClr val="00965F"/>
+                </a:solidFill>
+                <a:effectLst/>
+                <a:latin typeface="Cooper Black" panose="020F0502020204030204" pitchFamily="18" charset="0"/>
+              </a:rPr>
+              <a:t>PREGUNTAS PLANTEADAS</a:t>
+            </a:r>
+            <a:endParaRPr lang="es-ES" sz="4000" b="1" cap="none" spc="0" dirty="0">
+              <a:ln w="22225">
+                <a:solidFill>
+                  <a:srgbClr val="00965F"/>
+                </a:solidFill>
+                <a:prstDash val="solid"/>
+              </a:ln>
+              <a:solidFill>
+                <a:srgbClr val="00965F"/>
+              </a:solidFill>
+              <a:effectLst/>
+              <a:latin typeface="Cooper Black" panose="020F0502020204030204" pitchFamily="18" charset="0"/>
+            </a:endParaRPr>
+          </a:p>
+        </p:txBody>
+      </p:sp>
+      <p:sp>
+        <p:nvSpPr>
+          <p:cNvPr id="10" name="CuadroTexto 9">
+            <a:extLst>
+              <a:ext uri="{FF2B5EF4-FFF2-40B4-BE49-F238E27FC236}">
+                <a16:creationId xmlns:a16="http://schemas.microsoft.com/office/drawing/2014/main" id="{C51AEAEE-06D6-89F1-9E44-45F0625FF6C3}"/>
+              </a:ext>
+            </a:extLst>
+          </p:cNvPr>
+          <p:cNvSpPr txBox="1"/>
+          <p:nvPr/>
+        </p:nvSpPr>
+        <p:spPr>
+          <a:xfrm>
+            <a:off x="0" y="707886"/>
+            <a:ext cx="12192000" cy="400110"/>
+          </a:xfrm>
+          <a:prstGeom prst="rect">
+            <a:avLst/>
+          </a:prstGeom>
+          <a:noFill/>
+        </p:spPr>
+        <p:txBody>
+          <a:bodyPr wrap="square" rtlCol="0" anchor="ctr">
+            <a:spAutoFit/>
+          </a:bodyPr>
+          <a:lstStyle/>
+          <a:p>
+            <a:pPr algn="ctr"/>
+            <a:r>
+              <a:rPr lang="es-ES" sz="2000" dirty="0">
+                <a:latin typeface="Times New Roman" panose="02020603050405020304" pitchFamily="18" charset="0"/>
+                <a:cs typeface="Times New Roman" panose="02020603050405020304" pitchFamily="18" charset="0"/>
+              </a:rPr>
+              <a:t>¿Qué patrones de compra se observan hacia inicio/fin de mes? ¿Cuántas compras incluyen parking?</a:t>
+            </a:r>
+          </a:p>
+        </p:txBody>
+      </p:sp>
       <p:pic>
         <p:nvPicPr>
-          <p:cNvPr id="7" name="Imagen 6" descr="Gráfico, Gráfico de líneas&#10;&#10;El contenido generado por IA puede ser incorrecto.">
-            <a:extLst>
-              <a:ext uri="{FF2B5EF4-FFF2-40B4-BE49-F238E27FC236}">
-                <a16:creationId xmlns:a16="http://schemas.microsoft.com/office/drawing/2014/main" id="{A318844A-BCE8-6F61-A45A-883511680FBC}"/>
+          <p:cNvPr id="8" name="Imagen 7" descr="Gráfico, Gráfico de barras&#10;&#10;El contenido generado por IA puede ser incorrecto.">
+            <a:extLst>
+              <a:ext uri="{FF2B5EF4-FFF2-40B4-BE49-F238E27FC236}">
+                <a16:creationId xmlns:a16="http://schemas.microsoft.com/office/drawing/2014/main" id="{13FD71E3-2C24-ED51-8626-967B7A714DA3}"/>
               </a:ext>
             </a:extLst>
           </p:cNvPr>
@@ -6873,8 +8047,8 @@
         </p:blipFill>
         <p:spPr>
           <a:xfrm>
-            <a:off x="311207" y="2154725"/>
-            <a:ext cx="5335967" cy="3293806"/>
+            <a:off x="1645058" y="1271650"/>
+            <a:ext cx="4787084" cy="4787084"/>
           </a:xfrm>
           <a:prstGeom prst="rect">
             <a:avLst/>
@@ -6883,10 +8057,10 @@
       </p:pic>
       <p:pic>
         <p:nvPicPr>
-          <p:cNvPr id="9" name="Imagen 8" descr="Gráfico&#10;&#10;El contenido generado por IA puede ser incorrecto.">
-            <a:extLst>
-              <a:ext uri="{FF2B5EF4-FFF2-40B4-BE49-F238E27FC236}">
-                <a16:creationId xmlns:a16="http://schemas.microsoft.com/office/drawing/2014/main" id="{DDF13F9D-EFB1-5817-34F0-B2A8A52979AE}"/>
+          <p:cNvPr id="11" name="Imagen 10">
+            <a:extLst>
+              <a:ext uri="{FF2B5EF4-FFF2-40B4-BE49-F238E27FC236}">
+                <a16:creationId xmlns:a16="http://schemas.microsoft.com/office/drawing/2014/main" id="{1DA892EB-9D2F-BBEE-F028-C628BE1CB04D}"/>
               </a:ext>
             </a:extLst>
           </p:cNvPr>
@@ -6896,21 +8070,15 @@
           <p:nvPr/>
         </p:nvPicPr>
         <p:blipFill>
-          <a:blip r:embed="rId3">
-            <a:extLst>
-              <a:ext uri="{28A0092B-C50C-407E-A947-70E740481C1C}">
-                <a14:useLocalDpi xmlns:a14="http://schemas.microsoft.com/office/drawing/2010/main" val="0"/>
-              </a:ext>
-            </a:extLst>
-          </a:blip>
+          <a:blip r:embed="rId3"/>
           <a:stretch>
             <a:fillRect/>
           </a:stretch>
         </p:blipFill>
         <p:spPr>
           <a:xfrm>
-            <a:off x="5767261" y="2154725"/>
-            <a:ext cx="6113532" cy="3773785"/>
+            <a:off x="7677019" y="2814552"/>
+            <a:ext cx="1867161" cy="1228896"/>
           </a:xfrm>
           <a:prstGeom prst="rect">
             <a:avLst/>
@@ -6920,7 +8088,7 @@
     </p:spTree>
     <p:extLst>
       <p:ext uri="{BB962C8B-B14F-4D97-AF65-F5344CB8AC3E}">
-        <p14:creationId xmlns:p14="http://schemas.microsoft.com/office/powerpoint/2010/main" val="520907507"/>
+        <p14:creationId xmlns:p14="http://schemas.microsoft.com/office/powerpoint/2010/main" val="1764851711"/>
       </p:ext>
     </p:extLst>
   </p:cSld>
@@ -6935,7 +8103,13 @@
   <p:cSld>
     <p:spTree>
       <p:nvGrpSpPr>
-        <p:cNvPr id="1" name=""/>
+        <p:cNvPr id="1" name="">
+          <a:extLst>
+            <a:ext uri="{FF2B5EF4-FFF2-40B4-BE49-F238E27FC236}">
+              <a16:creationId xmlns:a16="http://schemas.microsoft.com/office/drawing/2014/main" id="{2B7910DD-A2EC-1455-8829-CDB3325E138E}"/>
+            </a:ext>
+          </a:extLst>
+        </p:cNvPr>
         <p:cNvGrpSpPr/>
         <p:nvPr/>
       </p:nvGrpSpPr>
@@ -6949,55 +8123,10 @@
       </p:grpSpPr>
       <p:sp>
         <p:nvSpPr>
-          <p:cNvPr id="2" name="Título 1">
-            <a:extLst>
-              <a:ext uri="{FF2B5EF4-FFF2-40B4-BE49-F238E27FC236}">
-                <a16:creationId xmlns:a16="http://schemas.microsoft.com/office/drawing/2014/main" id="{03EC7316-74DE-F572-3BE4-1765DF7B9245}"/>
-              </a:ext>
-            </a:extLst>
-          </p:cNvPr>
-          <p:cNvSpPr>
-            <a:spLocks noGrp="1"/>
-          </p:cNvSpPr>
-          <p:nvPr>
-            <p:ph type="title"/>
-          </p:nvPr>
-        </p:nvSpPr>
-        <p:spPr>
-          <a:xfrm>
-            <a:off x="838200" y="116637"/>
-            <a:ext cx="10515600" cy="1325563"/>
-          </a:xfrm>
-        </p:spPr>
-        <p:txBody>
-          <a:bodyPr>
-            <a:normAutofit/>
-          </a:bodyPr>
-          <a:lstStyle/>
-          <a:p>
-            <a:r>
-              <a:rPr lang="es-ES" sz="2800" b="0" i="0" u="none" strike="noStrike" baseline="0" dirty="0">
-                <a:latin typeface="Times New Roman" panose="02020603050405020304" pitchFamily="18" charset="0"/>
-                <a:cs typeface="Times New Roman" panose="02020603050405020304" pitchFamily="18" charset="0"/>
-              </a:rPr>
-              <a:t>¿Qué patrones de compra se observan hacia inicio/fin de mes? ¿Cuántas compras incluyen parking?</a:t>
-            </a:r>
-            <a:br>
-              <a:rPr lang="es-ES" sz="2800" dirty="0">
-                <a:latin typeface="Times New Roman" panose="02020603050405020304" pitchFamily="18" charset="0"/>
-                <a:cs typeface="Times New Roman" panose="02020603050405020304" pitchFamily="18" charset="0"/>
-              </a:rPr>
-            </a:br>
-            <a:endParaRPr lang="es-ES" sz="2800" dirty="0"/>
-          </a:p>
-        </p:txBody>
-      </p:sp>
-      <p:sp>
-        <p:nvSpPr>
           <p:cNvPr id="4" name="Marcador de pie de página 3">
             <a:extLst>
               <a:ext uri="{FF2B5EF4-FFF2-40B4-BE49-F238E27FC236}">
-                <a16:creationId xmlns:a16="http://schemas.microsoft.com/office/drawing/2014/main" id="{50FFA7A8-247D-B652-7FAF-6D2215912C14}"/>
+                <a16:creationId xmlns:a16="http://schemas.microsoft.com/office/drawing/2014/main" id="{268F4811-3156-8EC4-D705-70079E724994}"/>
               </a:ext>
             </a:extLst>
           </p:cNvPr>
@@ -7026,7 +8155,7 @@
           <p:cNvPr id="5" name="Marcador de número de diapositiva 4">
             <a:extLst>
               <a:ext uri="{FF2B5EF4-FFF2-40B4-BE49-F238E27FC236}">
-                <a16:creationId xmlns:a16="http://schemas.microsoft.com/office/drawing/2014/main" id="{8EBEC69F-F787-112C-D408-A28F9E251EB8}"/>
+                <a16:creationId xmlns:a16="http://schemas.microsoft.com/office/drawing/2014/main" id="{4B148891-3581-FC1C-EDD4-CF6BB920CF14}"/>
               </a:ext>
             </a:extLst>
           </p:cNvPr>
@@ -7051,12 +8180,121 @@
           </a:p>
         </p:txBody>
       </p:sp>
+      <p:sp>
+        <p:nvSpPr>
+          <p:cNvPr id="6" name="Rectángulo 5">
+            <a:extLst>
+              <a:ext uri="{FF2B5EF4-FFF2-40B4-BE49-F238E27FC236}">
+                <a16:creationId xmlns:a16="http://schemas.microsoft.com/office/drawing/2014/main" id="{C8B96C2B-EDBD-D775-8974-3691DB488422}"/>
+              </a:ext>
+            </a:extLst>
+          </p:cNvPr>
+          <p:cNvSpPr/>
+          <p:nvPr/>
+        </p:nvSpPr>
+        <p:spPr>
+          <a:xfrm>
+            <a:off x="0" y="0"/>
+            <a:ext cx="9350477" cy="707886"/>
+          </a:xfrm>
+          <a:prstGeom prst="rect">
+            <a:avLst/>
+          </a:prstGeom>
+          <a:noFill/>
+        </p:spPr>
+        <p:txBody>
+          <a:bodyPr wrap="square" lIns="91440" tIns="45720" rIns="91440" bIns="45720" anchor="ctr">
+            <a:spAutoFit/>
+          </a:bodyPr>
+          <a:lstStyle/>
+          <a:p>
+            <a:r>
+              <a:rPr lang="es-419" sz="4000" b="1" cap="none" spc="0" dirty="0">
+                <a:ln w="22225">
+                  <a:solidFill>
+                    <a:srgbClr val="00965F"/>
+                  </a:solidFill>
+                  <a:prstDash val="solid"/>
+                </a:ln>
+                <a:solidFill>
+                  <a:srgbClr val="00965F"/>
+                </a:solidFill>
+                <a:effectLst/>
+                <a:latin typeface="Cooper Black" panose="020F0502020204030204" pitchFamily="18" charset="0"/>
+              </a:rPr>
+              <a:t>PREGUNTAS PLANTEADAS</a:t>
+            </a:r>
+            <a:endParaRPr lang="es-ES" sz="4000" b="1" cap="none" spc="0" dirty="0">
+              <a:ln w="22225">
+                <a:solidFill>
+                  <a:srgbClr val="00965F"/>
+                </a:solidFill>
+                <a:prstDash val="solid"/>
+              </a:ln>
+              <a:solidFill>
+                <a:srgbClr val="00965F"/>
+              </a:solidFill>
+              <a:effectLst/>
+              <a:latin typeface="Cooper Black" panose="020F0502020204030204" pitchFamily="18" charset="0"/>
+            </a:endParaRPr>
+          </a:p>
+        </p:txBody>
+      </p:sp>
+      <p:sp>
+        <p:nvSpPr>
+          <p:cNvPr id="10" name="CuadroTexto 9">
+            <a:extLst>
+              <a:ext uri="{FF2B5EF4-FFF2-40B4-BE49-F238E27FC236}">
+                <a16:creationId xmlns:a16="http://schemas.microsoft.com/office/drawing/2014/main" id="{9AB67E76-BA0D-51AA-FCEA-C04E9E0ED434}"/>
+              </a:ext>
+            </a:extLst>
+          </p:cNvPr>
+          <p:cNvSpPr txBox="1"/>
+          <p:nvPr/>
+        </p:nvSpPr>
+        <p:spPr>
+          <a:xfrm>
+            <a:off x="0" y="553998"/>
+            <a:ext cx="12192000" cy="707886"/>
+          </a:xfrm>
+          <a:prstGeom prst="rect">
+            <a:avLst/>
+          </a:prstGeom>
+          <a:noFill/>
+        </p:spPr>
+        <p:txBody>
+          <a:bodyPr wrap="square" rtlCol="0" anchor="ctr">
+            <a:spAutoFit/>
+          </a:bodyPr>
+          <a:lstStyle/>
+          <a:p>
+            <a:pPr algn="ctr"/>
+            <a:r>
+              <a:rPr lang="es-ES" sz="2000" dirty="0">
+                <a:latin typeface="Times New Roman" panose="02020603050405020304" pitchFamily="18" charset="0"/>
+                <a:cs typeface="Times New Roman" panose="02020603050405020304" pitchFamily="18" charset="0"/>
+              </a:rPr>
+              <a:t>¿Cuáles son los 5 productos, de los vendidos por unidades, con más ventas? </a:t>
+            </a:r>
+          </a:p>
+          <a:p>
+            <a:pPr algn="ctr"/>
+            <a:r>
+              <a:rPr lang="es-ES" sz="2000" dirty="0">
+                <a:latin typeface="Times New Roman" panose="02020603050405020304" pitchFamily="18" charset="0"/>
+                <a:cs typeface="Times New Roman" panose="02020603050405020304" pitchFamily="18" charset="0"/>
+              </a:rPr>
+              <a:t>¿Cuántas unidades de cada uno se han vendido?</a:t>
+            </a:r>
+          </a:p>
+        </p:txBody>
+      </p:sp>
       <p:pic>
         <p:nvPicPr>
-          <p:cNvPr id="7" name="Imagen 6" descr="Gráfico&#10;&#10;El contenido generado por IA puede ser incorrecto.">
-            <a:extLst>
-              <a:ext uri="{FF2B5EF4-FFF2-40B4-BE49-F238E27FC236}">
-                <a16:creationId xmlns:a16="http://schemas.microsoft.com/office/drawing/2014/main" id="{5E5FCE37-4709-F23D-1009-D59604F779AB}"/>
+          <p:cNvPr id="3" name="Imagen 2" descr="Gráfico, Gráfico de barras&#10;&#10;El contenido generado por IA puede ser incorrecto.">
+            <a:extLst>
+              <a:ext uri="{FF2B5EF4-FFF2-40B4-BE49-F238E27FC236}">
+                <a16:creationId xmlns:a16="http://schemas.microsoft.com/office/drawing/2014/main" id="{DEF774F6-C97E-5C44-089D-53B4A6551F06}"/>
               </a:ext>
             </a:extLst>
           </p:cNvPr>
@@ -7079,8 +8317,8 @@
         </p:blipFill>
         <p:spPr>
           <a:xfrm>
-            <a:off x="1185744" y="1102015"/>
-            <a:ext cx="3582902" cy="2326985"/>
+            <a:off x="6577781" y="1375371"/>
+            <a:ext cx="4626083" cy="4626083"/>
           </a:xfrm>
           <a:prstGeom prst="rect">
             <a:avLst/>
@@ -7089,10 +8327,10 @@
       </p:pic>
       <p:pic>
         <p:nvPicPr>
-          <p:cNvPr id="9" name="Imagen 8" descr="Gráfico&#10;&#10;El contenido generado por IA puede ser incorrecto.">
-            <a:extLst>
-              <a:ext uri="{FF2B5EF4-FFF2-40B4-BE49-F238E27FC236}">
-                <a16:creationId xmlns:a16="http://schemas.microsoft.com/office/drawing/2014/main" id="{32709671-3276-A6C5-F018-1AB18AC99EE0}"/>
+          <p:cNvPr id="8" name="Imagen 7" descr="Interfaz de usuario gráfica, Aplicación&#10;&#10;El contenido generado por IA puede ser incorrecto.">
+            <a:extLst>
+              <a:ext uri="{FF2B5EF4-FFF2-40B4-BE49-F238E27FC236}">
+                <a16:creationId xmlns:a16="http://schemas.microsoft.com/office/drawing/2014/main" id="{C920197C-734F-343C-62C6-630EDDB53DE9}"/>
               </a:ext>
             </a:extLst>
           </p:cNvPr>
@@ -7115,80 +8353,8 @@
         </p:blipFill>
         <p:spPr>
           <a:xfrm>
-            <a:off x="6931739" y="779418"/>
-            <a:ext cx="3582902" cy="2540518"/>
-          </a:xfrm>
-          <a:prstGeom prst="rect">
-            <a:avLst/>
-          </a:prstGeom>
-        </p:spPr>
-      </p:pic>
-      <p:pic>
-        <p:nvPicPr>
-          <p:cNvPr id="11" name="Imagen 10" descr="Gráfico, Gráfico de barras&#10;&#10;El contenido generado por IA puede ser incorrecto.">
-            <a:extLst>
-              <a:ext uri="{FF2B5EF4-FFF2-40B4-BE49-F238E27FC236}">
-                <a16:creationId xmlns:a16="http://schemas.microsoft.com/office/drawing/2014/main" id="{BF17419F-659E-221B-124B-A0FFFC3C2716}"/>
-              </a:ext>
-            </a:extLst>
-          </p:cNvPr>
-          <p:cNvPicPr>
-            <a:picLocks noChangeAspect="1"/>
-          </p:cNvPicPr>
-          <p:nvPr/>
-        </p:nvPicPr>
-        <p:blipFill>
-          <a:blip r:embed="rId4">
-            <a:extLst>
-              <a:ext uri="{28A0092B-C50C-407E-A947-70E740481C1C}">
-                <a14:useLocalDpi xmlns:a14="http://schemas.microsoft.com/office/drawing/2010/main" val="0"/>
-              </a:ext>
-            </a:extLst>
-          </a:blip>
-          <a:stretch>
-            <a:fillRect/>
-          </a:stretch>
-        </p:blipFill>
-        <p:spPr>
-          <a:xfrm>
-            <a:off x="1337662" y="3319936"/>
-            <a:ext cx="3279065" cy="2540518"/>
-          </a:xfrm>
-          <a:prstGeom prst="rect">
-            <a:avLst/>
-          </a:prstGeom>
-        </p:spPr>
-      </p:pic>
-      <p:pic>
-        <p:nvPicPr>
-          <p:cNvPr id="13" name="Imagen 12" descr="Gráfico&#10;&#10;El contenido generado por IA puede ser incorrecto.">
-            <a:extLst>
-              <a:ext uri="{FF2B5EF4-FFF2-40B4-BE49-F238E27FC236}">
-                <a16:creationId xmlns:a16="http://schemas.microsoft.com/office/drawing/2014/main" id="{4EC4666E-8962-3059-62AF-B7FCC0A19EA9}"/>
-              </a:ext>
-            </a:extLst>
-          </p:cNvPr>
-          <p:cNvPicPr>
-            <a:picLocks noChangeAspect="1"/>
-          </p:cNvPicPr>
-          <p:nvPr/>
-        </p:nvPicPr>
-        <p:blipFill>
-          <a:blip r:embed="rId5">
-            <a:extLst>
-              <a:ext uri="{28A0092B-C50C-407E-A947-70E740481C1C}">
-                <a14:useLocalDpi xmlns:a14="http://schemas.microsoft.com/office/drawing/2010/main" val="0"/>
-              </a:ext>
-            </a:extLst>
-          </a:blip>
-          <a:stretch>
-            <a:fillRect/>
-          </a:stretch>
-        </p:blipFill>
-        <p:spPr>
-          <a:xfrm>
-            <a:off x="6931739" y="3241505"/>
-            <a:ext cx="3279064" cy="2697380"/>
+            <a:off x="776289" y="1953279"/>
+            <a:ext cx="4837931" cy="2951442"/>
           </a:xfrm>
           <a:prstGeom prst="rect">
             <a:avLst/>
@@ -7198,7 +8364,7 @@
     </p:spTree>
     <p:extLst>
       <p:ext uri="{BB962C8B-B14F-4D97-AF65-F5344CB8AC3E}">
-        <p14:creationId xmlns:p14="http://schemas.microsoft.com/office/powerpoint/2010/main" val="1719055298"/>
+        <p14:creationId xmlns:p14="http://schemas.microsoft.com/office/powerpoint/2010/main" val="2162816082"/>
       </p:ext>
     </p:extLst>
   </p:cSld>
@@ -7213,7 +8379,13 @@
   <p:cSld>
     <p:spTree>
       <p:nvGrpSpPr>
-        <p:cNvPr id="1" name=""/>
+        <p:cNvPr id="1" name="">
+          <a:extLst>
+            <a:ext uri="{FF2B5EF4-FFF2-40B4-BE49-F238E27FC236}">
+              <a16:creationId xmlns:a16="http://schemas.microsoft.com/office/drawing/2014/main" id="{EADC92DC-0667-5827-836C-7906CD2A87A2}"/>
+            </a:ext>
+          </a:extLst>
+        </p:cNvPr>
         <p:cNvGrpSpPr/>
         <p:nvPr/>
       </p:nvGrpSpPr>
@@ -7227,90 +8399,10 @@
       </p:grpSpPr>
       <p:sp>
         <p:nvSpPr>
-          <p:cNvPr id="2" name="Título 1">
-            <a:extLst>
-              <a:ext uri="{FF2B5EF4-FFF2-40B4-BE49-F238E27FC236}">
-                <a16:creationId xmlns:a16="http://schemas.microsoft.com/office/drawing/2014/main" id="{854E7235-2E11-867B-4090-2B736583A857}"/>
-              </a:ext>
-            </a:extLst>
-          </p:cNvPr>
-          <p:cNvSpPr>
-            <a:spLocks noGrp="1"/>
-          </p:cNvSpPr>
-          <p:nvPr>
-            <p:ph type="title"/>
-          </p:nvPr>
-        </p:nvSpPr>
-        <p:spPr>
-          <a:xfrm>
-            <a:off x="759542" y="0"/>
-            <a:ext cx="10515600" cy="1325563"/>
-          </a:xfrm>
-        </p:spPr>
-        <p:txBody>
-          <a:bodyPr/>
-          <a:lstStyle/>
-          <a:p>
-            <a:r>
-              <a:rPr lang="es-419" dirty="0">
-                <a:latin typeface="Times New Roman" panose="02020603050405020304" pitchFamily="18" charset="0"/>
-                <a:cs typeface="Times New Roman" panose="02020603050405020304" pitchFamily="18" charset="0"/>
-              </a:rPr>
-              <a:t>Preguntas planteadas.</a:t>
-            </a:r>
-            <a:endParaRPr lang="es-ES" dirty="0"/>
-          </a:p>
-        </p:txBody>
-      </p:sp>
-      <p:sp>
-        <p:nvSpPr>
-          <p:cNvPr id="3" name="Marcador de contenido 2">
-            <a:extLst>
-              <a:ext uri="{FF2B5EF4-FFF2-40B4-BE49-F238E27FC236}">
-                <a16:creationId xmlns:a16="http://schemas.microsoft.com/office/drawing/2014/main" id="{59D07E60-E40D-566C-6875-4F48D9EC8318}"/>
-              </a:ext>
-            </a:extLst>
-          </p:cNvPr>
-          <p:cNvSpPr>
-            <a:spLocks noGrp="1"/>
-          </p:cNvSpPr>
-          <p:nvPr>
-            <p:ph idx="1"/>
-          </p:nvPr>
-        </p:nvSpPr>
-        <p:spPr>
-          <a:xfrm>
-            <a:off x="759542" y="1054495"/>
-            <a:ext cx="10515600" cy="4351338"/>
-          </a:xfrm>
-        </p:spPr>
-        <p:txBody>
-          <a:bodyPr>
-            <a:normAutofit/>
-          </a:bodyPr>
-          <a:lstStyle/>
-          <a:p>
-            <a:pPr algn="l"/>
-            <a:r>
-              <a:rPr lang="es-ES" sz="2400" b="0" i="0" u="none" strike="noStrike" baseline="0" dirty="0">
-                <a:latin typeface="Times New Roman" panose="02020603050405020304" pitchFamily="18" charset="0"/>
-                <a:cs typeface="Times New Roman" panose="02020603050405020304" pitchFamily="18" charset="0"/>
-              </a:rPr>
-              <a:t>¿Cuáles son los 5 productos, de los vendidos por unidades, con más ventas? ¿Cuántas unidades de cada uno se han vendido?</a:t>
-            </a:r>
-            <a:endParaRPr lang="es-ES" sz="2400" dirty="0">
-              <a:latin typeface="Times New Roman" panose="02020603050405020304" pitchFamily="18" charset="0"/>
-              <a:cs typeface="Times New Roman" panose="02020603050405020304" pitchFamily="18" charset="0"/>
-            </a:endParaRPr>
-          </a:p>
-        </p:txBody>
-      </p:sp>
-      <p:sp>
-        <p:nvSpPr>
           <p:cNvPr id="4" name="Marcador de pie de página 3">
             <a:extLst>
               <a:ext uri="{FF2B5EF4-FFF2-40B4-BE49-F238E27FC236}">
-                <a16:creationId xmlns:a16="http://schemas.microsoft.com/office/drawing/2014/main" id="{34443192-988A-EEEF-4918-7E2C31F37D26}"/>
+                <a16:creationId xmlns:a16="http://schemas.microsoft.com/office/drawing/2014/main" id="{4C0C62CF-9DDC-EDB1-593A-A2FA1FFD9BDB}"/>
               </a:ext>
             </a:extLst>
           </p:cNvPr>
@@ -7339,7 +8431,7 @@
           <p:cNvPr id="5" name="Marcador de número de diapositiva 4">
             <a:extLst>
               <a:ext uri="{FF2B5EF4-FFF2-40B4-BE49-F238E27FC236}">
-                <a16:creationId xmlns:a16="http://schemas.microsoft.com/office/drawing/2014/main" id="{7E1AE1CA-A7B1-A35C-AF62-E202AAE4DFF3}"/>
+                <a16:creationId xmlns:a16="http://schemas.microsoft.com/office/drawing/2014/main" id="{A6251369-98AB-D93F-D2EF-20BDBFE9DE4B}"/>
               </a:ext>
             </a:extLst>
           </p:cNvPr>
@@ -7364,12 +8456,111 @@
           </a:p>
         </p:txBody>
       </p:sp>
+      <p:sp>
+        <p:nvSpPr>
+          <p:cNvPr id="6" name="Rectángulo 5">
+            <a:extLst>
+              <a:ext uri="{FF2B5EF4-FFF2-40B4-BE49-F238E27FC236}">
+                <a16:creationId xmlns:a16="http://schemas.microsoft.com/office/drawing/2014/main" id="{408D4B0A-5C5A-6E09-B2B6-A45C976AF3BF}"/>
+              </a:ext>
+            </a:extLst>
+          </p:cNvPr>
+          <p:cNvSpPr/>
+          <p:nvPr/>
+        </p:nvSpPr>
+        <p:spPr>
+          <a:xfrm>
+            <a:off x="0" y="0"/>
+            <a:ext cx="9350477" cy="707886"/>
+          </a:xfrm>
+          <a:prstGeom prst="rect">
+            <a:avLst/>
+          </a:prstGeom>
+          <a:noFill/>
+        </p:spPr>
+        <p:txBody>
+          <a:bodyPr wrap="square" lIns="91440" tIns="45720" rIns="91440" bIns="45720" anchor="ctr">
+            <a:spAutoFit/>
+          </a:bodyPr>
+          <a:lstStyle/>
+          <a:p>
+            <a:r>
+              <a:rPr lang="es-419" sz="4000" b="1" cap="none" spc="0" dirty="0">
+                <a:ln w="22225">
+                  <a:solidFill>
+                    <a:srgbClr val="00965F"/>
+                  </a:solidFill>
+                  <a:prstDash val="solid"/>
+                </a:ln>
+                <a:solidFill>
+                  <a:srgbClr val="00965F"/>
+                </a:solidFill>
+                <a:effectLst/>
+                <a:latin typeface="Cooper Black" panose="020F0502020204030204" pitchFamily="18" charset="0"/>
+              </a:rPr>
+              <a:t>PREGUNTAS PLANTEADAS</a:t>
+            </a:r>
+            <a:endParaRPr lang="es-ES" sz="4000" b="1" cap="none" spc="0" dirty="0">
+              <a:ln w="22225">
+                <a:solidFill>
+                  <a:srgbClr val="00965F"/>
+                </a:solidFill>
+                <a:prstDash val="solid"/>
+              </a:ln>
+              <a:solidFill>
+                <a:srgbClr val="00965F"/>
+              </a:solidFill>
+              <a:effectLst/>
+              <a:latin typeface="Cooper Black" panose="020F0502020204030204" pitchFamily="18" charset="0"/>
+            </a:endParaRPr>
+          </a:p>
+        </p:txBody>
+      </p:sp>
+      <p:sp>
+        <p:nvSpPr>
+          <p:cNvPr id="10" name="CuadroTexto 9">
+            <a:extLst>
+              <a:ext uri="{FF2B5EF4-FFF2-40B4-BE49-F238E27FC236}">
+                <a16:creationId xmlns:a16="http://schemas.microsoft.com/office/drawing/2014/main" id="{3B0E7D5C-4367-6B58-1BB0-A06468A6B88F}"/>
+              </a:ext>
+            </a:extLst>
+          </p:cNvPr>
+          <p:cNvSpPr txBox="1"/>
+          <p:nvPr/>
+        </p:nvSpPr>
+        <p:spPr>
+          <a:xfrm>
+            <a:off x="0" y="707886"/>
+            <a:ext cx="12192000" cy="400110"/>
+          </a:xfrm>
+          <a:prstGeom prst="rect">
+            <a:avLst/>
+          </a:prstGeom>
+          <a:noFill/>
+        </p:spPr>
+        <p:txBody>
+          <a:bodyPr wrap="square" rtlCol="0" anchor="ctr">
+            <a:spAutoFit/>
+          </a:bodyPr>
+          <a:lstStyle/>
+          <a:p>
+            <a:pPr algn="ctr"/>
+            <a:r>
+              <a:rPr lang="es-ES" sz="2000" dirty="0">
+                <a:latin typeface="Times New Roman" panose="02020603050405020304" pitchFamily="18" charset="0"/>
+                <a:cs typeface="Times New Roman" panose="02020603050405020304" pitchFamily="18" charset="0"/>
+              </a:rPr>
+              <a:t>¿Qué combinaciones de productos se compran con mayor frecuencia en una misma factura?</a:t>
+            </a:r>
+          </a:p>
+        </p:txBody>
+      </p:sp>
       <p:pic>
         <p:nvPicPr>
-          <p:cNvPr id="7" name="Imagen 6" descr="Gráfico, Gráfico de barras&#10;&#10;El contenido generado por IA puede ser incorrecto.">
-            <a:extLst>
-              <a:ext uri="{FF2B5EF4-FFF2-40B4-BE49-F238E27FC236}">
-                <a16:creationId xmlns:a16="http://schemas.microsoft.com/office/drawing/2014/main" id="{B0D5DC96-EDFA-8ADC-CC07-AF80E465E845}"/>
+          <p:cNvPr id="3" name="Imagen 2" descr="Gráfico, Gráfico de cajas y bigotes&#10;&#10;El contenido generado por IA puede ser incorrecto.">
+            <a:extLst>
+              <a:ext uri="{FF2B5EF4-FFF2-40B4-BE49-F238E27FC236}">
+                <a16:creationId xmlns:a16="http://schemas.microsoft.com/office/drawing/2014/main" id="{CDF86E0A-2606-CFD3-29A2-EFA18665A251}"/>
               </a:ext>
             </a:extLst>
           </p:cNvPr>
@@ -7392,8 +8583,8 @@
         </p:blipFill>
         <p:spPr>
           <a:xfrm>
-            <a:off x="684957" y="1927347"/>
-            <a:ext cx="3876158" cy="3876158"/>
+            <a:off x="6415554" y="1341513"/>
+            <a:ext cx="4714573" cy="4714573"/>
           </a:xfrm>
           <a:prstGeom prst="rect">
             <a:avLst/>
@@ -7402,10 +8593,10 @@
       </p:pic>
       <p:pic>
         <p:nvPicPr>
-          <p:cNvPr id="11" name="Imagen 10" descr="Interfaz de usuario gráfica, Aplicación&#10;&#10;El contenido generado por IA puede ser incorrecto.">
-            <a:extLst>
-              <a:ext uri="{FF2B5EF4-FFF2-40B4-BE49-F238E27FC236}">
-                <a16:creationId xmlns:a16="http://schemas.microsoft.com/office/drawing/2014/main" id="{0049601F-B0B9-515A-70F6-43AC78ED6896}"/>
+          <p:cNvPr id="8" name="Imagen 7" descr="Interfaz de usuario gráfica, Texto, Aplicación&#10;&#10;El contenido generado por IA puede ser incorrecto.">
+            <a:extLst>
+              <a:ext uri="{FF2B5EF4-FFF2-40B4-BE49-F238E27FC236}">
+                <a16:creationId xmlns:a16="http://schemas.microsoft.com/office/drawing/2014/main" id="{79A34736-E211-71ED-8602-B868279BB9E9}"/>
               </a:ext>
             </a:extLst>
           </p:cNvPr>
@@ -7428,8 +8619,8 @@
         </p:blipFill>
         <p:spPr>
           <a:xfrm>
-            <a:off x="5797134" y="2380058"/>
-            <a:ext cx="5552593" cy="3130033"/>
+            <a:off x="666443" y="2038350"/>
+            <a:ext cx="5353050" cy="2781300"/>
           </a:xfrm>
           <a:prstGeom prst="rect">
             <a:avLst/>
@@ -7439,7 +8630,7 @@
     </p:spTree>
     <p:extLst>
       <p:ext uri="{BB962C8B-B14F-4D97-AF65-F5344CB8AC3E}">
-        <p14:creationId xmlns:p14="http://schemas.microsoft.com/office/powerpoint/2010/main" val="830202526"/>
+        <p14:creationId xmlns:p14="http://schemas.microsoft.com/office/powerpoint/2010/main" val="479197448"/>
       </p:ext>
     </p:extLst>
   </p:cSld>
